--- a/Adstra_Fall_GTM.pptx
+++ b/Adstra_Fall_GTM.pptx
@@ -1302,7 +1302,7 @@
     <p:bg>
       <p:bgPr>
         <a:solidFill>
-          <a:srgbClr val="281A48"/>
+          <a:srgbClr val="461478"/>
         </a:solidFill>
       </p:bgPr>
     </p:bg>
@@ -1320,16 +1320,64 @@
           <a:chExt cx="0" cy="0"/>
         </a:xfrm>
       </p:grpSpPr>
-      <p:sp>
-        <p:nvSpPr>
-          <p:cNvPr id="2" name="Text 0"/>
-          <p:cNvSpPr/>
-          <p:nvPr/>
-        </p:nvSpPr>
-        <p:spPr>
-          <a:xfrm>
-            <a:off x="548640" y="640080"/>
-            <a:ext cx="11091672" cy="320040"/>
+      <p:pic>
+        <p:nvPicPr>
+          <p:cNvPr id="2" name="Image 0" descr="title_bg.png">    </p:cNvPr>
+          <p:cNvPicPr>
+            <a:picLocks noChangeAspect="1"/>
+          </p:cNvPicPr>
+          <p:nvPr/>
+        </p:nvPicPr>
+        <p:blipFill>
+          <a:blip r:embed="rId1"/>
+          <a:stretch>
+            <a:fillRect/>
+          </a:stretch>
+        </p:blipFill>
+        <p:spPr>
+          <a:xfrm>
+            <a:off x="0" y="0"/>
+            <a:ext cx="12188952" cy="6858000"/>
+          </a:xfrm>
+          <a:prstGeom prst="rect">
+            <a:avLst/>
+          </a:prstGeom>
+        </p:spPr>
+      </p:pic>
+      <p:pic>
+        <p:nvPicPr>
+          <p:cNvPr id="3" name="Image 1" descr="logo_white.png">    </p:cNvPr>
+          <p:cNvPicPr>
+            <a:picLocks noChangeAspect="1"/>
+          </p:cNvPicPr>
+          <p:nvPr/>
+        </p:nvPicPr>
+        <p:blipFill>
+          <a:blip r:embed="rId2"/>
+          <a:stretch>
+            <a:fillRect/>
+          </a:stretch>
+        </p:blipFill>
+        <p:spPr>
+          <a:xfrm>
+            <a:off x="548640" y="502920"/>
+            <a:ext cx="1737360" cy="468273"/>
+          </a:xfrm>
+          <a:prstGeom prst="rect">
+            <a:avLst/>
+          </a:prstGeom>
+        </p:spPr>
+      </p:pic>
+      <p:sp>
+        <p:nvSpPr>
+          <p:cNvPr id="4" name="Text 0"/>
+          <p:cNvSpPr/>
+          <p:nvPr/>
+        </p:nvSpPr>
+        <p:spPr>
+          <a:xfrm>
+            <a:off x="548640" y="1691640"/>
+            <a:ext cx="9144000" cy="320040"/>
           </a:xfrm>
           <a:prstGeom prst="rect">
             <a:avLst/>
@@ -1347,13 +1395,15 @@
             <a:r>
               <a:rPr lang="en-US" sz="1300" b="1" spc="300" kern="0" dirty="0">
                 <a:solidFill>
-                  <a:srgbClr val="FACC15"/>
-                </a:solidFill>
-                <a:latin typeface="Calibri" pitchFamily="34" charset="0"/>
-                <a:ea typeface="Calibri" pitchFamily="34" charset="-122"/>
-                <a:cs typeface="Calibri" pitchFamily="34" charset="-120"/>
-              </a:rPr>
-              <a:t>FALL 2026 GO-TO-MARKET</a:t>
+                  <a:srgbClr val="FFFFFF">
+                    <a:alpha val="90000"/>
+                  </a:srgbClr>
+                </a:solidFill>
+                <a:latin typeface="Montserrat" pitchFamily="34" charset="0"/>
+                <a:ea typeface="Montserrat" pitchFamily="34" charset="-122"/>
+                <a:cs typeface="Montserrat" pitchFamily="34" charset="-120"/>
+              </a:rPr>
+              <a:t>FALL 2026  ·  GO-TO-MARKET</a:t>
             </a:r>
             <a:endParaRPr lang="en-US" sz="1300" dirty="0"/>
           </a:p>
@@ -1361,14 +1411,14 @@
       </p:sp>
       <p:sp>
         <p:nvSpPr>
-          <p:cNvPr id="3" name="Text 1"/>
-          <p:cNvSpPr/>
-          <p:nvPr/>
-        </p:nvSpPr>
-        <p:spPr>
-          <a:xfrm>
-            <a:off x="548640" y="960120"/>
-            <a:ext cx="11091672" cy="731520"/>
+          <p:cNvPr id="5" name="Text 1"/>
+          <p:cNvSpPr/>
+          <p:nvPr/>
+        </p:nvSpPr>
+        <p:spPr>
+          <a:xfrm>
+            <a:off x="548640" y="2011680"/>
+            <a:ext cx="10515600" cy="914400"/>
           </a:xfrm>
           <a:prstGeom prst="rect">
             <a:avLst/>
@@ -1384,30 +1434,30 @@
               <a:buNone/>
             </a:pPr>
             <a:r>
-              <a:rPr lang="en-US" sz="4000" b="1" dirty="0">
+              <a:rPr lang="en-US" sz="4600" b="1" dirty="0">
                 <a:solidFill>
                   <a:srgbClr val="FFFFFF"/>
                 </a:solidFill>
-                <a:latin typeface="Georgia" pitchFamily="34" charset="0"/>
-                <a:ea typeface="Georgia" pitchFamily="34" charset="-122"/>
-                <a:cs typeface="Georgia" pitchFamily="34" charset="-120"/>
+                <a:latin typeface="Montserrat" pitchFamily="34" charset="0"/>
+                <a:ea typeface="Montserrat" pitchFamily="34" charset="-122"/>
+                <a:cs typeface="Montserrat" pitchFamily="34" charset="-120"/>
               </a:rPr>
               <a:t>Fall GTM Objective</a:t>
             </a:r>
-            <a:endParaRPr lang="en-US" sz="4000" dirty="0"/>
-          </a:p>
-        </p:txBody>
-      </p:sp>
-      <p:sp>
-        <p:nvSpPr>
-          <p:cNvPr id="4" name="Text 2"/>
-          <p:cNvSpPr/>
-          <p:nvPr/>
-        </p:nvSpPr>
-        <p:spPr>
-          <a:xfrm>
-            <a:off x="548640" y="1828800"/>
-            <a:ext cx="10241280" cy="1097280"/>
+            <a:endParaRPr lang="en-US" sz="4600" dirty="0"/>
+          </a:p>
+        </p:txBody>
+      </p:sp>
+      <p:sp>
+        <p:nvSpPr>
+          <p:cNvPr id="6" name="Text 2"/>
+          <p:cNvSpPr/>
+          <p:nvPr/>
+        </p:nvSpPr>
+        <p:spPr>
+          <a:xfrm>
+            <a:off x="548640" y="3063240"/>
+            <a:ext cx="8961120" cy="914400"/>
           </a:xfrm>
           <a:prstGeom prst="rect">
             <a:avLst/>
@@ -1421,84 +1471,57 @@
           <a:p>
             <a:pPr indent="0" marL="0">
               <a:lnSpc>
-                <a:spcPct val="115000"/>
+                <a:spcPct val="120000"/>
               </a:lnSpc>
               <a:buNone/>
             </a:pPr>
             <a:r>
-              <a:rPr lang="en-US" sz="2100" i="1" dirty="0">
-                <a:solidFill>
-                  <a:srgbClr val="C9BCE8"/>
-                </a:solidFill>
-                <a:latin typeface="Georgia" pitchFamily="34" charset="0"/>
-                <a:ea typeface="Georgia" pitchFamily="34" charset="-122"/>
-                <a:cs typeface="Georgia" pitchFamily="34" charset="-120"/>
+              <a:rPr lang="en-US" sz="1800" dirty="0">
+                <a:solidFill>
+                  <a:srgbClr val="EADBFF"/>
+                </a:solidFill>
+                <a:latin typeface="Montserrat" pitchFamily="34" charset="0"/>
+                <a:ea typeface="Montserrat" pitchFamily="34" charset="-122"/>
+                <a:cs typeface="Montserrat" pitchFamily="34" charset="-120"/>
               </a:rPr>
               <a:t>Adstra is targeting data-mature brands and platforms that need identity intelligence inside the environments where their customer data already lives.</a:t>
             </a:r>
-            <a:endParaRPr lang="en-US" sz="2100" dirty="0"/>
-          </a:p>
-        </p:txBody>
-      </p:sp>
-      <p:sp>
-        <p:nvSpPr>
-          <p:cNvPr id="5" name="Shape 3"/>
-          <p:cNvSpPr/>
-          <p:nvPr/>
-        </p:nvSpPr>
-        <p:spPr>
-          <a:xfrm>
-            <a:off x="548640" y="3383280"/>
-            <a:ext cx="2567178" cy="2651760"/>
+            <a:endParaRPr lang="en-US" sz="1800" dirty="0"/>
+          </a:p>
+        </p:txBody>
+      </p:sp>
+      <p:sp>
+        <p:nvSpPr>
+          <p:cNvPr id="7" name="Shape 3"/>
+          <p:cNvSpPr/>
+          <p:nvPr/>
+        </p:nvSpPr>
+        <p:spPr>
+          <a:xfrm>
+            <a:off x="548640" y="5029200"/>
+            <a:ext cx="292608" cy="292608"/>
           </a:xfrm>
           <a:prstGeom prst="roundRect">
             <a:avLst>
-              <a:gd name="adj" fmla="val 2850"/>
+              <a:gd name="adj" fmla="val 15625"/>
             </a:avLst>
           </a:prstGeom>
           <a:solidFill>
-            <a:srgbClr val="0B0616"/>
+            <a:srgbClr val="FAA825"/>
           </a:solidFill>
-          <a:ln w="12700">
-            <a:solidFill>
-              <a:srgbClr val="4A3580"/>
-            </a:solidFill>
-            <a:prstDash val="solid"/>
-          </a:ln>
-        </p:spPr>
-      </p:sp>
-      <p:sp>
-        <p:nvSpPr>
-          <p:cNvPr id="6" name="Shape 4"/>
-          <p:cNvSpPr/>
-          <p:nvPr/>
-        </p:nvSpPr>
-        <p:spPr>
-          <a:xfrm>
-            <a:off x="777240" y="3639312"/>
-            <a:ext cx="457200" cy="457200"/>
-          </a:xfrm>
-          <a:prstGeom prst="roundRect">
-            <a:avLst>
-              <a:gd name="adj" fmla="val 12000"/>
-            </a:avLst>
-          </a:prstGeom>
-          <a:solidFill>
-            <a:srgbClr val="FACC15"/>
-          </a:solidFill>
-          <a:ln/>
-        </p:spPr>
-      </p:sp>
-      <p:sp>
-        <p:nvSpPr>
-          <p:cNvPr id="7" name="Text 5"/>
-          <p:cNvSpPr/>
-          <p:nvPr/>
-        </p:nvSpPr>
-        <p:spPr>
-          <a:xfrm>
-            <a:off x="777240" y="3639312"/>
-            <a:ext cx="457200" cy="457200"/>
+          <a:ln/>
+        </p:spPr>
+      </p:sp>
+      <p:sp>
+        <p:nvSpPr>
+          <p:cNvPr id="8" name="Text 4"/>
+          <p:cNvSpPr/>
+          <p:nvPr/>
+        </p:nvSpPr>
+        <p:spPr>
+          <a:xfrm>
+            <a:off x="960120" y="5001768"/>
+            <a:ext cx="2155698" cy="347472"/>
           </a:xfrm>
           <a:prstGeom prst="rect">
             <a:avLst/>
@@ -1510,56 +1533,17 @@
           <a:bodyPr wrap="square" lIns="0" tIns="0" rIns="0" bIns="0" rtlCol="0" anchor="ctr"/>
           <a:lstStyle/>
           <a:p>
-            <a:pPr algn="ctr" indent="0" marL="0">
-              <a:buNone/>
-            </a:pPr>
-            <a:r>
-              <a:rPr lang="en-US" sz="2000" b="1" dirty="0">
-                <a:solidFill>
-                  <a:srgbClr val="281A48"/>
-                </a:solidFill>
-                <a:latin typeface="Georgia" pitchFamily="34" charset="0"/>
-                <a:ea typeface="Georgia" pitchFamily="34" charset="-122"/>
-                <a:cs typeface="Georgia" pitchFamily="34" charset="-120"/>
-              </a:rPr>
-              <a:t>1</a:t>
-            </a:r>
-            <a:endParaRPr lang="en-US" sz="2000" dirty="0"/>
-          </a:p>
-        </p:txBody>
-      </p:sp>
-      <p:sp>
-        <p:nvSpPr>
-          <p:cNvPr id="8" name="Text 6"/>
-          <p:cNvSpPr/>
-          <p:nvPr/>
-        </p:nvSpPr>
-        <p:spPr>
-          <a:xfrm>
-            <a:off x="777240" y="4251960"/>
-            <a:ext cx="2109978" cy="365760"/>
-          </a:xfrm>
-          <a:prstGeom prst="rect">
-            <a:avLst/>
-          </a:prstGeom>
-          <a:noFill/>
-          <a:ln/>
-        </p:spPr>
-        <p:txBody>
-          <a:bodyPr wrap="square" rtlCol="0" anchor="ctr"/>
-          <a:lstStyle/>
-          <a:p>
             <a:pPr indent="0" marL="0">
               <a:buNone/>
             </a:pPr>
             <a:r>
-              <a:rPr lang="en-US" sz="1300" b="1" spc="150" kern="0" dirty="0">
-                <a:solidFill>
-                  <a:srgbClr val="FACC15"/>
-                </a:solidFill>
-                <a:latin typeface="Calibri" pitchFamily="34" charset="0"/>
-                <a:ea typeface="Calibri" pitchFamily="34" charset="-122"/>
-                <a:cs typeface="Calibri" pitchFamily="34" charset="-120"/>
+              <a:rPr lang="en-US" sz="1300" b="1" spc="100" kern="0" dirty="0">
+                <a:solidFill>
+                  <a:srgbClr val="FFFFFF"/>
+                </a:solidFill>
+                <a:latin typeface="Montserrat" pitchFamily="34" charset="0"/>
+                <a:ea typeface="Montserrat" pitchFamily="34" charset="-122"/>
+                <a:cs typeface="Montserrat" pitchFamily="34" charset="-120"/>
               </a:rPr>
               <a:t>NEW ICP</a:t>
             </a:r>
@@ -1569,23 +1553,23 @@
       </p:sp>
       <p:sp>
         <p:nvSpPr>
-          <p:cNvPr id="9" name="Text 7"/>
-          <p:cNvSpPr/>
-          <p:nvPr/>
-        </p:nvSpPr>
-        <p:spPr>
-          <a:xfrm>
-            <a:off x="777240" y="4617720"/>
-            <a:ext cx="2109978" cy="1280160"/>
-          </a:xfrm>
-          <a:prstGeom prst="rect">
-            <a:avLst/>
-          </a:prstGeom>
-          <a:noFill/>
-          <a:ln/>
-        </p:spPr>
-        <p:txBody>
-          <a:bodyPr wrap="square" rtlCol="0" anchor="t"/>
+          <p:cNvPr id="9" name="Text 5"/>
+          <p:cNvSpPr/>
+          <p:nvPr/>
+        </p:nvSpPr>
+        <p:spPr>
+          <a:xfrm>
+            <a:off x="548640" y="5440680"/>
+            <a:ext cx="2567178" cy="1005840"/>
+          </a:xfrm>
+          <a:prstGeom prst="rect">
+            <a:avLst/>
+          </a:prstGeom>
+          <a:noFill/>
+          <a:ln/>
+        </p:spPr>
+        <p:txBody>
+          <a:bodyPr wrap="square" lIns="0" tIns="0" rIns="0" bIns="0" rtlCol="0" anchor="t"/>
           <a:lstStyle/>
           <a:p>
             <a:pPr indent="0" marL="0">
@@ -1595,79 +1579,52 @@
               <a:buNone/>
             </a:pPr>
             <a:r>
-              <a:rPr lang="en-US" sz="1500" dirty="0">
-                <a:solidFill>
-                  <a:srgbClr val="FFFFFF"/>
-                </a:solidFill>
-                <a:latin typeface="Calibri" pitchFamily="34" charset="0"/>
-                <a:ea typeface="Calibri" pitchFamily="34" charset="-122"/>
-                <a:cs typeface="Calibri" pitchFamily="34" charset="-120"/>
+              <a:rPr lang="en-US" sz="1300" dirty="0">
+                <a:solidFill>
+                  <a:srgbClr val="EADBFF"/>
+                </a:solidFill>
+                <a:latin typeface="Montserrat" pitchFamily="34" charset="0"/>
+                <a:ea typeface="Montserrat" pitchFamily="34" charset="-122"/>
+                <a:cs typeface="Montserrat" pitchFamily="34" charset="-120"/>
               </a:rPr>
               <a:t>Sophisticated brands + platforms</a:t>
             </a:r>
-            <a:endParaRPr lang="en-US" sz="1500" dirty="0"/>
-          </a:p>
-        </p:txBody>
-      </p:sp>
-      <p:sp>
-        <p:nvSpPr>
-          <p:cNvPr id="10" name="Shape 8"/>
-          <p:cNvSpPr/>
-          <p:nvPr/>
-        </p:nvSpPr>
-        <p:spPr>
-          <a:xfrm>
-            <a:off x="3390138" y="3383280"/>
-            <a:ext cx="2567178" cy="2651760"/>
+            <a:endParaRPr lang="en-US" sz="1300" dirty="0"/>
+          </a:p>
+        </p:txBody>
+      </p:sp>
+      <p:sp>
+        <p:nvSpPr>
+          <p:cNvPr id="10" name="Shape 6"/>
+          <p:cNvSpPr/>
+          <p:nvPr/>
+        </p:nvSpPr>
+        <p:spPr>
+          <a:xfrm>
+            <a:off x="3390138" y="5029200"/>
+            <a:ext cx="292608" cy="292608"/>
           </a:xfrm>
           <a:prstGeom prst="roundRect">
             <a:avLst>
-              <a:gd name="adj" fmla="val 2850"/>
+              <a:gd name="adj" fmla="val 15625"/>
             </a:avLst>
           </a:prstGeom>
           <a:solidFill>
-            <a:srgbClr val="0B0616"/>
+            <a:srgbClr val="FAA825"/>
           </a:solidFill>
-          <a:ln w="12700">
-            <a:solidFill>
-              <a:srgbClr val="4A3580"/>
-            </a:solidFill>
-            <a:prstDash val="solid"/>
-          </a:ln>
-        </p:spPr>
-      </p:sp>
-      <p:sp>
-        <p:nvSpPr>
-          <p:cNvPr id="11" name="Shape 9"/>
-          <p:cNvSpPr/>
-          <p:nvPr/>
-        </p:nvSpPr>
-        <p:spPr>
-          <a:xfrm>
-            <a:off x="3618738" y="3639312"/>
-            <a:ext cx="457200" cy="457200"/>
-          </a:xfrm>
-          <a:prstGeom prst="roundRect">
-            <a:avLst>
-              <a:gd name="adj" fmla="val 12000"/>
-            </a:avLst>
-          </a:prstGeom>
-          <a:solidFill>
-            <a:srgbClr val="FACC15"/>
-          </a:solidFill>
-          <a:ln/>
-        </p:spPr>
-      </p:sp>
-      <p:sp>
-        <p:nvSpPr>
-          <p:cNvPr id="12" name="Text 10"/>
-          <p:cNvSpPr/>
-          <p:nvPr/>
-        </p:nvSpPr>
-        <p:spPr>
-          <a:xfrm>
-            <a:off x="3618738" y="3639312"/>
-            <a:ext cx="457200" cy="457200"/>
+          <a:ln/>
+        </p:spPr>
+      </p:sp>
+      <p:sp>
+        <p:nvSpPr>
+          <p:cNvPr id="11" name="Text 7"/>
+          <p:cNvSpPr/>
+          <p:nvPr/>
+        </p:nvSpPr>
+        <p:spPr>
+          <a:xfrm>
+            <a:off x="3801618" y="5001768"/>
+            <a:ext cx="2155698" cy="347472"/>
           </a:xfrm>
           <a:prstGeom prst="rect">
             <a:avLst/>
@@ -1679,56 +1636,17 @@
           <a:bodyPr wrap="square" lIns="0" tIns="0" rIns="0" bIns="0" rtlCol="0" anchor="ctr"/>
           <a:lstStyle/>
           <a:p>
-            <a:pPr algn="ctr" indent="0" marL="0">
-              <a:buNone/>
-            </a:pPr>
-            <a:r>
-              <a:rPr lang="en-US" sz="2000" b="1" dirty="0">
-                <a:solidFill>
-                  <a:srgbClr val="281A48"/>
-                </a:solidFill>
-                <a:latin typeface="Georgia" pitchFamily="34" charset="0"/>
-                <a:ea typeface="Georgia" pitchFamily="34" charset="-122"/>
-                <a:cs typeface="Georgia" pitchFamily="34" charset="-120"/>
-              </a:rPr>
-              <a:t>2</a:t>
-            </a:r>
-            <a:endParaRPr lang="en-US" sz="2000" dirty="0"/>
-          </a:p>
-        </p:txBody>
-      </p:sp>
-      <p:sp>
-        <p:nvSpPr>
-          <p:cNvPr id="13" name="Text 11"/>
-          <p:cNvSpPr/>
-          <p:nvPr/>
-        </p:nvSpPr>
-        <p:spPr>
-          <a:xfrm>
-            <a:off x="3618738" y="4251960"/>
-            <a:ext cx="2109978" cy="365760"/>
-          </a:xfrm>
-          <a:prstGeom prst="rect">
-            <a:avLst/>
-          </a:prstGeom>
-          <a:noFill/>
-          <a:ln/>
-        </p:spPr>
-        <p:txBody>
-          <a:bodyPr wrap="square" rtlCol="0" anchor="ctr"/>
-          <a:lstStyle/>
-          <a:p>
             <a:pPr indent="0" marL="0">
               <a:buNone/>
             </a:pPr>
             <a:r>
-              <a:rPr lang="en-US" sz="1300" b="1" spc="150" kern="0" dirty="0">
-                <a:solidFill>
-                  <a:srgbClr val="FACC15"/>
-                </a:solidFill>
-                <a:latin typeface="Calibri" pitchFamily="34" charset="0"/>
-                <a:ea typeface="Calibri" pitchFamily="34" charset="-122"/>
-                <a:cs typeface="Calibri" pitchFamily="34" charset="-120"/>
+              <a:rPr lang="en-US" sz="1300" b="1" spc="100" kern="0" dirty="0">
+                <a:solidFill>
+                  <a:srgbClr val="FFFFFF"/>
+                </a:solidFill>
+                <a:latin typeface="Montserrat" pitchFamily="34" charset="0"/>
+                <a:ea typeface="Montserrat" pitchFamily="34" charset="-122"/>
+                <a:cs typeface="Montserrat" pitchFamily="34" charset="-120"/>
               </a:rPr>
               <a:t>CORE NEED</a:t>
             </a:r>
@@ -1738,23 +1656,23 @@
       </p:sp>
       <p:sp>
         <p:nvSpPr>
-          <p:cNvPr id="14" name="Text 12"/>
-          <p:cNvSpPr/>
-          <p:nvPr/>
-        </p:nvSpPr>
-        <p:spPr>
-          <a:xfrm>
-            <a:off x="3618738" y="4617720"/>
-            <a:ext cx="2109978" cy="1280160"/>
-          </a:xfrm>
-          <a:prstGeom prst="rect">
-            <a:avLst/>
-          </a:prstGeom>
-          <a:noFill/>
-          <a:ln/>
-        </p:spPr>
-        <p:txBody>
-          <a:bodyPr wrap="square" rtlCol="0" anchor="t"/>
+          <p:cNvPr id="12" name="Text 8"/>
+          <p:cNvSpPr/>
+          <p:nvPr/>
+        </p:nvSpPr>
+        <p:spPr>
+          <a:xfrm>
+            <a:off x="3390138" y="5440680"/>
+            <a:ext cx="2567178" cy="1005840"/>
+          </a:xfrm>
+          <a:prstGeom prst="rect">
+            <a:avLst/>
+          </a:prstGeom>
+          <a:noFill/>
+          <a:ln/>
+        </p:spPr>
+        <p:txBody>
+          <a:bodyPr wrap="square" lIns="0" tIns="0" rIns="0" bIns="0" rtlCol="0" anchor="t"/>
           <a:lstStyle/>
           <a:p>
             <a:pPr indent="0" marL="0">
@@ -1764,79 +1682,52 @@
               <a:buNone/>
             </a:pPr>
             <a:r>
-              <a:rPr lang="en-US" sz="1500" dirty="0">
-                <a:solidFill>
-                  <a:srgbClr val="FFFFFF"/>
-                </a:solidFill>
-                <a:latin typeface="Calibri" pitchFamily="34" charset="0"/>
-                <a:ea typeface="Calibri" pitchFamily="34" charset="-122"/>
-                <a:cs typeface="Calibri" pitchFamily="34" charset="-120"/>
+              <a:rPr lang="en-US" sz="1300" dirty="0">
+                <a:solidFill>
+                  <a:srgbClr val="EADBFF"/>
+                </a:solidFill>
+                <a:latin typeface="Montserrat" pitchFamily="34" charset="0"/>
+                <a:ea typeface="Montserrat" pitchFamily="34" charset="-122"/>
+                <a:cs typeface="Montserrat" pitchFamily="34" charset="-120"/>
               </a:rPr>
               <a:t>Accurate, complete, interoperable identity</a:t>
             </a:r>
-            <a:endParaRPr lang="en-US" sz="1500" dirty="0"/>
-          </a:p>
-        </p:txBody>
-      </p:sp>
-      <p:sp>
-        <p:nvSpPr>
-          <p:cNvPr id="15" name="Shape 13"/>
-          <p:cNvSpPr/>
-          <p:nvPr/>
-        </p:nvSpPr>
-        <p:spPr>
-          <a:xfrm>
-            <a:off x="6231636" y="3383280"/>
-            <a:ext cx="2567178" cy="2651760"/>
+            <a:endParaRPr lang="en-US" sz="1300" dirty="0"/>
+          </a:p>
+        </p:txBody>
+      </p:sp>
+      <p:sp>
+        <p:nvSpPr>
+          <p:cNvPr id="13" name="Shape 9"/>
+          <p:cNvSpPr/>
+          <p:nvPr/>
+        </p:nvSpPr>
+        <p:spPr>
+          <a:xfrm>
+            <a:off x="6231636" y="5029200"/>
+            <a:ext cx="292608" cy="292608"/>
           </a:xfrm>
           <a:prstGeom prst="roundRect">
             <a:avLst>
-              <a:gd name="adj" fmla="val 2850"/>
+              <a:gd name="adj" fmla="val 15625"/>
             </a:avLst>
           </a:prstGeom>
           <a:solidFill>
-            <a:srgbClr val="0B0616"/>
+            <a:srgbClr val="FAA825"/>
           </a:solidFill>
-          <a:ln w="12700">
-            <a:solidFill>
-              <a:srgbClr val="4A3580"/>
-            </a:solidFill>
-            <a:prstDash val="solid"/>
-          </a:ln>
-        </p:spPr>
-      </p:sp>
-      <p:sp>
-        <p:nvSpPr>
-          <p:cNvPr id="16" name="Shape 14"/>
-          <p:cNvSpPr/>
-          <p:nvPr/>
-        </p:nvSpPr>
-        <p:spPr>
-          <a:xfrm>
-            <a:off x="6460236" y="3639312"/>
-            <a:ext cx="457200" cy="457200"/>
-          </a:xfrm>
-          <a:prstGeom prst="roundRect">
-            <a:avLst>
-              <a:gd name="adj" fmla="val 12000"/>
-            </a:avLst>
-          </a:prstGeom>
-          <a:solidFill>
-            <a:srgbClr val="FACC15"/>
-          </a:solidFill>
-          <a:ln/>
-        </p:spPr>
-      </p:sp>
-      <p:sp>
-        <p:nvSpPr>
-          <p:cNvPr id="17" name="Text 15"/>
-          <p:cNvSpPr/>
-          <p:nvPr/>
-        </p:nvSpPr>
-        <p:spPr>
-          <a:xfrm>
-            <a:off x="6460236" y="3639312"/>
-            <a:ext cx="457200" cy="457200"/>
+          <a:ln/>
+        </p:spPr>
+      </p:sp>
+      <p:sp>
+        <p:nvSpPr>
+          <p:cNvPr id="14" name="Text 10"/>
+          <p:cNvSpPr/>
+          <p:nvPr/>
+        </p:nvSpPr>
+        <p:spPr>
+          <a:xfrm>
+            <a:off x="6643116" y="5001768"/>
+            <a:ext cx="2155698" cy="347472"/>
           </a:xfrm>
           <a:prstGeom prst="rect">
             <a:avLst/>
@@ -1848,56 +1739,17 @@
           <a:bodyPr wrap="square" lIns="0" tIns="0" rIns="0" bIns="0" rtlCol="0" anchor="ctr"/>
           <a:lstStyle/>
           <a:p>
-            <a:pPr algn="ctr" indent="0" marL="0">
-              <a:buNone/>
-            </a:pPr>
-            <a:r>
-              <a:rPr lang="en-US" sz="2000" b="1" dirty="0">
-                <a:solidFill>
-                  <a:srgbClr val="281A48"/>
-                </a:solidFill>
-                <a:latin typeface="Georgia" pitchFamily="34" charset="0"/>
-                <a:ea typeface="Georgia" pitchFamily="34" charset="-122"/>
-                <a:cs typeface="Georgia" pitchFamily="34" charset="-120"/>
-              </a:rPr>
-              <a:t>3</a:t>
-            </a:r>
-            <a:endParaRPr lang="en-US" sz="2000" dirty="0"/>
-          </a:p>
-        </p:txBody>
-      </p:sp>
-      <p:sp>
-        <p:nvSpPr>
-          <p:cNvPr id="18" name="Text 16"/>
-          <p:cNvSpPr/>
-          <p:nvPr/>
-        </p:nvSpPr>
-        <p:spPr>
-          <a:xfrm>
-            <a:off x="6460236" y="4251960"/>
-            <a:ext cx="2109978" cy="365760"/>
-          </a:xfrm>
-          <a:prstGeom prst="rect">
-            <a:avLst/>
-          </a:prstGeom>
-          <a:noFill/>
-          <a:ln/>
-        </p:spPr>
-        <p:txBody>
-          <a:bodyPr wrap="square" rtlCol="0" anchor="ctr"/>
-          <a:lstStyle/>
-          <a:p>
             <a:pPr indent="0" marL="0">
               <a:buNone/>
             </a:pPr>
             <a:r>
-              <a:rPr lang="en-US" sz="1300" b="1" spc="150" kern="0" dirty="0">
-                <a:solidFill>
-                  <a:srgbClr val="FACC15"/>
-                </a:solidFill>
-                <a:latin typeface="Calibri" pitchFamily="34" charset="0"/>
-                <a:ea typeface="Calibri" pitchFamily="34" charset="-122"/>
-                <a:cs typeface="Calibri" pitchFamily="34" charset="-120"/>
+              <a:rPr lang="en-US" sz="1300" b="1" spc="100" kern="0" dirty="0">
+                <a:solidFill>
+                  <a:srgbClr val="FFFFFF"/>
+                </a:solidFill>
+                <a:latin typeface="Montserrat" pitchFamily="34" charset="0"/>
+                <a:ea typeface="Montserrat" pitchFamily="34" charset="-122"/>
+                <a:cs typeface="Montserrat" pitchFamily="34" charset="-120"/>
               </a:rPr>
               <a:t>FALL GOAL</a:t>
             </a:r>
@@ -1907,23 +1759,23 @@
       </p:sp>
       <p:sp>
         <p:nvSpPr>
-          <p:cNvPr id="19" name="Text 17"/>
-          <p:cNvSpPr/>
-          <p:nvPr/>
-        </p:nvSpPr>
-        <p:spPr>
-          <a:xfrm>
-            <a:off x="6460236" y="4617720"/>
-            <a:ext cx="2109978" cy="1280160"/>
-          </a:xfrm>
-          <a:prstGeom prst="rect">
-            <a:avLst/>
-          </a:prstGeom>
-          <a:noFill/>
-          <a:ln/>
-        </p:spPr>
-        <p:txBody>
-          <a:bodyPr wrap="square" rtlCol="0" anchor="t"/>
+          <p:cNvPr id="15" name="Text 11"/>
+          <p:cNvSpPr/>
+          <p:nvPr/>
+        </p:nvSpPr>
+        <p:spPr>
+          <a:xfrm>
+            <a:off x="6231636" y="5440680"/>
+            <a:ext cx="2567178" cy="1005840"/>
+          </a:xfrm>
+          <a:prstGeom prst="rect">
+            <a:avLst/>
+          </a:prstGeom>
+          <a:noFill/>
+          <a:ln/>
+        </p:spPr>
+        <p:txBody>
+          <a:bodyPr wrap="square" lIns="0" tIns="0" rIns="0" bIns="0" rtlCol="0" anchor="t"/>
           <a:lstStyle/>
           <a:p>
             <a:pPr indent="0" marL="0">
@@ -1933,79 +1785,52 @@
               <a:buNone/>
             </a:pPr>
             <a:r>
-              <a:rPr lang="en-US" sz="1500" dirty="0">
-                <a:solidFill>
-                  <a:srgbClr val="FFFFFF"/>
-                </a:solidFill>
-                <a:latin typeface="Calibri" pitchFamily="34" charset="0"/>
-                <a:ea typeface="Calibri" pitchFamily="34" charset="-122"/>
-                <a:cs typeface="Calibri" pitchFamily="34" charset="-120"/>
+              <a:rPr lang="en-US" sz="1300" dirty="0">
+                <a:solidFill>
+                  <a:srgbClr val="EADBFF"/>
+                </a:solidFill>
+                <a:latin typeface="Montserrat" pitchFamily="34" charset="0"/>
+                <a:ea typeface="Montserrat" pitchFamily="34" charset="-122"/>
+                <a:cs typeface="Montserrat" pitchFamily="34" charset="-120"/>
               </a:rPr>
               <a:t>Build awareness, engagement, pipeline</a:t>
             </a:r>
-            <a:endParaRPr lang="en-US" sz="1500" dirty="0"/>
-          </a:p>
-        </p:txBody>
-      </p:sp>
-      <p:sp>
-        <p:nvSpPr>
-          <p:cNvPr id="20" name="Shape 18"/>
-          <p:cNvSpPr/>
-          <p:nvPr/>
-        </p:nvSpPr>
-        <p:spPr>
-          <a:xfrm>
-            <a:off x="9073134" y="3383280"/>
-            <a:ext cx="2567178" cy="2651760"/>
+            <a:endParaRPr lang="en-US" sz="1300" dirty="0"/>
+          </a:p>
+        </p:txBody>
+      </p:sp>
+      <p:sp>
+        <p:nvSpPr>
+          <p:cNvPr id="16" name="Shape 12"/>
+          <p:cNvSpPr/>
+          <p:nvPr/>
+        </p:nvSpPr>
+        <p:spPr>
+          <a:xfrm>
+            <a:off x="9073134" y="5029200"/>
+            <a:ext cx="292608" cy="292608"/>
           </a:xfrm>
           <a:prstGeom prst="roundRect">
             <a:avLst>
-              <a:gd name="adj" fmla="val 2850"/>
+              <a:gd name="adj" fmla="val 15625"/>
             </a:avLst>
           </a:prstGeom>
           <a:solidFill>
-            <a:srgbClr val="0B0616"/>
+            <a:srgbClr val="FAA825"/>
           </a:solidFill>
-          <a:ln w="12700">
-            <a:solidFill>
-              <a:srgbClr val="4A3580"/>
-            </a:solidFill>
-            <a:prstDash val="solid"/>
-          </a:ln>
-        </p:spPr>
-      </p:sp>
-      <p:sp>
-        <p:nvSpPr>
-          <p:cNvPr id="21" name="Shape 19"/>
-          <p:cNvSpPr/>
-          <p:nvPr/>
-        </p:nvSpPr>
-        <p:spPr>
-          <a:xfrm>
-            <a:off x="9301734" y="3639312"/>
-            <a:ext cx="457200" cy="457200"/>
-          </a:xfrm>
-          <a:prstGeom prst="roundRect">
-            <a:avLst>
-              <a:gd name="adj" fmla="val 12000"/>
-            </a:avLst>
-          </a:prstGeom>
-          <a:solidFill>
-            <a:srgbClr val="FACC15"/>
-          </a:solidFill>
-          <a:ln/>
-        </p:spPr>
-      </p:sp>
-      <p:sp>
-        <p:nvSpPr>
-          <p:cNvPr id="22" name="Text 20"/>
-          <p:cNvSpPr/>
-          <p:nvPr/>
-        </p:nvSpPr>
-        <p:spPr>
-          <a:xfrm>
-            <a:off x="9301734" y="3639312"/>
-            <a:ext cx="457200" cy="457200"/>
+          <a:ln/>
+        </p:spPr>
+      </p:sp>
+      <p:sp>
+        <p:nvSpPr>
+          <p:cNvPr id="17" name="Text 13"/>
+          <p:cNvSpPr/>
+          <p:nvPr/>
+        </p:nvSpPr>
+        <p:spPr>
+          <a:xfrm>
+            <a:off x="9484614" y="5001768"/>
+            <a:ext cx="2155698" cy="347472"/>
           </a:xfrm>
           <a:prstGeom prst="rect">
             <a:avLst/>
@@ -2017,56 +1842,17 @@
           <a:bodyPr wrap="square" lIns="0" tIns="0" rIns="0" bIns="0" rtlCol="0" anchor="ctr"/>
           <a:lstStyle/>
           <a:p>
-            <a:pPr algn="ctr" indent="0" marL="0">
-              <a:buNone/>
-            </a:pPr>
-            <a:r>
-              <a:rPr lang="en-US" sz="2000" b="1" dirty="0">
-                <a:solidFill>
-                  <a:srgbClr val="281A48"/>
-                </a:solidFill>
-                <a:latin typeface="Georgia" pitchFamily="34" charset="0"/>
-                <a:ea typeface="Georgia" pitchFamily="34" charset="-122"/>
-                <a:cs typeface="Georgia" pitchFamily="34" charset="-120"/>
-              </a:rPr>
-              <a:t>4</a:t>
-            </a:r>
-            <a:endParaRPr lang="en-US" sz="2000" dirty="0"/>
-          </a:p>
-        </p:txBody>
-      </p:sp>
-      <p:sp>
-        <p:nvSpPr>
-          <p:cNvPr id="23" name="Text 21"/>
-          <p:cNvSpPr/>
-          <p:nvPr/>
-        </p:nvSpPr>
-        <p:spPr>
-          <a:xfrm>
-            <a:off x="9301734" y="4251960"/>
-            <a:ext cx="2109978" cy="365760"/>
-          </a:xfrm>
-          <a:prstGeom prst="rect">
-            <a:avLst/>
-          </a:prstGeom>
-          <a:noFill/>
-          <a:ln/>
-        </p:spPr>
-        <p:txBody>
-          <a:bodyPr wrap="square" rtlCol="0" anchor="ctr"/>
-          <a:lstStyle/>
-          <a:p>
             <a:pPr indent="0" marL="0">
               <a:buNone/>
             </a:pPr>
             <a:r>
-              <a:rPr lang="en-US" sz="1300" b="1" spc="150" kern="0" dirty="0">
-                <a:solidFill>
-                  <a:srgbClr val="FACC15"/>
-                </a:solidFill>
-                <a:latin typeface="Calibri" pitchFamily="34" charset="0"/>
-                <a:ea typeface="Calibri" pitchFamily="34" charset="-122"/>
-                <a:cs typeface="Calibri" pitchFamily="34" charset="-120"/>
+              <a:rPr lang="en-US" sz="1300" b="1" spc="100" kern="0" dirty="0">
+                <a:solidFill>
+                  <a:srgbClr val="FFFFFF"/>
+                </a:solidFill>
+                <a:latin typeface="Montserrat" pitchFamily="34" charset="0"/>
+                <a:ea typeface="Montserrat" pitchFamily="34" charset="-122"/>
+                <a:cs typeface="Montserrat" pitchFamily="34" charset="-120"/>
               </a:rPr>
               <a:t>ANCHOR</a:t>
             </a:r>
@@ -2076,23 +1862,23 @@
       </p:sp>
       <p:sp>
         <p:nvSpPr>
-          <p:cNvPr id="24" name="Text 22"/>
-          <p:cNvSpPr/>
-          <p:nvPr/>
-        </p:nvSpPr>
-        <p:spPr>
-          <a:xfrm>
-            <a:off x="9301734" y="4617720"/>
-            <a:ext cx="2109978" cy="1280160"/>
-          </a:xfrm>
-          <a:prstGeom prst="rect">
-            <a:avLst/>
-          </a:prstGeom>
-          <a:noFill/>
-          <a:ln/>
-        </p:spPr>
-        <p:txBody>
-          <a:bodyPr wrap="square" rtlCol="0" anchor="t"/>
+          <p:cNvPr id="18" name="Text 14"/>
+          <p:cNvSpPr/>
+          <p:nvPr/>
+        </p:nvSpPr>
+        <p:spPr>
+          <a:xfrm>
+            <a:off x="9073134" y="5440680"/>
+            <a:ext cx="2567178" cy="1005840"/>
+          </a:xfrm>
+          <a:prstGeom prst="rect">
+            <a:avLst/>
+          </a:prstGeom>
+          <a:noFill/>
+          <a:ln/>
+        </p:spPr>
+        <p:txBody>
+          <a:bodyPr wrap="square" lIns="0" tIns="0" rIns="0" bIns="0" rtlCol="0" anchor="t"/>
           <a:lstStyle/>
           <a:p>
             <a:pPr indent="0" marL="0">
@@ -2102,17 +1888,17 @@
               <a:buNone/>
             </a:pPr>
             <a:r>
-              <a:rPr lang="en-US" sz="1500" dirty="0">
-                <a:solidFill>
-                  <a:srgbClr val="FFFFFF"/>
-                </a:solidFill>
-                <a:latin typeface="Calibri" pitchFamily="34" charset="0"/>
-                <a:ea typeface="Calibri" pitchFamily="34" charset="-122"/>
-                <a:cs typeface="Calibri" pitchFamily="34" charset="-120"/>
-              </a:rPr>
-              <a:t>Conexa + ICS + ID interoperability + Databricks / Snowflake</a:t>
-            </a:r>
-            <a:endParaRPr lang="en-US" sz="1500" dirty="0"/>
+              <a:rPr lang="en-US" sz="1300" dirty="0">
+                <a:solidFill>
+                  <a:srgbClr val="EADBFF"/>
+                </a:solidFill>
+                <a:latin typeface="Montserrat" pitchFamily="34" charset="0"/>
+                <a:ea typeface="Montserrat" pitchFamily="34" charset="-122"/>
+                <a:cs typeface="Montserrat" pitchFamily="34" charset="-120"/>
+              </a:rPr>
+              <a:t>Conexa · ICS · ID interoperability · Databricks / Snowflake</a:t>
+            </a:r>
+            <a:endParaRPr lang="en-US" sz="1300" dirty="0"/>
           </a:p>
         </p:txBody>
       </p:sp>
@@ -2156,8 +1942,8 @@
         </p:nvSpPr>
         <p:spPr>
           <a:xfrm>
-            <a:off x="548640" y="384048"/>
-            <a:ext cx="11091672" cy="274320"/>
+            <a:off x="548640" y="411480"/>
+            <a:ext cx="11091672" cy="548640"/>
           </a:xfrm>
           <a:prstGeom prst="rect">
             <a:avLst/>
@@ -2173,91 +1959,76 @@
               <a:buNone/>
             </a:pPr>
             <a:r>
-              <a:rPr lang="en-US" sz="1200" b="1" spc="200" kern="0" dirty="0">
-                <a:solidFill>
-                  <a:srgbClr val="8B5CF6"/>
-                </a:solidFill>
-                <a:latin typeface="Calibri" pitchFamily="34" charset="0"/>
-                <a:ea typeface="Calibri" pitchFamily="34" charset="-122"/>
-                <a:cs typeface="Calibri" pitchFamily="34" charset="-120"/>
-              </a:rPr>
-              <a:t>MESSAGING FRAMEWORK</a:t>
-            </a:r>
-            <a:endParaRPr lang="en-US" sz="1200" dirty="0"/>
-          </a:p>
-        </p:txBody>
-      </p:sp>
-      <p:sp>
-        <p:nvSpPr>
-          <p:cNvPr id="3" name="Text 1"/>
-          <p:cNvSpPr/>
-          <p:nvPr/>
-        </p:nvSpPr>
-        <p:spPr>
-          <a:xfrm>
-            <a:off x="548640" y="621792"/>
+              <a:rPr lang="en-US" sz="3000" b="1" dirty="0">
+                <a:solidFill>
+                  <a:srgbClr val="461478"/>
+                </a:solidFill>
+                <a:latin typeface="Montserrat" pitchFamily="34" charset="0"/>
+                <a:ea typeface="Montserrat" pitchFamily="34" charset="-122"/>
+                <a:cs typeface="Montserrat" pitchFamily="34" charset="-120"/>
+              </a:rPr>
+              <a:t>Core Narrative</a:t>
+            </a:r>
+            <a:endParaRPr lang="en-US" sz="3000" dirty="0"/>
+          </a:p>
+        </p:txBody>
+      </p:sp>
+      <p:pic>
+        <p:nvPicPr>
+          <p:cNvPr id="3" name="Image 0" descr="logo_purple.png">    </p:cNvPr>
+          <p:cNvPicPr>
+            <a:picLocks noChangeAspect="1"/>
+          </p:cNvPicPr>
+          <p:nvPr/>
+        </p:nvPicPr>
+        <p:blipFill>
+          <a:blip r:embed="rId1"/>
+          <a:stretch>
+            <a:fillRect/>
+          </a:stretch>
+        </p:blipFill>
+        <p:spPr>
+          <a:xfrm>
+            <a:off x="10680192" y="6400800"/>
+            <a:ext cx="960120" cy="259492"/>
+          </a:xfrm>
+          <a:prstGeom prst="rect">
+            <a:avLst/>
+          </a:prstGeom>
+        </p:spPr>
+      </p:pic>
+      <p:sp>
+        <p:nvSpPr>
+          <p:cNvPr id="4" name="Shape 1"/>
+          <p:cNvSpPr/>
+          <p:nvPr/>
+        </p:nvSpPr>
+        <p:spPr>
+          <a:xfrm>
+            <a:off x="548640" y="1097280"/>
             <a:ext cx="11091672" cy="640080"/>
-          </a:xfrm>
-          <a:prstGeom prst="rect">
-            <a:avLst/>
-          </a:prstGeom>
-          <a:noFill/>
-          <a:ln/>
-        </p:spPr>
-        <p:txBody>
-          <a:bodyPr wrap="square" rtlCol="0" anchor="ctr"/>
-          <a:lstStyle/>
-          <a:p>
-            <a:pPr algn="l" indent="0" marL="0">
-              <a:buNone/>
-            </a:pPr>
-            <a:r>
-              <a:rPr lang="en-US" sz="3400" b="1" dirty="0">
-                <a:solidFill>
-                  <a:srgbClr val="281A48"/>
-                </a:solidFill>
-                <a:latin typeface="Georgia" pitchFamily="34" charset="0"/>
-                <a:ea typeface="Georgia" pitchFamily="34" charset="-122"/>
-                <a:cs typeface="Georgia" pitchFamily="34" charset="-120"/>
-              </a:rPr>
-              <a:t>Core Narrative</a:t>
-            </a:r>
-            <a:endParaRPr lang="en-US" sz="3400" dirty="0"/>
-          </a:p>
-        </p:txBody>
-      </p:sp>
-      <p:sp>
-        <p:nvSpPr>
-          <p:cNvPr id="4" name="Shape 2"/>
-          <p:cNvSpPr/>
-          <p:nvPr/>
-        </p:nvSpPr>
-        <p:spPr>
-          <a:xfrm>
-            <a:off x="548640" y="1371600"/>
-            <a:ext cx="11091672" cy="658368"/>
           </a:xfrm>
           <a:prstGeom prst="roundRect">
             <a:avLst>
-              <a:gd name="adj" fmla="val 8333"/>
+              <a:gd name="adj" fmla="val 11429"/>
             </a:avLst>
           </a:prstGeom>
           <a:solidFill>
-            <a:srgbClr val="281A48"/>
+            <a:srgbClr val="461478"/>
           </a:solidFill>
           <a:ln/>
         </p:spPr>
       </p:sp>
       <p:sp>
         <p:nvSpPr>
-          <p:cNvPr id="5" name="Text 3"/>
-          <p:cNvSpPr/>
-          <p:nvPr/>
-        </p:nvSpPr>
-        <p:spPr>
-          <a:xfrm>
-            <a:off x="822960" y="1371600"/>
-            <a:ext cx="10543032" cy="658368"/>
+          <p:cNvPr id="5" name="Text 2"/>
+          <p:cNvSpPr/>
+          <p:nvPr/>
+        </p:nvSpPr>
+        <p:spPr>
+          <a:xfrm>
+            <a:off x="822960" y="1097280"/>
+            <a:ext cx="10543032" cy="640080"/>
           </a:xfrm>
           <a:prstGeom prst="rect">
             <a:avLst/>
@@ -2269,31 +2040,31 @@
           <a:bodyPr wrap="square" lIns="0" tIns="0" rIns="0" bIns="0" rtlCol="0" anchor="ctr"/>
           <a:lstStyle/>
           <a:p>
-            <a:pPr algn="l" indent="0" marL="0">
+            <a:pPr indent="0" marL="0">
               <a:buNone/>
             </a:pPr>
             <a:r>
               <a:rPr lang="en-US" sz="1100" b="1" spc="100" kern="0" dirty="0">
                 <a:solidFill>
-                  <a:srgbClr val="FACC15"/>
-                </a:solidFill>
-                <a:latin typeface="Calibri" pitchFamily="34" charset="0"/>
-                <a:ea typeface="Calibri" pitchFamily="34" charset="-122"/>
-                <a:cs typeface="Calibri" pitchFamily="34" charset="-120"/>
-              </a:rPr>
-              <a:t>MASTER BRAND PROMISE   </a:t>
-            </a:r>
-            <a:pPr algn="l" indent="0" marL="0">
-              <a:buNone/>
-            </a:pPr>
-            <a:r>
-              <a:rPr lang="en-US" sz="1600" i="1" dirty="0">
+                  <a:srgbClr val="FAA825"/>
+                </a:solidFill>
+                <a:latin typeface="Montserrat" pitchFamily="34" charset="0"/>
+                <a:ea typeface="Montserrat" pitchFamily="34" charset="-122"/>
+                <a:cs typeface="Montserrat" pitchFamily="34" charset="-120"/>
+              </a:rPr>
+              <a:t>MASTER BRAND PROMISE    </a:t>
+            </a:r>
+            <a:pPr indent="0" marL="0">
+              <a:buNone/>
+            </a:pPr>
+            <a:r>
+              <a:rPr lang="en-US" sz="1500" b="1" dirty="0">
                 <a:solidFill>
                   <a:srgbClr val="FFFFFF"/>
                 </a:solidFill>
-                <a:latin typeface="Georgia" pitchFamily="34" charset="0"/>
-                <a:ea typeface="Georgia" pitchFamily="34" charset="-122"/>
-                <a:cs typeface="Georgia" pitchFamily="34" charset="-120"/>
+                <a:latin typeface="Montserrat" pitchFamily="34" charset="0"/>
+                <a:ea typeface="Montserrat" pitchFamily="34" charset="-122"/>
+                <a:cs typeface="Montserrat" pitchFamily="34" charset="-120"/>
               </a:rPr>
               <a:t>Make customer data more accurate, complete and useful — where it already lives.</a:t>
             </a:r>
@@ -2303,41 +2074,60 @@
       </p:sp>
       <p:sp>
         <p:nvSpPr>
-          <p:cNvPr id="6" name="Shape 4"/>
-          <p:cNvSpPr/>
-          <p:nvPr/>
-        </p:nvSpPr>
-        <p:spPr>
-          <a:xfrm>
-            <a:off x="548640" y="2212848"/>
-            <a:ext cx="3544824" cy="1417320"/>
+          <p:cNvPr id="6" name="Shape 3"/>
+          <p:cNvSpPr/>
+          <p:nvPr/>
+        </p:nvSpPr>
+        <p:spPr>
+          <a:xfrm>
+            <a:off x="548640" y="1938528"/>
+            <a:ext cx="3544824" cy="1600200"/>
           </a:xfrm>
           <a:prstGeom prst="roundRect">
             <a:avLst>
-              <a:gd name="adj" fmla="val 3871"/>
+              <a:gd name="adj" fmla="val 4571"/>
             </a:avLst>
           </a:prstGeom>
           <a:solidFill>
-            <a:srgbClr val="F3F0FA"/>
+            <a:srgbClr val="ECE3F4"/>
           </a:solidFill>
-          <a:ln w="12700">
-            <a:solidFill>
-              <a:srgbClr val="8B5CF6"/>
-            </a:solidFill>
-            <a:prstDash val="solid"/>
-          </a:ln>
-        </p:spPr>
-      </p:sp>
-      <p:sp>
-        <p:nvSpPr>
-          <p:cNvPr id="7" name="Text 5"/>
-          <p:cNvSpPr/>
-          <p:nvPr/>
-        </p:nvSpPr>
-        <p:spPr>
-          <a:xfrm>
-            <a:off x="731520" y="2331720"/>
-            <a:ext cx="3179064" cy="292608"/>
+          <a:ln/>
+        </p:spPr>
+      </p:sp>
+      <p:pic>
+        <p:nvPicPr>
+          <p:cNvPr id="7" name="Image 1" descr="preencoded.png">    </p:cNvPr>
+          <p:cNvPicPr>
+            <a:picLocks noChangeAspect="1"/>
+          </p:cNvPicPr>
+          <p:nvPr/>
+        </p:nvPicPr>
+        <p:blipFill>
+          <a:blip r:embed="rId2"/>
+          <a:stretch>
+            <a:fillRect/>
+          </a:stretch>
+        </p:blipFill>
+        <p:spPr>
+          <a:xfrm>
+            <a:off x="749808" y="2139696"/>
+            <a:ext cx="384048" cy="384048"/>
+          </a:xfrm>
+          <a:prstGeom prst="rect">
+            <a:avLst/>
+          </a:prstGeom>
+        </p:spPr>
+      </p:pic>
+      <p:sp>
+        <p:nvSpPr>
+          <p:cNvPr id="8" name="Text 4"/>
+          <p:cNvSpPr/>
+          <p:nvPr/>
+        </p:nvSpPr>
+        <p:spPr>
+          <a:xfrm>
+            <a:off x="1234440" y="2121408"/>
+            <a:ext cx="2721864" cy="411480"/>
           </a:xfrm>
           <a:prstGeom prst="rect">
             <a:avLst/>
@@ -2353,30 +2143,30 @@
               <a:buNone/>
             </a:pPr>
             <a:r>
-              <a:rPr lang="en-US" sz="1400" b="1" spc="100" kern="0" dirty="0">
-                <a:solidFill>
-                  <a:srgbClr val="4A3580"/>
-                </a:solidFill>
-                <a:latin typeface="Calibri" pitchFamily="34" charset="0"/>
-                <a:ea typeface="Calibri" pitchFamily="34" charset="-122"/>
-                <a:cs typeface="Calibri" pitchFamily="34" charset="-120"/>
+              <a:rPr lang="en-US" sz="1500" b="1" spc="100" kern="0" dirty="0">
+                <a:solidFill>
+                  <a:srgbClr val="461478"/>
+                </a:solidFill>
+                <a:latin typeface="Montserrat" pitchFamily="34" charset="0"/>
+                <a:ea typeface="Montserrat" pitchFamily="34" charset="-122"/>
+                <a:cs typeface="Montserrat" pitchFamily="34" charset="-120"/>
               </a:rPr>
               <a:t>RESOLVE</a:t>
             </a:r>
-            <a:endParaRPr lang="en-US" sz="1400" dirty="0"/>
-          </a:p>
-        </p:txBody>
-      </p:sp>
-      <p:sp>
-        <p:nvSpPr>
-          <p:cNvPr id="8" name="Text 6"/>
-          <p:cNvSpPr/>
-          <p:nvPr/>
-        </p:nvSpPr>
-        <p:spPr>
-          <a:xfrm>
-            <a:off x="731520" y="2633472"/>
-            <a:ext cx="3179064" cy="274320"/>
+            <a:endParaRPr lang="en-US" sz="1500" dirty="0"/>
+          </a:p>
+        </p:txBody>
+      </p:sp>
+      <p:sp>
+        <p:nvSpPr>
+          <p:cNvPr id="9" name="Text 5"/>
+          <p:cNvSpPr/>
+          <p:nvPr/>
+        </p:nvSpPr>
+        <p:spPr>
+          <a:xfrm>
+            <a:off x="768096" y="2624328"/>
+            <a:ext cx="3105912" cy="274320"/>
           </a:xfrm>
           <a:prstGeom prst="rect">
             <a:avLst/>
@@ -2392,30 +2182,30 @@
               <a:buNone/>
             </a:pPr>
             <a:r>
-              <a:rPr lang="en-US" sz="1200" i="1" dirty="0">
-                <a:solidFill>
-                  <a:srgbClr val="1E1338"/>
-                </a:solidFill>
-                <a:latin typeface="Georgia" pitchFamily="34" charset="0"/>
-                <a:ea typeface="Georgia" pitchFamily="34" charset="-122"/>
-                <a:cs typeface="Georgia" pitchFamily="34" charset="-120"/>
+              <a:rPr lang="en-US" sz="1150" b="1" dirty="0">
+                <a:solidFill>
+                  <a:srgbClr val="333333"/>
+                </a:solidFill>
+                <a:latin typeface="Montserrat" pitchFamily="34" charset="0"/>
+                <a:ea typeface="Montserrat" pitchFamily="34" charset="-122"/>
+                <a:cs typeface="Montserrat" pitchFamily="34" charset="-120"/>
               </a:rPr>
               <a:t>Know who your customers are.</a:t>
             </a:r>
-            <a:endParaRPr lang="en-US" sz="1200" dirty="0"/>
-          </a:p>
-        </p:txBody>
-      </p:sp>
-      <p:sp>
-        <p:nvSpPr>
-          <p:cNvPr id="9" name="Text 7"/>
-          <p:cNvSpPr/>
-          <p:nvPr/>
-        </p:nvSpPr>
-        <p:spPr>
-          <a:xfrm>
-            <a:off x="731520" y="2926080"/>
-            <a:ext cx="3179064" cy="594360"/>
+            <a:endParaRPr lang="en-US" sz="1150" dirty="0"/>
+          </a:p>
+        </p:txBody>
+      </p:sp>
+      <p:sp>
+        <p:nvSpPr>
+          <p:cNvPr id="10" name="Text 6"/>
+          <p:cNvSpPr/>
+          <p:nvPr/>
+        </p:nvSpPr>
+        <p:spPr>
+          <a:xfrm>
+            <a:off x="768096" y="2907792"/>
+            <a:ext cx="3105912" cy="521208"/>
           </a:xfrm>
           <a:prstGeom prst="rect">
             <a:avLst/>
@@ -2429,20 +2219,20 @@
           <a:p>
             <a:pPr indent="0" marL="0">
               <a:lnSpc>
-                <a:spcPct val="108000"/>
+                <a:spcPct val="110000"/>
               </a:lnSpc>
               <a:buNone/>
             </a:pPr>
             <a:r>
               <a:rPr lang="en-US" sz="1050" dirty="0">
                 <a:solidFill>
-                  <a:srgbClr val="6B6480"/>
-                </a:solidFill>
-                <a:latin typeface="Calibri" pitchFamily="34" charset="0"/>
-                <a:ea typeface="Calibri" pitchFamily="34" charset="-122"/>
-                <a:cs typeface="Calibri" pitchFamily="34" charset="-120"/>
-              </a:rPr>
-              <a:t>Validation • ICS • Persistent ID • Golden Record • Recognition</a:t>
+                  <a:srgbClr val="5C5C5C"/>
+                </a:solidFill>
+                <a:latin typeface="Montserrat" pitchFamily="34" charset="0"/>
+                <a:ea typeface="Montserrat" pitchFamily="34" charset="-122"/>
+                <a:cs typeface="Montserrat" pitchFamily="34" charset="-120"/>
+              </a:rPr>
+              <a:t>Validation · ICS · Persistent ID · Golden Record · Recognition</a:t>
             </a:r>
             <a:endParaRPr lang="en-US" sz="1050" dirty="0"/>
           </a:p>
@@ -2450,41 +2240,60 @@
       </p:sp>
       <p:sp>
         <p:nvSpPr>
-          <p:cNvPr id="10" name="Shape 8"/>
-          <p:cNvSpPr/>
-          <p:nvPr/>
-        </p:nvSpPr>
-        <p:spPr>
-          <a:xfrm>
-            <a:off x="4322064" y="2212848"/>
-            <a:ext cx="3544824" cy="1417320"/>
+          <p:cNvPr id="11" name="Shape 7"/>
+          <p:cNvSpPr/>
+          <p:nvPr/>
+        </p:nvSpPr>
+        <p:spPr>
+          <a:xfrm>
+            <a:off x="4322064" y="1938528"/>
+            <a:ext cx="3544824" cy="1600200"/>
           </a:xfrm>
           <a:prstGeom prst="roundRect">
             <a:avLst>
-              <a:gd name="adj" fmla="val 3871"/>
+              <a:gd name="adj" fmla="val 4571"/>
             </a:avLst>
           </a:prstGeom>
           <a:solidFill>
-            <a:srgbClr val="F3F0FA"/>
+            <a:srgbClr val="ECE3F4"/>
           </a:solidFill>
-          <a:ln w="12700">
-            <a:solidFill>
-              <a:srgbClr val="8B5CF6"/>
-            </a:solidFill>
-            <a:prstDash val="solid"/>
-          </a:ln>
-        </p:spPr>
-      </p:sp>
-      <p:sp>
-        <p:nvSpPr>
-          <p:cNvPr id="11" name="Text 9"/>
-          <p:cNvSpPr/>
-          <p:nvPr/>
-        </p:nvSpPr>
-        <p:spPr>
-          <a:xfrm>
-            <a:off x="4504944" y="2331720"/>
-            <a:ext cx="3179064" cy="292608"/>
+          <a:ln/>
+        </p:spPr>
+      </p:sp>
+      <p:pic>
+        <p:nvPicPr>
+          <p:cNvPr id="12" name="Image 2" descr="preencoded.png">    </p:cNvPr>
+          <p:cNvPicPr>
+            <a:picLocks noChangeAspect="1"/>
+          </p:cNvPicPr>
+          <p:nvPr/>
+        </p:nvPicPr>
+        <p:blipFill>
+          <a:blip r:embed="rId3"/>
+          <a:stretch>
+            <a:fillRect/>
+          </a:stretch>
+        </p:blipFill>
+        <p:spPr>
+          <a:xfrm>
+            <a:off x="4523232" y="2139696"/>
+            <a:ext cx="384048" cy="384048"/>
+          </a:xfrm>
+          <a:prstGeom prst="rect">
+            <a:avLst/>
+          </a:prstGeom>
+        </p:spPr>
+      </p:pic>
+      <p:sp>
+        <p:nvSpPr>
+          <p:cNvPr id="13" name="Text 8"/>
+          <p:cNvSpPr/>
+          <p:nvPr/>
+        </p:nvSpPr>
+        <p:spPr>
+          <a:xfrm>
+            <a:off x="5007864" y="2121408"/>
+            <a:ext cx="2721864" cy="411480"/>
           </a:xfrm>
           <a:prstGeom prst="rect">
             <a:avLst/>
@@ -2500,30 +2309,30 @@
               <a:buNone/>
             </a:pPr>
             <a:r>
-              <a:rPr lang="en-US" sz="1400" b="1" spc="100" kern="0" dirty="0">
-                <a:solidFill>
-                  <a:srgbClr val="4A3580"/>
-                </a:solidFill>
-                <a:latin typeface="Calibri" pitchFamily="34" charset="0"/>
-                <a:ea typeface="Calibri" pitchFamily="34" charset="-122"/>
-                <a:cs typeface="Calibri" pitchFamily="34" charset="-120"/>
+              <a:rPr lang="en-US" sz="1500" b="1" spc="100" kern="0" dirty="0">
+                <a:solidFill>
+                  <a:srgbClr val="461478"/>
+                </a:solidFill>
+                <a:latin typeface="Montserrat" pitchFamily="34" charset="0"/>
+                <a:ea typeface="Montserrat" pitchFamily="34" charset="-122"/>
+                <a:cs typeface="Montserrat" pitchFamily="34" charset="-120"/>
               </a:rPr>
               <a:t>ENHANCE</a:t>
             </a:r>
-            <a:endParaRPr lang="en-US" sz="1400" dirty="0"/>
-          </a:p>
-        </p:txBody>
-      </p:sp>
-      <p:sp>
-        <p:nvSpPr>
-          <p:cNvPr id="12" name="Text 10"/>
-          <p:cNvSpPr/>
-          <p:nvPr/>
-        </p:nvSpPr>
-        <p:spPr>
-          <a:xfrm>
-            <a:off x="4504944" y="2633472"/>
-            <a:ext cx="3179064" cy="274320"/>
+            <a:endParaRPr lang="en-US" sz="1500" dirty="0"/>
+          </a:p>
+        </p:txBody>
+      </p:sp>
+      <p:sp>
+        <p:nvSpPr>
+          <p:cNvPr id="14" name="Text 9"/>
+          <p:cNvSpPr/>
+          <p:nvPr/>
+        </p:nvSpPr>
+        <p:spPr>
+          <a:xfrm>
+            <a:off x="4541520" y="2624328"/>
+            <a:ext cx="3105912" cy="274320"/>
           </a:xfrm>
           <a:prstGeom prst="rect">
             <a:avLst/>
@@ -2539,30 +2348,30 @@
               <a:buNone/>
             </a:pPr>
             <a:r>
-              <a:rPr lang="en-US" sz="1200" i="1" dirty="0">
-                <a:solidFill>
-                  <a:srgbClr val="1E1338"/>
-                </a:solidFill>
-                <a:latin typeface="Georgia" pitchFamily="34" charset="0"/>
-                <a:ea typeface="Georgia" pitchFamily="34" charset="-122"/>
-                <a:cs typeface="Georgia" pitchFamily="34" charset="-120"/>
+              <a:rPr lang="en-US" sz="1150" b="1" dirty="0">
+                <a:solidFill>
+                  <a:srgbClr val="333333"/>
+                </a:solidFill>
+                <a:latin typeface="Montserrat" pitchFamily="34" charset="0"/>
+                <a:ea typeface="Montserrat" pitchFamily="34" charset="-122"/>
+                <a:cs typeface="Montserrat" pitchFamily="34" charset="-120"/>
               </a:rPr>
               <a:t>Know more — and reach more.</a:t>
             </a:r>
-            <a:endParaRPr lang="en-US" sz="1200" dirty="0"/>
-          </a:p>
-        </p:txBody>
-      </p:sp>
-      <p:sp>
-        <p:nvSpPr>
-          <p:cNvPr id="13" name="Text 11"/>
-          <p:cNvSpPr/>
-          <p:nvPr/>
-        </p:nvSpPr>
-        <p:spPr>
-          <a:xfrm>
-            <a:off x="4504944" y="2926080"/>
-            <a:ext cx="3179064" cy="594360"/>
+            <a:endParaRPr lang="en-US" sz="1150" dirty="0"/>
+          </a:p>
+        </p:txBody>
+      </p:sp>
+      <p:sp>
+        <p:nvSpPr>
+          <p:cNvPr id="15" name="Text 10"/>
+          <p:cNvSpPr/>
+          <p:nvPr/>
+        </p:nvSpPr>
+        <p:spPr>
+          <a:xfrm>
+            <a:off x="4541520" y="2907792"/>
+            <a:ext cx="3105912" cy="521208"/>
           </a:xfrm>
           <a:prstGeom prst="rect">
             <a:avLst/>
@@ -2576,20 +2385,20 @@
           <a:p>
             <a:pPr indent="0" marL="0">
               <a:lnSpc>
-                <a:spcPct val="108000"/>
+                <a:spcPct val="110000"/>
               </a:lnSpc>
               <a:buNone/>
             </a:pPr>
             <a:r>
               <a:rPr lang="en-US" sz="1050" dirty="0">
                 <a:solidFill>
-                  <a:srgbClr val="6B6480"/>
-                </a:solidFill>
-                <a:latin typeface="Calibri" pitchFamily="34" charset="0"/>
-                <a:ea typeface="Calibri" pitchFamily="34" charset="-122"/>
-                <a:cs typeface="Calibri" pitchFamily="34" charset="-120"/>
-              </a:rPr>
-              <a:t>Identity expansion • Attributes • Household • Reach • Bid enrichment</a:t>
+                  <a:srgbClr val="5C5C5C"/>
+                </a:solidFill>
+                <a:latin typeface="Montserrat" pitchFamily="34" charset="0"/>
+                <a:ea typeface="Montserrat" pitchFamily="34" charset="-122"/>
+                <a:cs typeface="Montserrat" pitchFamily="34" charset="-120"/>
+              </a:rPr>
+              <a:t>Identity expansion · Attributes · Household · Reach · Bid enrichment</a:t>
             </a:r>
             <a:endParaRPr lang="en-US" sz="1050" dirty="0"/>
           </a:p>
@@ -2597,41 +2406,60 @@
       </p:sp>
       <p:sp>
         <p:nvSpPr>
-          <p:cNvPr id="14" name="Shape 12"/>
-          <p:cNvSpPr/>
-          <p:nvPr/>
-        </p:nvSpPr>
-        <p:spPr>
-          <a:xfrm>
-            <a:off x="8095488" y="2212848"/>
-            <a:ext cx="3544824" cy="1417320"/>
+          <p:cNvPr id="16" name="Shape 11"/>
+          <p:cNvSpPr/>
+          <p:nvPr/>
+        </p:nvSpPr>
+        <p:spPr>
+          <a:xfrm>
+            <a:off x="8095488" y="1938528"/>
+            <a:ext cx="3544824" cy="1600200"/>
           </a:xfrm>
           <a:prstGeom prst="roundRect">
             <a:avLst>
-              <a:gd name="adj" fmla="val 3871"/>
+              <a:gd name="adj" fmla="val 4571"/>
             </a:avLst>
           </a:prstGeom>
           <a:solidFill>
-            <a:srgbClr val="F3F0FA"/>
+            <a:srgbClr val="ECE3F4"/>
           </a:solidFill>
-          <a:ln w="12700">
-            <a:solidFill>
-              <a:srgbClr val="8B5CF6"/>
-            </a:solidFill>
-            <a:prstDash val="solid"/>
-          </a:ln>
-        </p:spPr>
-      </p:sp>
-      <p:sp>
-        <p:nvSpPr>
-          <p:cNvPr id="15" name="Text 13"/>
-          <p:cNvSpPr/>
-          <p:nvPr/>
-        </p:nvSpPr>
-        <p:spPr>
-          <a:xfrm>
-            <a:off x="8278368" y="2331720"/>
-            <a:ext cx="3179064" cy="292608"/>
+          <a:ln/>
+        </p:spPr>
+      </p:sp>
+      <p:pic>
+        <p:nvPicPr>
+          <p:cNvPr id="17" name="Image 3" descr="preencoded.png">    </p:cNvPr>
+          <p:cNvPicPr>
+            <a:picLocks noChangeAspect="1"/>
+          </p:cNvPicPr>
+          <p:nvPr/>
+        </p:nvPicPr>
+        <p:blipFill>
+          <a:blip r:embed="rId4"/>
+          <a:stretch>
+            <a:fillRect/>
+          </a:stretch>
+        </p:blipFill>
+        <p:spPr>
+          <a:xfrm>
+            <a:off x="8296656" y="2139696"/>
+            <a:ext cx="384048" cy="384048"/>
+          </a:xfrm>
+          <a:prstGeom prst="rect">
+            <a:avLst/>
+          </a:prstGeom>
+        </p:spPr>
+      </p:pic>
+      <p:sp>
+        <p:nvSpPr>
+          <p:cNvPr id="18" name="Text 12"/>
+          <p:cNvSpPr/>
+          <p:nvPr/>
+        </p:nvSpPr>
+        <p:spPr>
+          <a:xfrm>
+            <a:off x="8781288" y="2121408"/>
+            <a:ext cx="2721864" cy="411480"/>
           </a:xfrm>
           <a:prstGeom prst="rect">
             <a:avLst/>
@@ -2647,30 +2475,30 @@
               <a:buNone/>
             </a:pPr>
             <a:r>
-              <a:rPr lang="en-US" sz="1400" b="1" spc="100" kern="0" dirty="0">
-                <a:solidFill>
-                  <a:srgbClr val="4A3580"/>
-                </a:solidFill>
-                <a:latin typeface="Calibri" pitchFamily="34" charset="0"/>
-                <a:ea typeface="Calibri" pitchFamily="34" charset="-122"/>
-                <a:cs typeface="Calibri" pitchFamily="34" charset="-120"/>
+              <a:rPr lang="en-US" sz="1500" b="1" spc="100" kern="0" dirty="0">
+                <a:solidFill>
+                  <a:srgbClr val="461478"/>
+                </a:solidFill>
+                <a:latin typeface="Montserrat" pitchFamily="34" charset="0"/>
+                <a:ea typeface="Montserrat" pitchFamily="34" charset="-122"/>
+                <a:cs typeface="Montserrat" pitchFamily="34" charset="-120"/>
               </a:rPr>
               <a:t>COLLABORATE</a:t>
             </a:r>
-            <a:endParaRPr lang="en-US" sz="1400" dirty="0"/>
-          </a:p>
-        </p:txBody>
-      </p:sp>
-      <p:sp>
-        <p:nvSpPr>
-          <p:cNvPr id="16" name="Text 14"/>
-          <p:cNvSpPr/>
-          <p:nvPr/>
-        </p:nvSpPr>
-        <p:spPr>
-          <a:xfrm>
-            <a:off x="8278368" y="2633472"/>
-            <a:ext cx="3179064" cy="274320"/>
+            <a:endParaRPr lang="en-US" sz="1500" dirty="0"/>
+          </a:p>
+        </p:txBody>
+      </p:sp>
+      <p:sp>
+        <p:nvSpPr>
+          <p:cNvPr id="19" name="Text 13"/>
+          <p:cNvSpPr/>
+          <p:nvPr/>
+        </p:nvSpPr>
+        <p:spPr>
+          <a:xfrm>
+            <a:off x="8314944" y="2624328"/>
+            <a:ext cx="3105912" cy="274320"/>
           </a:xfrm>
           <a:prstGeom prst="rect">
             <a:avLst/>
@@ -2686,30 +2514,30 @@
               <a:buNone/>
             </a:pPr>
             <a:r>
-              <a:rPr lang="en-US" sz="1200" i="1" dirty="0">
-                <a:solidFill>
-                  <a:srgbClr val="1E1338"/>
-                </a:solidFill>
-                <a:latin typeface="Georgia" pitchFamily="34" charset="0"/>
-                <a:ea typeface="Georgia" pitchFamily="34" charset="-122"/>
-                <a:cs typeface="Georgia" pitchFamily="34" charset="-120"/>
+              <a:rPr lang="en-US" sz="1150" b="1" dirty="0">
+                <a:solidFill>
+                  <a:srgbClr val="333333"/>
+                </a:solidFill>
+                <a:latin typeface="Montserrat" pitchFamily="34" charset="0"/>
+                <a:ea typeface="Montserrat" pitchFamily="34" charset="-122"/>
+                <a:cs typeface="Montserrat" pitchFamily="34" charset="-120"/>
               </a:rPr>
               <a:t>Put identity to work everywhere.</a:t>
             </a:r>
-            <a:endParaRPr lang="en-US" sz="1200" dirty="0"/>
-          </a:p>
-        </p:txBody>
-      </p:sp>
-      <p:sp>
-        <p:nvSpPr>
-          <p:cNvPr id="17" name="Text 15"/>
-          <p:cNvSpPr/>
-          <p:nvPr/>
-        </p:nvSpPr>
-        <p:spPr>
-          <a:xfrm>
-            <a:off x="8278368" y="2926080"/>
-            <a:ext cx="3179064" cy="594360"/>
+            <a:endParaRPr lang="en-US" sz="1150" dirty="0"/>
+          </a:p>
+        </p:txBody>
+      </p:sp>
+      <p:sp>
+        <p:nvSpPr>
+          <p:cNvPr id="20" name="Text 14"/>
+          <p:cNvSpPr/>
+          <p:nvPr/>
+        </p:nvSpPr>
+        <p:spPr>
+          <a:xfrm>
+            <a:off x="8314944" y="2907792"/>
+            <a:ext cx="3105912" cy="521208"/>
           </a:xfrm>
           <a:prstGeom prst="rect">
             <a:avLst/>
@@ -2723,20 +2551,20 @@
           <a:p>
             <a:pPr indent="0" marL="0">
               <a:lnSpc>
-                <a:spcPct val="108000"/>
+                <a:spcPct val="110000"/>
               </a:lnSpc>
               <a:buNone/>
             </a:pPr>
             <a:r>
               <a:rPr lang="en-US" sz="1050" dirty="0">
                 <a:solidFill>
-                  <a:srgbClr val="6B6480"/>
-                </a:solidFill>
-                <a:latin typeface="Calibri" pitchFamily="34" charset="0"/>
-                <a:ea typeface="Calibri" pitchFamily="34" charset="-122"/>
-                <a:cs typeface="Calibri" pitchFamily="34" charset="-120"/>
-              </a:rPr>
-              <a:t>ID interoperability • Native onboarding • Activation • Clean rooms • Measurement</a:t>
+                  <a:srgbClr val="5C5C5C"/>
+                </a:solidFill>
+                <a:latin typeface="Montserrat" pitchFamily="34" charset="0"/>
+                <a:ea typeface="Montserrat" pitchFamily="34" charset="-122"/>
+                <a:cs typeface="Montserrat" pitchFamily="34" charset="-120"/>
+              </a:rPr>
+              <a:t>ID interoperability · Native onboarding · Activation · Clean rooms · Measurement</a:t>
             </a:r>
             <a:endParaRPr lang="en-US" sz="1050" dirty="0"/>
           </a:p>
@@ -2744,13 +2572,13 @@
       </p:sp>
       <p:sp>
         <p:nvSpPr>
-          <p:cNvPr id="18" name="Shape 16"/>
-          <p:cNvSpPr/>
-          <p:nvPr/>
-        </p:nvSpPr>
-        <p:spPr>
-          <a:xfrm>
-            <a:off x="548640" y="3767328"/>
+          <p:cNvPr id="21" name="Shape 15"/>
+          <p:cNvSpPr/>
+          <p:nvPr/>
+        </p:nvSpPr>
+        <p:spPr>
+          <a:xfrm>
+            <a:off x="548640" y="3703320"/>
             <a:ext cx="11091672" cy="530352"/>
           </a:xfrm>
           <a:prstGeom prst="roundRect">
@@ -2759,20 +2587,20 @@
             </a:avLst>
           </a:prstGeom>
           <a:solidFill>
-            <a:srgbClr val="EAE4F7"/>
+            <a:srgbClr val="F2F2F2"/>
           </a:solidFill>
           <a:ln/>
         </p:spPr>
       </p:sp>
       <p:sp>
         <p:nvSpPr>
-          <p:cNvPr id="19" name="Text 17"/>
-          <p:cNvSpPr/>
-          <p:nvPr/>
-        </p:nvSpPr>
-        <p:spPr>
-          <a:xfrm>
-            <a:off x="822960" y="3767328"/>
+          <p:cNvPr id="22" name="Text 16"/>
+          <p:cNvSpPr/>
+          <p:nvPr/>
+        </p:nvSpPr>
+        <p:spPr>
+          <a:xfrm>
+            <a:off x="822960" y="3703320"/>
             <a:ext cx="10543032" cy="530352"/>
           </a:xfrm>
           <a:prstGeom prst="rect">
@@ -2789,27 +2617,27 @@
               <a:buNone/>
             </a:pPr>
             <a:r>
-              <a:rPr lang="en-US" sz="1050" b="1" spc="100" kern="0" dirty="0">
-                <a:solidFill>
-                  <a:srgbClr val="4A3580"/>
-                </a:solidFill>
-                <a:latin typeface="Calibri" pitchFamily="34" charset="0"/>
-                <a:ea typeface="Calibri" pitchFamily="34" charset="-122"/>
-                <a:cs typeface="Calibri" pitchFamily="34" charset="-120"/>
-              </a:rPr>
-              <a:t>ARCHITECTURAL PROOF   </a:t>
+              <a:rPr lang="en-US" sz="1050" b="1" dirty="0">
+                <a:solidFill>
+                  <a:srgbClr val="7719E1"/>
+                </a:solidFill>
+                <a:latin typeface="Montserrat" pitchFamily="34" charset="0"/>
+                <a:ea typeface="Montserrat" pitchFamily="34" charset="-122"/>
+                <a:cs typeface="Montserrat" pitchFamily="34" charset="-120"/>
+              </a:rPr>
+              <a:t>ARCHITECTURAL PROOF    </a:t>
             </a:r>
             <a:pPr indent="0" marL="0">
               <a:buNone/>
             </a:pPr>
             <a:r>
-              <a:rPr lang="en-US" sz="1200" b="1" i="1" dirty="0">
-                <a:solidFill>
-                  <a:srgbClr val="1E1338"/>
-                </a:solidFill>
-                <a:latin typeface="Georgia" pitchFamily="34" charset="0"/>
-                <a:ea typeface="Georgia" pitchFamily="34" charset="-122"/>
-                <a:cs typeface="Georgia" pitchFamily="34" charset="-120"/>
+              <a:rPr lang="en-US" sz="1100" b="1" dirty="0">
+                <a:solidFill>
+                  <a:srgbClr val="333333"/>
+                </a:solidFill>
+                <a:latin typeface="Montserrat" pitchFamily="34" charset="0"/>
+                <a:ea typeface="Montserrat" pitchFamily="34" charset="-122"/>
+                <a:cs typeface="Montserrat" pitchFamily="34" charset="-120"/>
               </a:rPr>
               <a:t>Built for the modern data cloud.  </a:t>
             </a:r>
@@ -2819,13 +2647,13 @@
             <a:r>
               <a:rPr lang="en-US" sz="1050" dirty="0">
                 <a:solidFill>
-                  <a:srgbClr val="6B6480"/>
-                </a:solidFill>
-                <a:latin typeface="Calibri" pitchFamily="34" charset="0"/>
-                <a:ea typeface="Calibri" pitchFamily="34" charset="-122"/>
-                <a:cs typeface="Calibri" pitchFamily="34" charset="-120"/>
-              </a:rPr>
-              <a:t>Databricks • Snowflake • Native processing • No unnecessary data movement • API / platform connectivity</a:t>
+                  <a:srgbClr val="5C5C5C"/>
+                </a:solidFill>
+                <a:latin typeface="Montserrat" pitchFamily="34" charset="0"/>
+                <a:ea typeface="Montserrat" pitchFamily="34" charset="-122"/>
+                <a:cs typeface="Montserrat" pitchFamily="34" charset="-120"/>
+              </a:rPr>
+              <a:t>Databricks · Snowflake · Native processing · No unnecessary data movement · API / platform connectivity</a:t>
             </a:r>
             <a:endParaRPr lang="en-US" sz="1050" dirty="0"/>
           </a:p>
@@ -2833,13 +2661,13 @@
       </p:sp>
       <p:sp>
         <p:nvSpPr>
-          <p:cNvPr id="20" name="Shape 18"/>
-          <p:cNvSpPr/>
-          <p:nvPr/>
-        </p:nvSpPr>
-        <p:spPr>
-          <a:xfrm>
-            <a:off x="548640" y="4389120"/>
+          <p:cNvPr id="23" name="Shape 17"/>
+          <p:cNvSpPr/>
+          <p:nvPr/>
+        </p:nvSpPr>
+        <p:spPr>
+          <a:xfrm>
+            <a:off x="548640" y="4325112"/>
             <a:ext cx="11091672" cy="530352"/>
           </a:xfrm>
           <a:prstGeom prst="roundRect">
@@ -2848,20 +2676,20 @@
             </a:avLst>
           </a:prstGeom>
           <a:solidFill>
-            <a:srgbClr val="EAE4F7"/>
+            <a:srgbClr val="F2F2F2"/>
           </a:solidFill>
           <a:ln/>
         </p:spPr>
       </p:sp>
       <p:sp>
         <p:nvSpPr>
-          <p:cNvPr id="21" name="Text 19"/>
-          <p:cNvSpPr/>
-          <p:nvPr/>
-        </p:nvSpPr>
-        <p:spPr>
-          <a:xfrm>
-            <a:off x="822960" y="4389120"/>
+          <p:cNvPr id="24" name="Text 18"/>
+          <p:cNvSpPr/>
+          <p:nvPr/>
+        </p:nvSpPr>
+        <p:spPr>
+          <a:xfrm>
+            <a:off x="822960" y="4325112"/>
             <a:ext cx="10543032" cy="530352"/>
           </a:xfrm>
           <a:prstGeom prst="rect">
@@ -2878,15 +2706,15 @@
               <a:buNone/>
             </a:pPr>
             <a:r>
-              <a:rPr lang="en-US" sz="1050" b="1" spc="100" kern="0" dirty="0">
-                <a:solidFill>
-                  <a:srgbClr val="4A3580"/>
-                </a:solidFill>
-                <a:latin typeface="Calibri" pitchFamily="34" charset="0"/>
-                <a:ea typeface="Calibri" pitchFamily="34" charset="-122"/>
-                <a:cs typeface="Calibri" pitchFamily="34" charset="-120"/>
-              </a:rPr>
-              <a:t>DIFFERENTIATED TECHNOLOGY   </a:t>
+              <a:rPr lang="en-US" sz="1050" b="1" dirty="0">
+                <a:solidFill>
+                  <a:srgbClr val="7719E1"/>
+                </a:solidFill>
+                <a:latin typeface="Montserrat" pitchFamily="34" charset="0"/>
+                <a:ea typeface="Montserrat" pitchFamily="34" charset="-122"/>
+                <a:cs typeface="Montserrat" pitchFamily="34" charset="-120"/>
+              </a:rPr>
+              <a:t>DIFFERENTIATED TECHNOLOGY    </a:t>
             </a:r>
             <a:pPr indent="0" marL="0">
               <a:buNone/>
@@ -2894,13 +2722,13 @@
             <a:r>
               <a:rPr lang="en-US" sz="1050" dirty="0">
                 <a:solidFill>
-                  <a:srgbClr val="6B6480"/>
-                </a:solidFill>
-                <a:latin typeface="Calibri" pitchFamily="34" charset="0"/>
-                <a:ea typeface="Calibri" pitchFamily="34" charset="-122"/>
-                <a:cs typeface="Calibri" pitchFamily="34" charset="-120"/>
-              </a:rPr>
-              <a:t>Conexa • ICS • Persistent ID • Identity graph • Cross-walk / “ID Translator” • Native Cloud Apps</a:t>
+                  <a:srgbClr val="5C5C5C"/>
+                </a:solidFill>
+                <a:latin typeface="Montserrat" pitchFamily="34" charset="0"/>
+                <a:ea typeface="Montserrat" pitchFamily="34" charset="-122"/>
+                <a:cs typeface="Montserrat" pitchFamily="34" charset="-120"/>
+              </a:rPr>
+              <a:t>Conexa · ICS · Persistent ID · Identity graph · Cross-walk / “ID Translator” · Native Cloud Apps</a:t>
             </a:r>
             <a:endParaRPr lang="en-US" sz="1050" dirty="0"/>
           </a:p>
@@ -2908,36 +2736,36 @@
       </p:sp>
       <p:sp>
         <p:nvSpPr>
-          <p:cNvPr id="22" name="Shape 20"/>
+          <p:cNvPr id="25" name="Shape 19"/>
           <p:cNvSpPr/>
           <p:nvPr/>
         </p:nvSpPr>
         <p:spPr>
           <a:xfrm>
             <a:off x="548640" y="5029200"/>
-            <a:ext cx="5431536" cy="1298448"/>
+            <a:ext cx="5431536" cy="1170432"/>
           </a:xfrm>
           <a:prstGeom prst="roundRect">
             <a:avLst>
-              <a:gd name="adj" fmla="val 4225"/>
+              <a:gd name="adj" fmla="val 6250"/>
             </a:avLst>
           </a:prstGeom>
           <a:solidFill>
-            <a:srgbClr val="281A48"/>
+            <a:srgbClr val="461478"/>
           </a:solidFill>
           <a:ln/>
         </p:spPr>
       </p:sp>
       <p:sp>
         <p:nvSpPr>
-          <p:cNvPr id="23" name="Text 21"/>
-          <p:cNvSpPr/>
-          <p:nvPr/>
-        </p:nvSpPr>
-        <p:spPr>
-          <a:xfrm>
-            <a:off x="777240" y="5157216"/>
-            <a:ext cx="4974336" cy="274320"/>
+          <p:cNvPr id="26" name="Text 20"/>
+          <p:cNvSpPr/>
+          <p:nvPr/>
+        </p:nvSpPr>
+        <p:spPr>
+          <a:xfrm>
+            <a:off x="804672" y="5148072"/>
+            <a:ext cx="4919472" cy="274320"/>
           </a:xfrm>
           <a:prstGeom prst="rect">
             <a:avLst/>
@@ -2955,11 +2783,11 @@
             <a:r>
               <a:rPr lang="en-US" sz="1200" b="1" spc="150" kern="0" dirty="0">
                 <a:solidFill>
-                  <a:srgbClr val="FACC15"/>
-                </a:solidFill>
-                <a:latin typeface="Calibri" pitchFamily="34" charset="0"/>
-                <a:ea typeface="Calibri" pitchFamily="34" charset="-122"/>
-                <a:cs typeface="Calibri" pitchFamily="34" charset="-120"/>
+                  <a:srgbClr val="FAA825"/>
+                </a:solidFill>
+                <a:latin typeface="Montserrat" pitchFamily="34" charset="0"/>
+                <a:ea typeface="Montserrat" pitchFamily="34" charset="-122"/>
+                <a:cs typeface="Montserrat" pitchFamily="34" charset="-120"/>
               </a:rPr>
               <a:t>BRANDS</a:t>
             </a:r>
@@ -2969,14 +2797,14 @@
       </p:sp>
       <p:sp>
         <p:nvSpPr>
-          <p:cNvPr id="24" name="Text 22"/>
-          <p:cNvSpPr/>
-          <p:nvPr/>
-        </p:nvSpPr>
-        <p:spPr>
-          <a:xfrm>
-            <a:off x="777240" y="5468112"/>
-            <a:ext cx="4974336" cy="749808"/>
+          <p:cNvPr id="27" name="Text 21"/>
+          <p:cNvSpPr/>
+          <p:nvPr/>
+        </p:nvSpPr>
+        <p:spPr>
+          <a:xfrm>
+            <a:off x="804672" y="5449824"/>
+            <a:ext cx="4919472" cy="640080"/>
           </a:xfrm>
           <a:prstGeom prst="rect">
             <a:avLst/>
@@ -2990,57 +2818,57 @@
           <a:p>
             <a:pPr indent="0" marL="0">
               <a:lnSpc>
-                <a:spcPct val="110000"/>
+                <a:spcPct val="112000"/>
               </a:lnSpc>
               <a:buNone/>
             </a:pPr>
             <a:r>
-              <a:rPr lang="en-US" sz="1200" dirty="0">
+              <a:rPr lang="en-US" sz="1150" dirty="0">
                 <a:solidFill>
                   <a:srgbClr val="FFFFFF"/>
                 </a:solidFill>
-                <a:latin typeface="Calibri" pitchFamily="34" charset="0"/>
-                <a:ea typeface="Calibri" pitchFamily="34" charset="-122"/>
-                <a:cs typeface="Calibri" pitchFamily="34" charset="-120"/>
+                <a:latin typeface="Montserrat" pitchFamily="34" charset="0"/>
+                <a:ea typeface="Montserrat" pitchFamily="34" charset="-122"/>
+                <a:cs typeface="Montserrat" pitchFamily="34" charset="-120"/>
               </a:rPr>
               <a:t>Better customer understanding → more addressable customers → better experiences → more efficient media → better measurement.</a:t>
             </a:r>
-            <a:endParaRPr lang="en-US" sz="1200" dirty="0"/>
-          </a:p>
-        </p:txBody>
-      </p:sp>
-      <p:sp>
-        <p:nvSpPr>
-          <p:cNvPr id="25" name="Shape 23"/>
+            <a:endParaRPr lang="en-US" sz="1150" dirty="0"/>
+          </a:p>
+        </p:txBody>
+      </p:sp>
+      <p:sp>
+        <p:nvSpPr>
+          <p:cNvPr id="28" name="Shape 22"/>
           <p:cNvSpPr/>
           <p:nvPr/>
         </p:nvSpPr>
         <p:spPr>
           <a:xfrm>
             <a:off x="6208776" y="5029200"/>
-            <a:ext cx="5431536" cy="1298448"/>
+            <a:ext cx="5431536" cy="1170432"/>
           </a:xfrm>
           <a:prstGeom prst="roundRect">
             <a:avLst>
-              <a:gd name="adj" fmla="val 4225"/>
+              <a:gd name="adj" fmla="val 6250"/>
             </a:avLst>
           </a:prstGeom>
           <a:solidFill>
-            <a:srgbClr val="281A48"/>
+            <a:srgbClr val="461478"/>
           </a:solidFill>
           <a:ln/>
         </p:spPr>
       </p:sp>
       <p:sp>
         <p:nvSpPr>
-          <p:cNvPr id="26" name="Text 24"/>
-          <p:cNvSpPr/>
-          <p:nvPr/>
-        </p:nvSpPr>
-        <p:spPr>
-          <a:xfrm>
-            <a:off x="6437376" y="5157216"/>
-            <a:ext cx="4974336" cy="274320"/>
+          <p:cNvPr id="29" name="Text 23"/>
+          <p:cNvSpPr/>
+          <p:nvPr/>
+        </p:nvSpPr>
+        <p:spPr>
+          <a:xfrm>
+            <a:off x="6464808" y="5148072"/>
+            <a:ext cx="4919472" cy="274320"/>
           </a:xfrm>
           <a:prstGeom prst="rect">
             <a:avLst/>
@@ -3058,11 +2886,11 @@
             <a:r>
               <a:rPr lang="en-US" sz="1200" b="1" spc="150" kern="0" dirty="0">
                 <a:solidFill>
-                  <a:srgbClr val="FACC15"/>
-                </a:solidFill>
-                <a:latin typeface="Calibri" pitchFamily="34" charset="0"/>
-                <a:ea typeface="Calibri" pitchFamily="34" charset="-122"/>
-                <a:cs typeface="Calibri" pitchFamily="34" charset="-120"/>
+                  <a:srgbClr val="FAA825"/>
+                </a:solidFill>
+                <a:latin typeface="Montserrat" pitchFamily="34" charset="0"/>
+                <a:ea typeface="Montserrat" pitchFamily="34" charset="-122"/>
+                <a:cs typeface="Montserrat" pitchFamily="34" charset="-120"/>
               </a:rPr>
               <a:t>PLATFORMS</a:t>
             </a:r>
@@ -3072,14 +2900,14 @@
       </p:sp>
       <p:sp>
         <p:nvSpPr>
-          <p:cNvPr id="27" name="Text 25"/>
-          <p:cNvSpPr/>
-          <p:nvPr/>
-        </p:nvSpPr>
-        <p:spPr>
-          <a:xfrm>
-            <a:off x="6437376" y="5468112"/>
-            <a:ext cx="4974336" cy="749808"/>
+          <p:cNvPr id="30" name="Text 24"/>
+          <p:cNvSpPr/>
+          <p:nvPr/>
+        </p:nvSpPr>
+        <p:spPr>
+          <a:xfrm>
+            <a:off x="6464808" y="5449824"/>
+            <a:ext cx="4919472" cy="640080"/>
           </a:xfrm>
           <a:prstGeom prst="rect">
             <a:avLst/>
@@ -3093,22 +2921,22 @@
           <a:p>
             <a:pPr indent="0" marL="0">
               <a:lnSpc>
-                <a:spcPct val="110000"/>
+                <a:spcPct val="112000"/>
               </a:lnSpc>
               <a:buNone/>
             </a:pPr>
             <a:r>
-              <a:rPr lang="en-US" sz="1200" dirty="0">
+              <a:rPr lang="en-US" sz="1150" dirty="0">
                 <a:solidFill>
                   <a:srgbClr val="FFFFFF"/>
                 </a:solidFill>
-                <a:latin typeface="Calibri" pitchFamily="34" charset="0"/>
-                <a:ea typeface="Calibri" pitchFamily="34" charset="-122"/>
-                <a:cs typeface="Calibri" pitchFamily="34" charset="-120"/>
+                <a:latin typeface="Montserrat" pitchFamily="34" charset="0"/>
+                <a:ea typeface="Montserrat" pitchFamily="34" charset="-122"/>
+                <a:cs typeface="Montserrat" pitchFamily="34" charset="-120"/>
               </a:rPr>
               <a:t>Better identity → stronger products → higher match rates → greater inventory / data value → easier interoperability.</a:t>
             </a:r>
-            <a:endParaRPr lang="en-US" sz="1200" dirty="0"/>
+            <a:endParaRPr lang="en-US" sz="1150" dirty="0"/>
           </a:p>
         </p:txBody>
       </p:sp>
@@ -3152,8 +2980,8 @@
         </p:nvSpPr>
         <p:spPr>
           <a:xfrm>
-            <a:off x="548640" y="384048"/>
-            <a:ext cx="11091672" cy="274320"/>
+            <a:off x="548640" y="411480"/>
+            <a:ext cx="11091672" cy="548640"/>
           </a:xfrm>
           <a:prstGeom prst="rect">
             <a:avLst/>
@@ -3169,91 +2997,76 @@
               <a:buNone/>
             </a:pPr>
             <a:r>
-              <a:rPr lang="en-US" sz="1200" b="1" spc="200" kern="0" dirty="0">
-                <a:solidFill>
-                  <a:srgbClr val="8B5CF6"/>
-                </a:solidFill>
-                <a:latin typeface="Calibri" pitchFamily="34" charset="0"/>
-                <a:ea typeface="Calibri" pitchFamily="34" charset="-122"/>
-                <a:cs typeface="Calibri" pitchFamily="34" charset="-120"/>
-              </a:rPr>
-              <a:t>ICP FRAMEWORK</a:t>
-            </a:r>
-            <a:endParaRPr lang="en-US" sz="1200" dirty="0"/>
-          </a:p>
-        </p:txBody>
-      </p:sp>
-      <p:sp>
-        <p:nvSpPr>
-          <p:cNvPr id="3" name="Text 1"/>
-          <p:cNvSpPr/>
-          <p:nvPr/>
-        </p:nvSpPr>
-        <p:spPr>
-          <a:xfrm>
-            <a:off x="548640" y="621792"/>
-            <a:ext cx="11091672" cy="640080"/>
-          </a:xfrm>
-          <a:prstGeom prst="rect">
-            <a:avLst/>
-          </a:prstGeom>
-          <a:noFill/>
-          <a:ln/>
-        </p:spPr>
-        <p:txBody>
-          <a:bodyPr wrap="square" rtlCol="0" anchor="ctr"/>
-          <a:lstStyle/>
-          <a:p>
-            <a:pPr algn="l" indent="0" marL="0">
-              <a:buNone/>
-            </a:pPr>
-            <a:r>
-              <a:rPr lang="en-US" sz="3400" b="1" dirty="0">
-                <a:solidFill>
-                  <a:srgbClr val="281A48"/>
-                </a:solidFill>
-                <a:latin typeface="Georgia" pitchFamily="34" charset="0"/>
-                <a:ea typeface="Georgia" pitchFamily="34" charset="-122"/>
-                <a:cs typeface="Georgia" pitchFamily="34" charset="-120"/>
+              <a:rPr lang="en-US" sz="3000" b="1" dirty="0">
+                <a:solidFill>
+                  <a:srgbClr val="461478"/>
+                </a:solidFill>
+                <a:latin typeface="Montserrat" pitchFamily="34" charset="0"/>
+                <a:ea typeface="Montserrat" pitchFamily="34" charset="-122"/>
+                <a:cs typeface="Montserrat" pitchFamily="34" charset="-120"/>
               </a:rPr>
               <a:t>Who We’re Targeting</a:t>
             </a:r>
-            <a:endParaRPr lang="en-US" sz="3400" dirty="0"/>
-          </a:p>
-        </p:txBody>
-      </p:sp>
-      <p:sp>
-        <p:nvSpPr>
-          <p:cNvPr id="4" name="Shape 2"/>
-          <p:cNvSpPr/>
-          <p:nvPr/>
-        </p:nvSpPr>
-        <p:spPr>
-          <a:xfrm>
-            <a:off x="548640" y="1417320"/>
+            <a:endParaRPr lang="en-US" sz="3000" dirty="0"/>
+          </a:p>
+        </p:txBody>
+      </p:sp>
+      <p:pic>
+        <p:nvPicPr>
+          <p:cNvPr id="3" name="Image 0" descr="logo_purple.png">    </p:cNvPr>
+          <p:cNvPicPr>
+            <a:picLocks noChangeAspect="1"/>
+          </p:cNvPicPr>
+          <p:nvPr/>
+        </p:nvPicPr>
+        <p:blipFill>
+          <a:blip r:embed="rId1"/>
+          <a:stretch>
+            <a:fillRect/>
+          </a:stretch>
+        </p:blipFill>
+        <p:spPr>
+          <a:xfrm>
+            <a:off x="10680192" y="6400800"/>
+            <a:ext cx="960120" cy="259492"/>
+          </a:xfrm>
+          <a:prstGeom prst="rect">
+            <a:avLst/>
+          </a:prstGeom>
+        </p:spPr>
+      </p:pic>
+      <p:sp>
+        <p:nvSpPr>
+          <p:cNvPr id="4" name="Shape 1"/>
+          <p:cNvSpPr/>
+          <p:nvPr/>
+        </p:nvSpPr>
+        <p:spPr>
+          <a:xfrm>
+            <a:off x="548640" y="1143000"/>
             <a:ext cx="5408676" cy="457200"/>
           </a:xfrm>
           <a:prstGeom prst="roundRect">
             <a:avLst>
-              <a:gd name="adj" fmla="val 10000"/>
+              <a:gd name="adj" fmla="val 12000"/>
             </a:avLst>
           </a:prstGeom>
           <a:solidFill>
-            <a:srgbClr val="4A3580"/>
+            <a:srgbClr val="461478"/>
           </a:solidFill>
           <a:ln/>
         </p:spPr>
       </p:sp>
       <p:sp>
         <p:nvSpPr>
-          <p:cNvPr id="5" name="Text 3"/>
-          <p:cNvSpPr/>
-          <p:nvPr/>
-        </p:nvSpPr>
-        <p:spPr>
-          <a:xfrm>
-            <a:off x="777240" y="1417320"/>
-            <a:ext cx="4951476" cy="457200"/>
+          <p:cNvPr id="5" name="Text 2"/>
+          <p:cNvSpPr/>
+          <p:nvPr/>
+        </p:nvSpPr>
+        <p:spPr>
+          <a:xfrm>
+            <a:off x="804672" y="1143000"/>
+            <a:ext cx="4896612" cy="457200"/>
           </a:xfrm>
           <a:prstGeom prst="rect">
             <a:avLst/>
@@ -3269,30 +3082,30 @@
               <a:buNone/>
             </a:pPr>
             <a:r>
-              <a:rPr lang="en-US" sz="1500" b="1" spc="150" kern="0" dirty="0">
+              <a:rPr lang="en-US" sz="1400" b="1" spc="150" kern="0" dirty="0">
                 <a:solidFill>
                   <a:srgbClr val="FFFFFF"/>
                 </a:solidFill>
-                <a:latin typeface="Calibri" pitchFamily="34" charset="0"/>
-                <a:ea typeface="Calibri" pitchFamily="34" charset="-122"/>
-                <a:cs typeface="Calibri" pitchFamily="34" charset="-120"/>
+                <a:latin typeface="Montserrat" pitchFamily="34" charset="0"/>
+                <a:ea typeface="Montserrat" pitchFamily="34" charset="-122"/>
+                <a:cs typeface="Montserrat" pitchFamily="34" charset="-120"/>
               </a:rPr>
               <a:t>BRAND ICP</a:t>
             </a:r>
-            <a:endParaRPr lang="en-US" sz="1500" dirty="0"/>
-          </a:p>
-        </p:txBody>
-      </p:sp>
-      <p:sp>
-        <p:nvSpPr>
-          <p:cNvPr id="6" name="Text 4"/>
-          <p:cNvSpPr/>
-          <p:nvPr/>
-        </p:nvSpPr>
-        <p:spPr>
-          <a:xfrm>
-            <a:off x="594360" y="1984248"/>
-            <a:ext cx="5317236" cy="1188720"/>
+            <a:endParaRPr lang="en-US" sz="1400" dirty="0"/>
+          </a:p>
+        </p:txBody>
+      </p:sp>
+      <p:sp>
+        <p:nvSpPr>
+          <p:cNvPr id="6" name="Text 3"/>
+          <p:cNvSpPr/>
+          <p:nvPr/>
+        </p:nvSpPr>
+        <p:spPr>
+          <a:xfrm>
+            <a:off x="594360" y="1709928"/>
+            <a:ext cx="5317236" cy="1234440"/>
           </a:xfrm>
           <a:prstGeom prst="rect">
             <a:avLst/>
@@ -3306,57 +3119,57 @@
           <a:p>
             <a:pPr indent="0" marL="0">
               <a:lnSpc>
-                <a:spcPct val="112000"/>
+                <a:spcPct val="115000"/>
               </a:lnSpc>
               <a:buNone/>
             </a:pPr>
             <a:r>
-              <a:rPr lang="en-US" sz="1150" i="1" dirty="0">
-                <a:solidFill>
-                  <a:srgbClr val="1E1338"/>
-                </a:solidFill>
-                <a:latin typeface="Georgia" pitchFamily="34" charset="0"/>
-                <a:ea typeface="Georgia" pitchFamily="34" charset="-122"/>
-                <a:cs typeface="Georgia" pitchFamily="34" charset="-120"/>
+              <a:rPr lang="en-US" sz="1100" dirty="0">
+                <a:solidFill>
+                  <a:srgbClr val="333333"/>
+                </a:solidFill>
+                <a:latin typeface="Montserrat" pitchFamily="34" charset="0"/>
+                <a:ea typeface="Montserrat" pitchFamily="34" charset="-122"/>
+                <a:cs typeface="Montserrat" pitchFamily="34" charset="-120"/>
               </a:rPr>
               <a:t>Enterprise brands with significant first-party customer data and modern data infrastructure that need a more accurate, persistent, and interoperable identity foundation to improve customer understanding, addressability, activation, personalization, and measurement.</a:t>
             </a:r>
-            <a:endParaRPr lang="en-US" sz="1150" dirty="0"/>
-          </a:p>
-        </p:txBody>
-      </p:sp>
-      <p:sp>
-        <p:nvSpPr>
-          <p:cNvPr id="7" name="Shape 5"/>
-          <p:cNvSpPr/>
-          <p:nvPr/>
-        </p:nvSpPr>
-        <p:spPr>
-          <a:xfrm>
-            <a:off x="548640" y="3200400"/>
+            <a:endParaRPr lang="en-US" sz="1100" dirty="0"/>
+          </a:p>
+        </p:txBody>
+      </p:sp>
+      <p:sp>
+        <p:nvSpPr>
+          <p:cNvPr id="7" name="Shape 4"/>
+          <p:cNvSpPr/>
+          <p:nvPr/>
+        </p:nvSpPr>
+        <p:spPr>
+          <a:xfrm>
+            <a:off x="548640" y="3017520"/>
             <a:ext cx="5408676" cy="438912"/>
           </a:xfrm>
           <a:prstGeom prst="roundRect">
             <a:avLst>
-              <a:gd name="adj" fmla="val 8333"/>
+              <a:gd name="adj" fmla="val 10417"/>
             </a:avLst>
           </a:prstGeom>
           <a:solidFill>
-            <a:srgbClr val="F3F0FA"/>
+            <a:srgbClr val="ECE3F4"/>
           </a:solidFill>
           <a:ln/>
         </p:spPr>
       </p:sp>
       <p:sp>
         <p:nvSpPr>
-          <p:cNvPr id="8" name="Text 6"/>
-          <p:cNvSpPr/>
-          <p:nvPr/>
-        </p:nvSpPr>
-        <p:spPr>
-          <a:xfrm>
-            <a:off x="777240" y="3200400"/>
-            <a:ext cx="4951476" cy="438912"/>
+          <p:cNvPr id="8" name="Text 5"/>
+          <p:cNvSpPr/>
+          <p:nvPr/>
+        </p:nvSpPr>
+        <p:spPr>
+          <a:xfrm>
+            <a:off x="804672" y="3017520"/>
+            <a:ext cx="4896612" cy="438912"/>
           </a:xfrm>
           <a:prstGeom prst="rect">
             <a:avLst/>
@@ -3372,52 +3185,52 @@
               <a:buNone/>
             </a:pPr>
             <a:r>
-              <a:rPr lang="en-US" sz="1200" dirty="0">
-                <a:solidFill>
-                  <a:srgbClr val="1E1338"/>
-                </a:solidFill>
-                <a:latin typeface="Calibri" pitchFamily="34" charset="0"/>
-                <a:ea typeface="Calibri" pitchFamily="34" charset="-122"/>
-                <a:cs typeface="Calibri" pitchFamily="34" charset="-120"/>
+              <a:rPr lang="en-US" sz="1150" dirty="0">
+                <a:solidFill>
+                  <a:srgbClr val="333333"/>
+                </a:solidFill>
+                <a:latin typeface="Montserrat" pitchFamily="34" charset="0"/>
+                <a:ea typeface="Montserrat" pitchFamily="34" charset="-122"/>
+                <a:cs typeface="Montserrat" pitchFamily="34" charset="-120"/>
               </a:rPr>
               <a:t>Significant first-party data</a:t>
             </a:r>
-            <a:endParaRPr lang="en-US" sz="1200" dirty="0"/>
-          </a:p>
-        </p:txBody>
-      </p:sp>
-      <p:sp>
-        <p:nvSpPr>
-          <p:cNvPr id="9" name="Shape 7"/>
-          <p:cNvSpPr/>
-          <p:nvPr/>
-        </p:nvSpPr>
-        <p:spPr>
-          <a:xfrm>
-            <a:off x="548640" y="3712464"/>
+            <a:endParaRPr lang="en-US" sz="1150" dirty="0"/>
+          </a:p>
+        </p:txBody>
+      </p:sp>
+      <p:sp>
+        <p:nvSpPr>
+          <p:cNvPr id="9" name="Shape 6"/>
+          <p:cNvSpPr/>
+          <p:nvPr/>
+        </p:nvSpPr>
+        <p:spPr>
+          <a:xfrm>
+            <a:off x="548640" y="3547872"/>
             <a:ext cx="5408676" cy="438912"/>
           </a:xfrm>
           <a:prstGeom prst="roundRect">
             <a:avLst>
-              <a:gd name="adj" fmla="val 8333"/>
+              <a:gd name="adj" fmla="val 10417"/>
             </a:avLst>
           </a:prstGeom>
           <a:solidFill>
-            <a:srgbClr val="EAE4F7"/>
+            <a:srgbClr val="F2F2F2"/>
           </a:solidFill>
           <a:ln/>
         </p:spPr>
       </p:sp>
       <p:sp>
         <p:nvSpPr>
-          <p:cNvPr id="10" name="Text 8"/>
-          <p:cNvSpPr/>
-          <p:nvPr/>
-        </p:nvSpPr>
-        <p:spPr>
-          <a:xfrm>
-            <a:off x="777240" y="3712464"/>
-            <a:ext cx="4951476" cy="438912"/>
+          <p:cNvPr id="10" name="Text 7"/>
+          <p:cNvSpPr/>
+          <p:nvPr/>
+        </p:nvSpPr>
+        <p:spPr>
+          <a:xfrm>
+            <a:off x="804672" y="3547872"/>
+            <a:ext cx="4896612" cy="438912"/>
           </a:xfrm>
           <a:prstGeom prst="rect">
             <a:avLst/>
@@ -3433,52 +3246,52 @@
               <a:buNone/>
             </a:pPr>
             <a:r>
-              <a:rPr lang="en-US" sz="1200" dirty="0">
-                <a:solidFill>
-                  <a:srgbClr val="1E1338"/>
-                </a:solidFill>
-                <a:latin typeface="Calibri" pitchFamily="34" charset="0"/>
-                <a:ea typeface="Calibri" pitchFamily="34" charset="-122"/>
-                <a:cs typeface="Calibri" pitchFamily="34" charset="-120"/>
+              <a:rPr lang="en-US" sz="1150" dirty="0">
+                <a:solidFill>
+                  <a:srgbClr val="333333"/>
+                </a:solidFill>
+                <a:latin typeface="Montserrat" pitchFamily="34" charset="0"/>
+                <a:ea typeface="Montserrat" pitchFamily="34" charset="-122"/>
+                <a:cs typeface="Montserrat" pitchFamily="34" charset="-120"/>
               </a:rPr>
               <a:t>Databricks / Snowflake or modern cloud stack</a:t>
             </a:r>
-            <a:endParaRPr lang="en-US" sz="1200" dirty="0"/>
-          </a:p>
-        </p:txBody>
-      </p:sp>
-      <p:sp>
-        <p:nvSpPr>
-          <p:cNvPr id="11" name="Shape 9"/>
-          <p:cNvSpPr/>
-          <p:nvPr/>
-        </p:nvSpPr>
-        <p:spPr>
-          <a:xfrm>
-            <a:off x="548640" y="4224528"/>
+            <a:endParaRPr lang="en-US" sz="1150" dirty="0"/>
+          </a:p>
+        </p:txBody>
+      </p:sp>
+      <p:sp>
+        <p:nvSpPr>
+          <p:cNvPr id="11" name="Shape 8"/>
+          <p:cNvSpPr/>
+          <p:nvPr/>
+        </p:nvSpPr>
+        <p:spPr>
+          <a:xfrm>
+            <a:off x="548640" y="4078224"/>
             <a:ext cx="5408676" cy="438912"/>
           </a:xfrm>
           <a:prstGeom prst="roundRect">
             <a:avLst>
-              <a:gd name="adj" fmla="val 8333"/>
+              <a:gd name="adj" fmla="val 10417"/>
             </a:avLst>
           </a:prstGeom>
           <a:solidFill>
-            <a:srgbClr val="F3F0FA"/>
+            <a:srgbClr val="ECE3F4"/>
           </a:solidFill>
           <a:ln/>
         </p:spPr>
       </p:sp>
       <p:sp>
         <p:nvSpPr>
-          <p:cNvPr id="12" name="Text 10"/>
-          <p:cNvSpPr/>
-          <p:nvPr/>
-        </p:nvSpPr>
-        <p:spPr>
-          <a:xfrm>
-            <a:off x="777240" y="4224528"/>
-            <a:ext cx="4951476" cy="438912"/>
+          <p:cNvPr id="12" name="Text 9"/>
+          <p:cNvSpPr/>
+          <p:nvPr/>
+        </p:nvSpPr>
+        <p:spPr>
+          <a:xfrm>
+            <a:off x="804672" y="4078224"/>
+            <a:ext cx="4896612" cy="438912"/>
           </a:xfrm>
           <a:prstGeom prst="rect">
             <a:avLst/>
@@ -3494,52 +3307,52 @@
               <a:buNone/>
             </a:pPr>
             <a:r>
-              <a:rPr lang="en-US" sz="1200" dirty="0">
-                <a:solidFill>
-                  <a:srgbClr val="1E1338"/>
-                </a:solidFill>
-                <a:latin typeface="Calibri" pitchFamily="34" charset="0"/>
-                <a:ea typeface="Calibri" pitchFamily="34" charset="-122"/>
-                <a:cs typeface="Calibri" pitchFamily="34" charset="-120"/>
+              <a:rPr lang="en-US" sz="1150" dirty="0">
+                <a:solidFill>
+                  <a:srgbClr val="333333"/>
+                </a:solidFill>
+                <a:latin typeface="Montserrat" pitchFamily="34" charset="0"/>
+                <a:ea typeface="Montserrat" pitchFamily="34" charset="-122"/>
+                <a:cs typeface="Montserrat" pitchFamily="34" charset="-120"/>
               </a:rPr>
               <a:t>Identity fragmentation across systems</a:t>
             </a:r>
-            <a:endParaRPr lang="en-US" sz="1200" dirty="0"/>
-          </a:p>
-        </p:txBody>
-      </p:sp>
-      <p:sp>
-        <p:nvSpPr>
-          <p:cNvPr id="13" name="Shape 11"/>
-          <p:cNvSpPr/>
-          <p:nvPr/>
-        </p:nvSpPr>
-        <p:spPr>
-          <a:xfrm>
-            <a:off x="548640" y="4736592"/>
+            <a:endParaRPr lang="en-US" sz="1150" dirty="0"/>
+          </a:p>
+        </p:txBody>
+      </p:sp>
+      <p:sp>
+        <p:nvSpPr>
+          <p:cNvPr id="13" name="Shape 10"/>
+          <p:cNvSpPr/>
+          <p:nvPr/>
+        </p:nvSpPr>
+        <p:spPr>
+          <a:xfrm>
+            <a:off x="548640" y="4608576"/>
             <a:ext cx="5408676" cy="438912"/>
           </a:xfrm>
           <a:prstGeom prst="roundRect">
             <a:avLst>
-              <a:gd name="adj" fmla="val 8333"/>
+              <a:gd name="adj" fmla="val 10417"/>
             </a:avLst>
           </a:prstGeom>
           <a:solidFill>
-            <a:srgbClr val="EAE4F7"/>
+            <a:srgbClr val="F2F2F2"/>
           </a:solidFill>
           <a:ln/>
         </p:spPr>
       </p:sp>
       <p:sp>
         <p:nvSpPr>
-          <p:cNvPr id="14" name="Text 12"/>
-          <p:cNvSpPr/>
-          <p:nvPr/>
-        </p:nvSpPr>
-        <p:spPr>
-          <a:xfrm>
-            <a:off x="777240" y="4736592"/>
-            <a:ext cx="4951476" cy="438912"/>
+          <p:cNvPr id="14" name="Text 11"/>
+          <p:cNvSpPr/>
+          <p:nvPr/>
+        </p:nvSpPr>
+        <p:spPr>
+          <a:xfrm>
+            <a:off x="804672" y="4608576"/>
+            <a:ext cx="4896612" cy="438912"/>
           </a:xfrm>
           <a:prstGeom prst="rect">
             <a:avLst/>
@@ -3555,30 +3368,30 @@
               <a:buNone/>
             </a:pPr>
             <a:r>
-              <a:rPr lang="en-US" sz="1200" dirty="0">
-                <a:solidFill>
-                  <a:srgbClr val="1E1338"/>
-                </a:solidFill>
-                <a:latin typeface="Calibri" pitchFamily="34" charset="0"/>
-                <a:ea typeface="Calibri" pitchFamily="34" charset="-122"/>
-                <a:cs typeface="Calibri" pitchFamily="34" charset="-120"/>
+              <a:rPr lang="en-US" sz="1150" dirty="0">
+                <a:solidFill>
+                  <a:srgbClr val="333333"/>
+                </a:solidFill>
+                <a:latin typeface="Montserrat" pitchFamily="34" charset="0"/>
+                <a:ea typeface="Montserrat" pitchFamily="34" charset="-122"/>
+                <a:cs typeface="Montserrat" pitchFamily="34" charset="-120"/>
               </a:rPr>
               <a:t>Needs better understanding, reach, activation, measurement</a:t>
             </a:r>
-            <a:endParaRPr lang="en-US" sz="1200" dirty="0"/>
-          </a:p>
-        </p:txBody>
-      </p:sp>
-      <p:sp>
-        <p:nvSpPr>
-          <p:cNvPr id="15" name="Text 13"/>
-          <p:cNvSpPr/>
-          <p:nvPr/>
-        </p:nvSpPr>
-        <p:spPr>
-          <a:xfrm>
-            <a:off x="777240" y="5257800"/>
-            <a:ext cx="4951476" cy="320040"/>
+            <a:endParaRPr lang="en-US" sz="1150" dirty="0"/>
+          </a:p>
+        </p:txBody>
+      </p:sp>
+      <p:sp>
+        <p:nvSpPr>
+          <p:cNvPr id="15" name="Text 12"/>
+          <p:cNvSpPr/>
+          <p:nvPr/>
+        </p:nvSpPr>
+        <p:spPr>
+          <a:xfrm>
+            <a:off x="804672" y="5184648"/>
+            <a:ext cx="4896612" cy="320040"/>
           </a:xfrm>
           <a:prstGeom prst="rect">
             <a:avLst/>
@@ -3594,52 +3407,52 @@
               <a:buNone/>
             </a:pPr>
             <a:r>
-              <a:rPr lang="en-US" sz="1200" b="1" dirty="0">
-                <a:solidFill>
-                  <a:srgbClr val="8B5CF6"/>
-                </a:solidFill>
-                <a:latin typeface="Calibri" pitchFamily="34" charset="0"/>
-                <a:ea typeface="Calibri" pitchFamily="34" charset="-122"/>
-                <a:cs typeface="Calibri" pitchFamily="34" charset="-120"/>
-              </a:rPr>
-              <a:t>Buyers: CDO, CMO, MarTech, Analytics</a:t>
-            </a:r>
-            <a:endParaRPr lang="en-US" sz="1200" dirty="0"/>
-          </a:p>
-        </p:txBody>
-      </p:sp>
-      <p:sp>
-        <p:nvSpPr>
-          <p:cNvPr id="16" name="Shape 14"/>
-          <p:cNvSpPr/>
-          <p:nvPr/>
-        </p:nvSpPr>
-        <p:spPr>
-          <a:xfrm>
-            <a:off x="6231636" y="1417320"/>
+              <a:rPr lang="en-US" sz="1150" b="1" dirty="0">
+                <a:solidFill>
+                  <a:srgbClr val="7719E1"/>
+                </a:solidFill>
+                <a:latin typeface="Montserrat" pitchFamily="34" charset="0"/>
+                <a:ea typeface="Montserrat" pitchFamily="34" charset="-122"/>
+                <a:cs typeface="Montserrat" pitchFamily="34" charset="-120"/>
+              </a:rPr>
+              <a:t>Buyers:  CDO · CMO · MarTech · Analytics</a:t>
+            </a:r>
+            <a:endParaRPr lang="en-US" sz="1150" dirty="0"/>
+          </a:p>
+        </p:txBody>
+      </p:sp>
+      <p:sp>
+        <p:nvSpPr>
+          <p:cNvPr id="16" name="Shape 13"/>
+          <p:cNvSpPr/>
+          <p:nvPr/>
+        </p:nvSpPr>
+        <p:spPr>
+          <a:xfrm>
+            <a:off x="6231636" y="1143000"/>
             <a:ext cx="5408676" cy="457200"/>
           </a:xfrm>
           <a:prstGeom prst="roundRect">
             <a:avLst>
-              <a:gd name="adj" fmla="val 10000"/>
+              <a:gd name="adj" fmla="val 12000"/>
             </a:avLst>
           </a:prstGeom>
           <a:solidFill>
-            <a:srgbClr val="281A48"/>
+            <a:srgbClr val="461478"/>
           </a:solidFill>
           <a:ln/>
         </p:spPr>
       </p:sp>
       <p:sp>
         <p:nvSpPr>
-          <p:cNvPr id="17" name="Text 15"/>
-          <p:cNvSpPr/>
-          <p:nvPr/>
-        </p:nvSpPr>
-        <p:spPr>
-          <a:xfrm>
-            <a:off x="6460236" y="1417320"/>
-            <a:ext cx="4951476" cy="457200"/>
+          <p:cNvPr id="17" name="Text 14"/>
+          <p:cNvSpPr/>
+          <p:nvPr/>
+        </p:nvSpPr>
+        <p:spPr>
+          <a:xfrm>
+            <a:off x="6487668" y="1143000"/>
+            <a:ext cx="4896612" cy="457200"/>
           </a:xfrm>
           <a:prstGeom prst="rect">
             <a:avLst/>
@@ -3655,30 +3468,30 @@
               <a:buNone/>
             </a:pPr>
             <a:r>
-              <a:rPr lang="en-US" sz="1500" b="1" spc="150" kern="0" dirty="0">
+              <a:rPr lang="en-US" sz="1400" b="1" spc="150" kern="0" dirty="0">
                 <a:solidFill>
                   <a:srgbClr val="FFFFFF"/>
                 </a:solidFill>
-                <a:latin typeface="Calibri" pitchFamily="34" charset="0"/>
-                <a:ea typeface="Calibri" pitchFamily="34" charset="-122"/>
-                <a:cs typeface="Calibri" pitchFamily="34" charset="-120"/>
+                <a:latin typeface="Montserrat" pitchFamily="34" charset="0"/>
+                <a:ea typeface="Montserrat" pitchFamily="34" charset="-122"/>
+                <a:cs typeface="Montserrat" pitchFamily="34" charset="-120"/>
               </a:rPr>
               <a:t>PLATFORM ICP</a:t>
             </a:r>
-            <a:endParaRPr lang="en-US" sz="1500" dirty="0"/>
-          </a:p>
-        </p:txBody>
-      </p:sp>
-      <p:sp>
-        <p:nvSpPr>
-          <p:cNvPr id="18" name="Text 16"/>
-          <p:cNvSpPr/>
-          <p:nvPr/>
-        </p:nvSpPr>
-        <p:spPr>
-          <a:xfrm>
-            <a:off x="6277356" y="1984248"/>
-            <a:ext cx="5317236" cy="1188720"/>
+            <a:endParaRPr lang="en-US" sz="1400" dirty="0"/>
+          </a:p>
+        </p:txBody>
+      </p:sp>
+      <p:sp>
+        <p:nvSpPr>
+          <p:cNvPr id="18" name="Text 15"/>
+          <p:cNvSpPr/>
+          <p:nvPr/>
+        </p:nvSpPr>
+        <p:spPr>
+          <a:xfrm>
+            <a:off x="6277356" y="1709928"/>
+            <a:ext cx="5317236" cy="1234440"/>
           </a:xfrm>
           <a:prstGeom prst="rect">
             <a:avLst/>
@@ -3692,57 +3505,57 @@
           <a:p>
             <a:pPr indent="0" marL="0">
               <a:lnSpc>
-                <a:spcPct val="112000"/>
+                <a:spcPct val="115000"/>
               </a:lnSpc>
               <a:buNone/>
             </a:pPr>
             <a:r>
-              <a:rPr lang="en-US" sz="1150" i="1" dirty="0">
-                <a:solidFill>
-                  <a:srgbClr val="1E1338"/>
-                </a:solidFill>
-                <a:latin typeface="Georgia" pitchFamily="34" charset="0"/>
-                <a:ea typeface="Georgia" pitchFamily="34" charset="-122"/>
-                <a:cs typeface="Georgia" pitchFamily="34" charset="-120"/>
+              <a:rPr lang="en-US" sz="1100" dirty="0">
+                <a:solidFill>
+                  <a:srgbClr val="333333"/>
+                </a:solidFill>
+                <a:latin typeface="Montserrat" pitchFamily="34" charset="0"/>
+                <a:ea typeface="Montserrat" pitchFamily="34" charset="-122"/>
+                <a:cs typeface="Montserrat" pitchFamily="34" charset="-120"/>
               </a:rPr>
               <a:t>Data, media and technology platforms with sophisticated infrastructure that need identity as a foundational capability to improve their products, customer interoperability, inventory / data value, or monetization.</a:t>
             </a:r>
-            <a:endParaRPr lang="en-US" sz="1150" dirty="0"/>
-          </a:p>
-        </p:txBody>
-      </p:sp>
-      <p:sp>
-        <p:nvSpPr>
-          <p:cNvPr id="19" name="Shape 17"/>
-          <p:cNvSpPr/>
-          <p:nvPr/>
-        </p:nvSpPr>
-        <p:spPr>
-          <a:xfrm>
-            <a:off x="6231636" y="3200400"/>
+            <a:endParaRPr lang="en-US" sz="1100" dirty="0"/>
+          </a:p>
+        </p:txBody>
+      </p:sp>
+      <p:sp>
+        <p:nvSpPr>
+          <p:cNvPr id="19" name="Shape 16"/>
+          <p:cNvSpPr/>
+          <p:nvPr/>
+        </p:nvSpPr>
+        <p:spPr>
+          <a:xfrm>
+            <a:off x="6231636" y="3017520"/>
             <a:ext cx="5408676" cy="438912"/>
           </a:xfrm>
           <a:prstGeom prst="roundRect">
             <a:avLst>
-              <a:gd name="adj" fmla="val 8333"/>
+              <a:gd name="adj" fmla="val 10417"/>
             </a:avLst>
           </a:prstGeom>
           <a:solidFill>
-            <a:srgbClr val="F3F0FA"/>
+            <a:srgbClr val="ECE3F4"/>
           </a:solidFill>
           <a:ln/>
         </p:spPr>
       </p:sp>
       <p:sp>
         <p:nvSpPr>
-          <p:cNvPr id="20" name="Text 18"/>
-          <p:cNvSpPr/>
-          <p:nvPr/>
-        </p:nvSpPr>
-        <p:spPr>
-          <a:xfrm>
-            <a:off x="6460236" y="3200400"/>
-            <a:ext cx="4951476" cy="438912"/>
+          <p:cNvPr id="20" name="Text 17"/>
+          <p:cNvSpPr/>
+          <p:nvPr/>
+        </p:nvSpPr>
+        <p:spPr>
+          <a:xfrm>
+            <a:off x="6487668" y="3017520"/>
+            <a:ext cx="4896612" cy="438912"/>
           </a:xfrm>
           <a:prstGeom prst="rect">
             <a:avLst/>
@@ -3758,52 +3571,52 @@
               <a:buNone/>
             </a:pPr>
             <a:r>
-              <a:rPr lang="en-US" sz="1200" dirty="0">
-                <a:solidFill>
-                  <a:srgbClr val="1E1338"/>
-                </a:solidFill>
-                <a:latin typeface="Calibri" pitchFamily="34" charset="0"/>
-                <a:ea typeface="Calibri" pitchFamily="34" charset="-122"/>
-                <a:cs typeface="Calibri" pitchFamily="34" charset="-120"/>
+              <a:rPr lang="en-US" sz="1150" dirty="0">
+                <a:solidFill>
+                  <a:srgbClr val="333333"/>
+                </a:solidFill>
+                <a:latin typeface="Montserrat" pitchFamily="34" charset="0"/>
+                <a:ea typeface="Montserrat" pitchFamily="34" charset="-122"/>
+                <a:cs typeface="Montserrat" pitchFamily="34" charset="-120"/>
               </a:rPr>
               <a:t>Large-scale identity / data ecosystem</a:t>
             </a:r>
-            <a:endParaRPr lang="en-US" sz="1200" dirty="0"/>
-          </a:p>
-        </p:txBody>
-      </p:sp>
-      <p:sp>
-        <p:nvSpPr>
-          <p:cNvPr id="21" name="Shape 19"/>
-          <p:cNvSpPr/>
-          <p:nvPr/>
-        </p:nvSpPr>
-        <p:spPr>
-          <a:xfrm>
-            <a:off x="6231636" y="3712464"/>
+            <a:endParaRPr lang="en-US" sz="1150" dirty="0"/>
+          </a:p>
+        </p:txBody>
+      </p:sp>
+      <p:sp>
+        <p:nvSpPr>
+          <p:cNvPr id="21" name="Shape 18"/>
+          <p:cNvSpPr/>
+          <p:nvPr/>
+        </p:nvSpPr>
+        <p:spPr>
+          <a:xfrm>
+            <a:off x="6231636" y="3547872"/>
             <a:ext cx="5408676" cy="438912"/>
           </a:xfrm>
           <a:prstGeom prst="roundRect">
             <a:avLst>
-              <a:gd name="adj" fmla="val 8333"/>
+              <a:gd name="adj" fmla="val 10417"/>
             </a:avLst>
           </a:prstGeom>
           <a:solidFill>
-            <a:srgbClr val="EAE4F7"/>
+            <a:srgbClr val="F2F2F2"/>
           </a:solidFill>
           <a:ln/>
         </p:spPr>
       </p:sp>
       <p:sp>
         <p:nvSpPr>
-          <p:cNvPr id="22" name="Text 20"/>
-          <p:cNvSpPr/>
-          <p:nvPr/>
-        </p:nvSpPr>
-        <p:spPr>
-          <a:xfrm>
-            <a:off x="6460236" y="3712464"/>
-            <a:ext cx="4951476" cy="438912"/>
+          <p:cNvPr id="22" name="Text 19"/>
+          <p:cNvSpPr/>
+          <p:nvPr/>
+        </p:nvSpPr>
+        <p:spPr>
+          <a:xfrm>
+            <a:off x="6487668" y="3547872"/>
+            <a:ext cx="4896612" cy="438912"/>
           </a:xfrm>
           <a:prstGeom prst="rect">
             <a:avLst/>
@@ -3819,52 +3632,52 @@
               <a:buNone/>
             </a:pPr>
             <a:r>
-              <a:rPr lang="en-US" sz="1200" dirty="0">
-                <a:solidFill>
-                  <a:srgbClr val="1E1338"/>
-                </a:solidFill>
-                <a:latin typeface="Calibri" pitchFamily="34" charset="0"/>
-                <a:ea typeface="Calibri" pitchFamily="34" charset="-122"/>
-                <a:cs typeface="Calibri" pitchFamily="34" charset="-120"/>
+              <a:rPr lang="en-US" sz="1150" dirty="0">
+                <a:solidFill>
+                  <a:srgbClr val="333333"/>
+                </a:solidFill>
+                <a:latin typeface="Montserrat" pitchFamily="34" charset="0"/>
+                <a:ea typeface="Montserrat" pitchFamily="34" charset="-122"/>
+                <a:cs typeface="Montserrat" pitchFamily="34" charset="-120"/>
               </a:rPr>
               <a:t>Sophisticated platform infrastructure</a:t>
             </a:r>
-            <a:endParaRPr lang="en-US" sz="1200" dirty="0"/>
-          </a:p>
-        </p:txBody>
-      </p:sp>
-      <p:sp>
-        <p:nvSpPr>
-          <p:cNvPr id="23" name="Shape 21"/>
-          <p:cNvSpPr/>
-          <p:nvPr/>
-        </p:nvSpPr>
-        <p:spPr>
-          <a:xfrm>
-            <a:off x="6231636" y="4224528"/>
+            <a:endParaRPr lang="en-US" sz="1150" dirty="0"/>
+          </a:p>
+        </p:txBody>
+      </p:sp>
+      <p:sp>
+        <p:nvSpPr>
+          <p:cNvPr id="23" name="Shape 20"/>
+          <p:cNvSpPr/>
+          <p:nvPr/>
+        </p:nvSpPr>
+        <p:spPr>
+          <a:xfrm>
+            <a:off x="6231636" y="4078224"/>
             <a:ext cx="5408676" cy="438912"/>
           </a:xfrm>
           <a:prstGeom prst="roundRect">
             <a:avLst>
-              <a:gd name="adj" fmla="val 8333"/>
+              <a:gd name="adj" fmla="val 10417"/>
             </a:avLst>
           </a:prstGeom>
           <a:solidFill>
-            <a:srgbClr val="F3F0FA"/>
+            <a:srgbClr val="ECE3F4"/>
           </a:solidFill>
           <a:ln/>
         </p:spPr>
       </p:sp>
       <p:sp>
         <p:nvSpPr>
-          <p:cNvPr id="24" name="Text 22"/>
-          <p:cNvSpPr/>
-          <p:nvPr/>
-        </p:nvSpPr>
-        <p:spPr>
-          <a:xfrm>
-            <a:off x="6460236" y="4224528"/>
-            <a:ext cx="4951476" cy="438912"/>
+          <p:cNvPr id="24" name="Text 21"/>
+          <p:cNvSpPr/>
+          <p:nvPr/>
+        </p:nvSpPr>
+        <p:spPr>
+          <a:xfrm>
+            <a:off x="6487668" y="4078224"/>
+            <a:ext cx="4896612" cy="438912"/>
           </a:xfrm>
           <a:prstGeom prst="rect">
             <a:avLst/>
@@ -3880,52 +3693,52 @@
               <a:buNone/>
             </a:pPr>
             <a:r>
-              <a:rPr lang="en-US" sz="1200" dirty="0">
-                <a:solidFill>
-                  <a:srgbClr val="1E1338"/>
-                </a:solidFill>
-                <a:latin typeface="Calibri" pitchFamily="34" charset="0"/>
-                <a:ea typeface="Calibri" pitchFamily="34" charset="-122"/>
-                <a:cs typeface="Calibri" pitchFamily="34" charset="-120"/>
+              <a:rPr lang="en-US" sz="1150" dirty="0">
+                <a:solidFill>
+                  <a:srgbClr val="333333"/>
+                </a:solidFill>
+                <a:latin typeface="Montserrat" pitchFamily="34" charset="0"/>
+                <a:ea typeface="Montserrat" pitchFamily="34" charset="-122"/>
+                <a:cs typeface="Montserrat" pitchFamily="34" charset="-120"/>
               </a:rPr>
               <a:t>Identity needed as product infrastructure</a:t>
             </a:r>
-            <a:endParaRPr lang="en-US" sz="1200" dirty="0"/>
-          </a:p>
-        </p:txBody>
-      </p:sp>
-      <p:sp>
-        <p:nvSpPr>
-          <p:cNvPr id="25" name="Shape 23"/>
-          <p:cNvSpPr/>
-          <p:nvPr/>
-        </p:nvSpPr>
-        <p:spPr>
-          <a:xfrm>
-            <a:off x="6231636" y="4736592"/>
+            <a:endParaRPr lang="en-US" sz="1150" dirty="0"/>
+          </a:p>
+        </p:txBody>
+      </p:sp>
+      <p:sp>
+        <p:nvSpPr>
+          <p:cNvPr id="25" name="Shape 22"/>
+          <p:cNvSpPr/>
+          <p:nvPr/>
+        </p:nvSpPr>
+        <p:spPr>
+          <a:xfrm>
+            <a:off x="6231636" y="4608576"/>
             <a:ext cx="5408676" cy="438912"/>
           </a:xfrm>
           <a:prstGeom prst="roundRect">
             <a:avLst>
-              <a:gd name="adj" fmla="val 8333"/>
+              <a:gd name="adj" fmla="val 10417"/>
             </a:avLst>
           </a:prstGeom>
           <a:solidFill>
-            <a:srgbClr val="EAE4F7"/>
+            <a:srgbClr val="F2F2F2"/>
           </a:solidFill>
           <a:ln/>
         </p:spPr>
       </p:sp>
       <p:sp>
         <p:nvSpPr>
-          <p:cNvPr id="26" name="Text 24"/>
-          <p:cNvSpPr/>
-          <p:nvPr/>
-        </p:nvSpPr>
-        <p:spPr>
-          <a:xfrm>
-            <a:off x="6460236" y="4736592"/>
-            <a:ext cx="4951476" cy="438912"/>
+          <p:cNvPr id="26" name="Text 23"/>
+          <p:cNvSpPr/>
+          <p:nvPr/>
+        </p:nvSpPr>
+        <p:spPr>
+          <a:xfrm>
+            <a:off x="6487668" y="4608576"/>
+            <a:ext cx="4896612" cy="438912"/>
           </a:xfrm>
           <a:prstGeom prst="rect">
             <a:avLst/>
@@ -3941,30 +3754,30 @@
               <a:buNone/>
             </a:pPr>
             <a:r>
-              <a:rPr lang="en-US" sz="1200" dirty="0">
-                <a:solidFill>
-                  <a:srgbClr val="1E1338"/>
-                </a:solidFill>
-                <a:latin typeface="Calibri" pitchFamily="34" charset="0"/>
-                <a:ea typeface="Calibri" pitchFamily="34" charset="-122"/>
-                <a:cs typeface="Calibri" pitchFamily="34" charset="-120"/>
+              <a:rPr lang="en-US" sz="1150" dirty="0">
+                <a:solidFill>
+                  <a:srgbClr val="333333"/>
+                </a:solidFill>
+                <a:latin typeface="Montserrat" pitchFamily="34" charset="0"/>
+                <a:ea typeface="Montserrat" pitchFamily="34" charset="-122"/>
+                <a:cs typeface="Montserrat" pitchFamily="34" charset="-120"/>
               </a:rPr>
               <a:t>Needs better match, interoperability, monetization</a:t>
             </a:r>
-            <a:endParaRPr lang="en-US" sz="1200" dirty="0"/>
-          </a:p>
-        </p:txBody>
-      </p:sp>
-      <p:sp>
-        <p:nvSpPr>
-          <p:cNvPr id="27" name="Text 25"/>
-          <p:cNvSpPr/>
-          <p:nvPr/>
-        </p:nvSpPr>
-        <p:spPr>
-          <a:xfrm>
-            <a:off x="6460236" y="5257800"/>
-            <a:ext cx="4951476" cy="320040"/>
+            <a:endParaRPr lang="en-US" sz="1150" dirty="0"/>
+          </a:p>
+        </p:txBody>
+      </p:sp>
+      <p:sp>
+        <p:nvSpPr>
+          <p:cNvPr id="27" name="Text 24"/>
+          <p:cNvSpPr/>
+          <p:nvPr/>
+        </p:nvSpPr>
+        <p:spPr>
+          <a:xfrm>
+            <a:off x="6487668" y="5184648"/>
+            <a:ext cx="4896612" cy="320040"/>
           </a:xfrm>
           <a:prstGeom prst="rect">
             <a:avLst/>
@@ -3980,52 +3793,52 @@
               <a:buNone/>
             </a:pPr>
             <a:r>
-              <a:rPr lang="en-US" sz="1200" b="1" dirty="0">
-                <a:solidFill>
-                  <a:srgbClr val="8B5CF6"/>
-                </a:solidFill>
-                <a:latin typeface="Calibri" pitchFamily="34" charset="0"/>
-                <a:ea typeface="Calibri" pitchFamily="34" charset="-122"/>
-                <a:cs typeface="Calibri" pitchFamily="34" charset="-120"/>
-              </a:rPr>
-              <a:t>Buyers: CTO, CPO, CDO, CRO</a:t>
-            </a:r>
-            <a:endParaRPr lang="en-US" sz="1200" dirty="0"/>
-          </a:p>
-        </p:txBody>
-      </p:sp>
-      <p:sp>
-        <p:nvSpPr>
-          <p:cNvPr id="28" name="Shape 26"/>
-          <p:cNvSpPr/>
-          <p:nvPr/>
-        </p:nvSpPr>
-        <p:spPr>
-          <a:xfrm>
-            <a:off x="548640" y="5806440"/>
-            <a:ext cx="11091672" cy="658368"/>
+              <a:rPr lang="en-US" sz="1150" b="1" dirty="0">
+                <a:solidFill>
+                  <a:srgbClr val="7719E1"/>
+                </a:solidFill>
+                <a:latin typeface="Montserrat" pitchFamily="34" charset="0"/>
+                <a:ea typeface="Montserrat" pitchFamily="34" charset="-122"/>
+                <a:cs typeface="Montserrat" pitchFamily="34" charset="-120"/>
+              </a:rPr>
+              <a:t>Buyers:  CTO · CPO · CDO · CRO</a:t>
+            </a:r>
+            <a:endParaRPr lang="en-US" sz="1150" dirty="0"/>
+          </a:p>
+        </p:txBody>
+      </p:sp>
+      <p:sp>
+        <p:nvSpPr>
+          <p:cNvPr id="28" name="Shape 25"/>
+          <p:cNvSpPr/>
+          <p:nvPr/>
+        </p:nvSpPr>
+        <p:spPr>
+          <a:xfrm>
+            <a:off x="548640" y="5669280"/>
+            <a:ext cx="11091672" cy="530352"/>
           </a:xfrm>
           <a:prstGeom prst="roundRect">
             <a:avLst>
-              <a:gd name="adj" fmla="val 8333"/>
+              <a:gd name="adj" fmla="val 13793"/>
             </a:avLst>
           </a:prstGeom>
           <a:solidFill>
-            <a:srgbClr val="FACC15"/>
+            <a:srgbClr val="ECE3F4"/>
           </a:solidFill>
           <a:ln/>
         </p:spPr>
       </p:sp>
       <p:sp>
         <p:nvSpPr>
-          <p:cNvPr id="29" name="Text 27"/>
-          <p:cNvSpPr/>
-          <p:nvPr/>
-        </p:nvSpPr>
-        <p:spPr>
-          <a:xfrm>
-            <a:off x="822960" y="5806440"/>
-            <a:ext cx="10543032" cy="658368"/>
+          <p:cNvPr id="29" name="Text 26"/>
+          <p:cNvSpPr/>
+          <p:nvPr/>
+        </p:nvSpPr>
+        <p:spPr>
+          <a:xfrm>
+            <a:off x="822960" y="5669280"/>
+            <a:ext cx="10543032" cy="530352"/>
           </a:xfrm>
           <a:prstGeom prst="rect">
             <a:avLst/>
@@ -4041,13 +3854,13 @@
               <a:buNone/>
             </a:pPr>
             <a:r>
-              <a:rPr lang="en-US" sz="1400" b="1" dirty="0">
-                <a:solidFill>
-                  <a:srgbClr val="281A48"/>
-                </a:solidFill>
-                <a:latin typeface="Georgia" pitchFamily="34" charset="0"/>
-                <a:ea typeface="Georgia" pitchFamily="34" charset="-122"/>
-                <a:cs typeface="Georgia" pitchFamily="34" charset="-120"/>
+              <a:rPr lang="en-US" sz="1200" b="1" dirty="0">
+                <a:solidFill>
+                  <a:srgbClr val="461478"/>
+                </a:solidFill>
+                <a:latin typeface="Montserrat" pitchFamily="34" charset="0"/>
+                <a:ea typeface="Montserrat" pitchFamily="34" charset="-122"/>
+                <a:cs typeface="Montserrat" pitchFamily="34" charset="-120"/>
               </a:rPr>
               <a:t>Brands </a:t>
             </a:r>
@@ -4055,27 +3868,27 @@
               <a:buNone/>
             </a:pPr>
             <a:r>
-              <a:rPr lang="en-US" sz="1400" dirty="0">
-                <a:solidFill>
-                  <a:srgbClr val="281A48"/>
-                </a:solidFill>
-                <a:latin typeface="Georgia" pitchFamily="34" charset="0"/>
-                <a:ea typeface="Georgia" pitchFamily="34" charset="-122"/>
-                <a:cs typeface="Georgia" pitchFamily="34" charset="-120"/>
-              </a:rPr>
-              <a:t>use Conexa to get more value from customer relationships.   </a:t>
+              <a:rPr lang="en-US" sz="1200" dirty="0">
+                <a:solidFill>
+                  <a:srgbClr val="333333"/>
+                </a:solidFill>
+                <a:latin typeface="Montserrat" pitchFamily="34" charset="0"/>
+                <a:ea typeface="Montserrat" pitchFamily="34" charset="-122"/>
+                <a:cs typeface="Montserrat" pitchFamily="34" charset="-120"/>
+              </a:rPr>
+              <a:t>use Conexa to get more value from customer relationships.    </a:t>
             </a:r>
             <a:pPr indent="0" marL="0">
               <a:buNone/>
             </a:pPr>
             <a:r>
-              <a:rPr lang="en-US" sz="1400" b="1" dirty="0">
-                <a:solidFill>
-                  <a:srgbClr val="281A48"/>
-                </a:solidFill>
-                <a:latin typeface="Georgia" pitchFamily="34" charset="0"/>
-                <a:ea typeface="Georgia" pitchFamily="34" charset="-122"/>
-                <a:cs typeface="Georgia" pitchFamily="34" charset="-120"/>
+              <a:rPr lang="en-US" sz="1200" b="1" dirty="0">
+                <a:solidFill>
+                  <a:srgbClr val="461478"/>
+                </a:solidFill>
+                <a:latin typeface="Montserrat" pitchFamily="34" charset="0"/>
+                <a:ea typeface="Montserrat" pitchFamily="34" charset="-122"/>
+                <a:cs typeface="Montserrat" pitchFamily="34" charset="-120"/>
               </a:rPr>
               <a:t>Platforms </a:t>
             </a:r>
@@ -4083,17 +3896,17 @@
               <a:buNone/>
             </a:pPr>
             <a:r>
-              <a:rPr lang="en-US" sz="1400" dirty="0">
-                <a:solidFill>
-                  <a:srgbClr val="281A48"/>
-                </a:solidFill>
-                <a:latin typeface="Georgia" pitchFamily="34" charset="0"/>
-                <a:ea typeface="Georgia" pitchFamily="34" charset="-122"/>
-                <a:cs typeface="Georgia" pitchFamily="34" charset="-120"/>
+              <a:rPr lang="en-US" sz="1200" dirty="0">
+                <a:solidFill>
+                  <a:srgbClr val="333333"/>
+                </a:solidFill>
+                <a:latin typeface="Montserrat" pitchFamily="34" charset="0"/>
+                <a:ea typeface="Montserrat" pitchFamily="34" charset="-122"/>
+                <a:cs typeface="Montserrat" pitchFamily="34" charset="-120"/>
               </a:rPr>
               <a:t>embed Conexa to make their products and ecosystems more valuable.</a:t>
             </a:r>
-            <a:endParaRPr lang="en-US" sz="1400" dirty="0"/>
+            <a:endParaRPr lang="en-US" sz="1200" dirty="0"/>
           </a:p>
         </p:txBody>
       </p:sp>
@@ -4137,8 +3950,8 @@
         </p:nvSpPr>
         <p:spPr>
           <a:xfrm>
-            <a:off x="548640" y="384048"/>
-            <a:ext cx="11091672" cy="274320"/>
+            <a:off x="548640" y="411480"/>
+            <a:ext cx="11091672" cy="548640"/>
           </a:xfrm>
           <a:prstGeom prst="rect">
             <a:avLst/>
@@ -4154,118 +3967,100 @@
               <a:buNone/>
             </a:pPr>
             <a:r>
-              <a:rPr lang="en-US" sz="1200" b="1" spc="200" kern="0" dirty="0">
-                <a:solidFill>
-                  <a:srgbClr val="8B5CF6"/>
-                </a:solidFill>
-                <a:latin typeface="Calibri" pitchFamily="34" charset="0"/>
-                <a:ea typeface="Calibri" pitchFamily="34" charset="-122"/>
-                <a:cs typeface="Calibri" pitchFamily="34" charset="-120"/>
-              </a:rPr>
-              <a:t>FALL GTM PLAN</a:t>
-            </a:r>
-            <a:endParaRPr lang="en-US" sz="1200" dirty="0"/>
-          </a:p>
-        </p:txBody>
-      </p:sp>
-      <p:sp>
-        <p:nvSpPr>
-          <p:cNvPr id="3" name="Text 1"/>
-          <p:cNvSpPr/>
-          <p:nvPr/>
-        </p:nvSpPr>
-        <p:spPr>
-          <a:xfrm>
-            <a:off x="548640" y="621792"/>
-            <a:ext cx="11091672" cy="640080"/>
-          </a:xfrm>
-          <a:prstGeom prst="rect">
-            <a:avLst/>
-          </a:prstGeom>
-          <a:noFill/>
-          <a:ln/>
-        </p:spPr>
-        <p:txBody>
-          <a:bodyPr wrap="square" rtlCol="0" anchor="ctr"/>
-          <a:lstStyle/>
-          <a:p>
-            <a:pPr algn="l" indent="0" marL="0">
-              <a:buNone/>
-            </a:pPr>
-            <a:r>
-              <a:rPr lang="en-US" sz="3400" b="1" dirty="0">
-                <a:solidFill>
-                  <a:srgbClr val="281A48"/>
-                </a:solidFill>
-                <a:latin typeface="Georgia" pitchFamily="34" charset="0"/>
-                <a:ea typeface="Georgia" pitchFamily="34" charset="-122"/>
-                <a:cs typeface="Georgia" pitchFamily="34" charset="-120"/>
+              <a:rPr lang="en-US" sz="3000" b="1" dirty="0">
+                <a:solidFill>
+                  <a:srgbClr val="461478"/>
+                </a:solidFill>
+                <a:latin typeface="Montserrat" pitchFamily="34" charset="0"/>
+                <a:ea typeface="Montserrat" pitchFamily="34" charset="-122"/>
+                <a:cs typeface="Montserrat" pitchFamily="34" charset="-120"/>
               </a:rPr>
               <a:t>Integrated Fall Plan</a:t>
             </a:r>
-            <a:endParaRPr lang="en-US" sz="3400" dirty="0"/>
-          </a:p>
-        </p:txBody>
-      </p:sp>
-      <p:sp>
-        <p:nvSpPr>
-          <p:cNvPr id="4" name="Shape 2"/>
-          <p:cNvSpPr/>
-          <p:nvPr/>
-        </p:nvSpPr>
-        <p:spPr>
-          <a:xfrm>
-            <a:off x="548640" y="1463040"/>
+            <a:endParaRPr lang="en-US" sz="3000" dirty="0"/>
+          </a:p>
+        </p:txBody>
+      </p:sp>
+      <p:pic>
+        <p:nvPicPr>
+          <p:cNvPr id="3" name="Image 0" descr="logo_purple.png">    </p:cNvPr>
+          <p:cNvPicPr>
+            <a:picLocks noChangeAspect="1"/>
+          </p:cNvPicPr>
+          <p:nvPr/>
+        </p:nvPicPr>
+        <p:blipFill>
+          <a:blip r:embed="rId1"/>
+          <a:stretch>
+            <a:fillRect/>
+          </a:stretch>
+        </p:blipFill>
+        <p:spPr>
+          <a:xfrm>
+            <a:off x="10680192" y="6400800"/>
+            <a:ext cx="960120" cy="259492"/>
+          </a:xfrm>
+          <a:prstGeom prst="rect">
+            <a:avLst/>
+          </a:prstGeom>
+        </p:spPr>
+      </p:pic>
+      <p:sp>
+        <p:nvSpPr>
+          <p:cNvPr id="4" name="Shape 1"/>
+          <p:cNvSpPr/>
+          <p:nvPr/>
+        </p:nvSpPr>
+        <p:spPr>
+          <a:xfrm>
+            <a:off x="548640" y="1234440"/>
             <a:ext cx="5408676" cy="1783080"/>
           </a:xfrm>
           <a:prstGeom prst="roundRect">
             <a:avLst>
-              <a:gd name="adj" fmla="val 3590"/>
+              <a:gd name="adj" fmla="val 4103"/>
             </a:avLst>
           </a:prstGeom>
           <a:solidFill>
-            <a:srgbClr val="F3F0FA"/>
+            <a:srgbClr val="ECE3F4"/>
           </a:solidFill>
-          <a:ln w="12700">
-            <a:solidFill>
-              <a:srgbClr val="8B5CF6"/>
-            </a:solidFill>
-            <a:prstDash val="solid"/>
-          </a:ln>
-        </p:spPr>
-      </p:sp>
-      <p:sp>
-        <p:nvSpPr>
-          <p:cNvPr id="5" name="Shape 3"/>
-          <p:cNvSpPr/>
-          <p:nvPr/>
-        </p:nvSpPr>
-        <p:spPr>
-          <a:xfrm>
-            <a:off x="822960" y="1737360"/>
-            <a:ext cx="3108960" cy="457200"/>
-          </a:xfrm>
-          <a:prstGeom prst="roundRect">
-            <a:avLst>
-              <a:gd name="adj" fmla="val 10000"/>
-            </a:avLst>
-          </a:prstGeom>
-          <a:solidFill>
-            <a:srgbClr val="4A3580"/>
-          </a:solidFill>
-          <a:ln/>
-        </p:spPr>
-      </p:sp>
-      <p:sp>
-        <p:nvSpPr>
-          <p:cNvPr id="6" name="Text 4"/>
-          <p:cNvSpPr/>
-          <p:nvPr/>
-        </p:nvSpPr>
-        <p:spPr>
-          <a:xfrm>
-            <a:off x="822960" y="1737360"/>
-            <a:ext cx="3108960" cy="457200"/>
+          <a:ln/>
+        </p:spPr>
+      </p:sp>
+      <p:pic>
+        <p:nvPicPr>
+          <p:cNvPr id="5" name="Image 1" descr="preencoded.png">    </p:cNvPr>
+          <p:cNvPicPr>
+            <a:picLocks noChangeAspect="1"/>
+          </p:cNvPicPr>
+          <p:nvPr/>
+        </p:nvPicPr>
+        <p:blipFill>
+          <a:blip r:embed="rId2"/>
+          <a:stretch>
+            <a:fillRect/>
+          </a:stretch>
+        </p:blipFill>
+        <p:spPr>
+          <a:xfrm>
+            <a:off x="822960" y="1527048"/>
+            <a:ext cx="457200" cy="457200"/>
+          </a:xfrm>
+          <a:prstGeom prst="rect">
+            <a:avLst/>
+          </a:prstGeom>
+        </p:spPr>
+      </p:pic>
+      <p:sp>
+        <p:nvSpPr>
+          <p:cNvPr id="6" name="Text 2"/>
+          <p:cNvSpPr/>
+          <p:nvPr/>
+        </p:nvSpPr>
+        <p:spPr>
+          <a:xfrm>
+            <a:off x="1463040" y="1508760"/>
+            <a:ext cx="4219956" cy="502920"/>
           </a:xfrm>
           <a:prstGeom prst="rect">
             <a:avLst/>
@@ -4277,34 +4072,34 @@
           <a:bodyPr wrap="square" lIns="0" tIns="0" rIns="0" bIns="0" rtlCol="0" anchor="ctr"/>
           <a:lstStyle/>
           <a:p>
-            <a:pPr algn="ctr" indent="0" marL="0">
-              <a:buNone/>
-            </a:pPr>
-            <a:r>
-              <a:rPr lang="en-US" sz="1400" b="1" spc="100" kern="0" dirty="0">
-                <a:solidFill>
-                  <a:srgbClr val="FFFFFF"/>
-                </a:solidFill>
-                <a:latin typeface="Calibri" pitchFamily="34" charset="0"/>
-                <a:ea typeface="Calibri" pitchFamily="34" charset="-122"/>
-                <a:cs typeface="Calibri" pitchFamily="34" charset="-120"/>
+            <a:pPr indent="0" marL="0">
+              <a:buNone/>
+            </a:pPr>
+            <a:r>
+              <a:rPr lang="en-US" sz="1500" b="1" spc="100" kern="0" dirty="0">
+                <a:solidFill>
+                  <a:srgbClr val="461478"/>
+                </a:solidFill>
+                <a:latin typeface="Montserrat" pitchFamily="34" charset="0"/>
+                <a:ea typeface="Montserrat" pitchFamily="34" charset="-122"/>
+                <a:cs typeface="Montserrat" pitchFamily="34" charset="-120"/>
               </a:rPr>
               <a:t>COMMERCIAL</a:t>
             </a:r>
-            <a:endParaRPr lang="en-US" sz="1400" dirty="0"/>
-          </a:p>
-        </p:txBody>
-      </p:sp>
-      <p:sp>
-        <p:nvSpPr>
-          <p:cNvPr id="7" name="Text 5"/>
-          <p:cNvSpPr/>
-          <p:nvPr/>
-        </p:nvSpPr>
-        <p:spPr>
-          <a:xfrm>
-            <a:off x="822960" y="2331720"/>
-            <a:ext cx="4860036" cy="777240"/>
+            <a:endParaRPr lang="en-US" sz="1500" dirty="0"/>
+          </a:p>
+        </p:txBody>
+      </p:sp>
+      <p:sp>
+        <p:nvSpPr>
+          <p:cNvPr id="7" name="Text 3"/>
+          <p:cNvSpPr/>
+          <p:nvPr/>
+        </p:nvSpPr>
+        <p:spPr>
+          <a:xfrm>
+            <a:off x="841248" y="2130552"/>
+            <a:ext cx="4823460" cy="777240"/>
           </a:xfrm>
           <a:prstGeom prst="rect">
             <a:avLst/>
@@ -4323,79 +4118,76 @@
               <a:buNone/>
             </a:pPr>
             <a:r>
-              <a:rPr lang="en-US" sz="1350" dirty="0">
-                <a:solidFill>
-                  <a:srgbClr val="1E1338"/>
-                </a:solidFill>
-                <a:latin typeface="Calibri" pitchFamily="34" charset="0"/>
-                <a:ea typeface="Calibri" pitchFamily="34" charset="-122"/>
-                <a:cs typeface="Calibri" pitchFamily="34" charset="-120"/>
-              </a:rPr>
-              <a:t>Target account list • Persona plays • Sales enablement</a:t>
-            </a:r>
-            <a:endParaRPr lang="en-US" sz="1350" dirty="0"/>
-          </a:p>
-        </p:txBody>
-      </p:sp>
-      <p:sp>
-        <p:nvSpPr>
-          <p:cNvPr id="8" name="Shape 6"/>
-          <p:cNvSpPr/>
-          <p:nvPr/>
-        </p:nvSpPr>
-        <p:spPr>
-          <a:xfrm>
-            <a:off x="6231636" y="1463040"/>
+              <a:rPr lang="en-US" sz="1250" dirty="0">
+                <a:solidFill>
+                  <a:srgbClr val="5C5C5C"/>
+                </a:solidFill>
+                <a:latin typeface="Montserrat" pitchFamily="34" charset="0"/>
+                <a:ea typeface="Montserrat" pitchFamily="34" charset="-122"/>
+                <a:cs typeface="Montserrat" pitchFamily="34" charset="-120"/>
+              </a:rPr>
+              <a:t>Target account list · Persona plays · Sales enablement</a:t>
+            </a:r>
+            <a:endParaRPr lang="en-US" sz="1250" dirty="0"/>
+          </a:p>
+        </p:txBody>
+      </p:sp>
+      <p:sp>
+        <p:nvSpPr>
+          <p:cNvPr id="8" name="Shape 4"/>
+          <p:cNvSpPr/>
+          <p:nvPr/>
+        </p:nvSpPr>
+        <p:spPr>
+          <a:xfrm>
+            <a:off x="6231636" y="1234440"/>
             <a:ext cx="5408676" cy="1783080"/>
           </a:xfrm>
           <a:prstGeom prst="roundRect">
             <a:avLst>
-              <a:gd name="adj" fmla="val 3590"/>
+              <a:gd name="adj" fmla="val 4103"/>
             </a:avLst>
           </a:prstGeom>
           <a:solidFill>
-            <a:srgbClr val="F3F0FA"/>
+            <a:srgbClr val="ECE3F4"/>
           </a:solidFill>
-          <a:ln w="12700">
-            <a:solidFill>
-              <a:srgbClr val="8B5CF6"/>
-            </a:solidFill>
-            <a:prstDash val="solid"/>
-          </a:ln>
-        </p:spPr>
-      </p:sp>
-      <p:sp>
-        <p:nvSpPr>
-          <p:cNvPr id="9" name="Shape 7"/>
-          <p:cNvSpPr/>
-          <p:nvPr/>
-        </p:nvSpPr>
-        <p:spPr>
-          <a:xfrm>
-            <a:off x="6505956" y="1737360"/>
-            <a:ext cx="3108960" cy="457200"/>
-          </a:xfrm>
-          <a:prstGeom prst="roundRect">
-            <a:avLst>
-              <a:gd name="adj" fmla="val 10000"/>
-            </a:avLst>
-          </a:prstGeom>
-          <a:solidFill>
-            <a:srgbClr val="4A3580"/>
-          </a:solidFill>
-          <a:ln/>
-        </p:spPr>
-      </p:sp>
-      <p:sp>
-        <p:nvSpPr>
-          <p:cNvPr id="10" name="Text 8"/>
-          <p:cNvSpPr/>
-          <p:nvPr/>
-        </p:nvSpPr>
-        <p:spPr>
-          <a:xfrm>
-            <a:off x="6505956" y="1737360"/>
-            <a:ext cx="3108960" cy="457200"/>
+          <a:ln/>
+        </p:spPr>
+      </p:sp>
+      <p:pic>
+        <p:nvPicPr>
+          <p:cNvPr id="9" name="Image 2" descr="preencoded.png">    </p:cNvPr>
+          <p:cNvPicPr>
+            <a:picLocks noChangeAspect="1"/>
+          </p:cNvPicPr>
+          <p:nvPr/>
+        </p:nvPicPr>
+        <p:blipFill>
+          <a:blip r:embed="rId3"/>
+          <a:stretch>
+            <a:fillRect/>
+          </a:stretch>
+        </p:blipFill>
+        <p:spPr>
+          <a:xfrm>
+            <a:off x="6505956" y="1527048"/>
+            <a:ext cx="457200" cy="457200"/>
+          </a:xfrm>
+          <a:prstGeom prst="rect">
+            <a:avLst/>
+          </a:prstGeom>
+        </p:spPr>
+      </p:pic>
+      <p:sp>
+        <p:nvSpPr>
+          <p:cNvPr id="10" name="Text 5"/>
+          <p:cNvSpPr/>
+          <p:nvPr/>
+        </p:nvSpPr>
+        <p:spPr>
+          <a:xfrm>
+            <a:off x="7146036" y="1508760"/>
+            <a:ext cx="4219956" cy="502920"/>
           </a:xfrm>
           <a:prstGeom prst="rect">
             <a:avLst/>
@@ -4407,34 +4199,34 @@
           <a:bodyPr wrap="square" lIns="0" tIns="0" rIns="0" bIns="0" rtlCol="0" anchor="ctr"/>
           <a:lstStyle/>
           <a:p>
-            <a:pPr algn="ctr" indent="0" marL="0">
-              <a:buNone/>
-            </a:pPr>
-            <a:r>
-              <a:rPr lang="en-US" sz="1400" b="1" spc="100" kern="0" dirty="0">
-                <a:solidFill>
-                  <a:srgbClr val="FFFFFF"/>
-                </a:solidFill>
-                <a:latin typeface="Calibri" pitchFamily="34" charset="0"/>
-                <a:ea typeface="Calibri" pitchFamily="34" charset="-122"/>
-                <a:cs typeface="Calibri" pitchFamily="34" charset="-120"/>
+            <a:pPr indent="0" marL="0">
+              <a:buNone/>
+            </a:pPr>
+            <a:r>
+              <a:rPr lang="en-US" sz="1500" b="1" spc="100" kern="0" dirty="0">
+                <a:solidFill>
+                  <a:srgbClr val="461478"/>
+                </a:solidFill>
+                <a:latin typeface="Montserrat" pitchFamily="34" charset="0"/>
+                <a:ea typeface="Montserrat" pitchFamily="34" charset="-122"/>
+                <a:cs typeface="Montserrat" pitchFamily="34" charset="-120"/>
               </a:rPr>
               <a:t>DIGITAL</a:t>
             </a:r>
-            <a:endParaRPr lang="en-US" sz="1400" dirty="0"/>
-          </a:p>
-        </p:txBody>
-      </p:sp>
-      <p:sp>
-        <p:nvSpPr>
-          <p:cNvPr id="11" name="Text 9"/>
-          <p:cNvSpPr/>
-          <p:nvPr/>
-        </p:nvSpPr>
-        <p:spPr>
-          <a:xfrm>
-            <a:off x="6505956" y="2331720"/>
-            <a:ext cx="4860036" cy="777240"/>
+            <a:endParaRPr lang="en-US" sz="1500" dirty="0"/>
+          </a:p>
+        </p:txBody>
+      </p:sp>
+      <p:sp>
+        <p:nvSpPr>
+          <p:cNvPr id="11" name="Text 6"/>
+          <p:cNvSpPr/>
+          <p:nvPr/>
+        </p:nvSpPr>
+        <p:spPr>
+          <a:xfrm>
+            <a:off x="6524244" y="2130552"/>
+            <a:ext cx="4823460" cy="777240"/>
           </a:xfrm>
           <a:prstGeom prst="rect">
             <a:avLst/>
@@ -4453,79 +4245,76 @@
               <a:buNone/>
             </a:pPr>
             <a:r>
-              <a:rPr lang="en-US" sz="1350" dirty="0">
-                <a:solidFill>
-                  <a:srgbClr val="1E1338"/>
-                </a:solidFill>
-                <a:latin typeface="Calibri" pitchFamily="34" charset="0"/>
-                <a:ea typeface="Calibri" pitchFamily="34" charset="-122"/>
-                <a:cs typeface="Calibri" pitchFamily="34" charset="-120"/>
-              </a:rPr>
-              <a:t>Landing pages for ICS, ID interoperability, Databricks, Snowflake • Hype video • Explainer videos • Nurture emails</a:t>
-            </a:r>
-            <a:endParaRPr lang="en-US" sz="1350" dirty="0"/>
-          </a:p>
-        </p:txBody>
-      </p:sp>
-      <p:sp>
-        <p:nvSpPr>
-          <p:cNvPr id="12" name="Shape 10"/>
-          <p:cNvSpPr/>
-          <p:nvPr/>
-        </p:nvSpPr>
-        <p:spPr>
-          <a:xfrm>
-            <a:off x="548640" y="3520440"/>
+              <a:rPr lang="en-US" sz="1250" dirty="0">
+                <a:solidFill>
+                  <a:srgbClr val="5C5C5C"/>
+                </a:solidFill>
+                <a:latin typeface="Montserrat" pitchFamily="34" charset="0"/>
+                <a:ea typeface="Montserrat" pitchFamily="34" charset="-122"/>
+                <a:cs typeface="Montserrat" pitchFamily="34" charset="-120"/>
+              </a:rPr>
+              <a:t>Landing pages for ICS, ID interoperability, Databricks, Snowflake · Hype video · Explainer videos · Nurture emails</a:t>
+            </a:r>
+            <a:endParaRPr lang="en-US" sz="1250" dirty="0"/>
+          </a:p>
+        </p:txBody>
+      </p:sp>
+      <p:sp>
+        <p:nvSpPr>
+          <p:cNvPr id="12" name="Shape 7"/>
+          <p:cNvSpPr/>
+          <p:nvPr/>
+        </p:nvSpPr>
+        <p:spPr>
+          <a:xfrm>
+            <a:off x="548640" y="3273552"/>
             <a:ext cx="5408676" cy="1783080"/>
           </a:xfrm>
           <a:prstGeom prst="roundRect">
             <a:avLst>
-              <a:gd name="adj" fmla="val 3590"/>
+              <a:gd name="adj" fmla="val 4103"/>
             </a:avLst>
           </a:prstGeom>
           <a:solidFill>
-            <a:srgbClr val="F3F0FA"/>
+            <a:srgbClr val="ECE3F4"/>
           </a:solidFill>
-          <a:ln w="12700">
-            <a:solidFill>
-              <a:srgbClr val="8B5CF6"/>
-            </a:solidFill>
-            <a:prstDash val="solid"/>
-          </a:ln>
-        </p:spPr>
-      </p:sp>
-      <p:sp>
-        <p:nvSpPr>
-          <p:cNvPr id="13" name="Shape 11"/>
-          <p:cNvSpPr/>
-          <p:nvPr/>
-        </p:nvSpPr>
-        <p:spPr>
-          <a:xfrm>
-            <a:off x="822960" y="3794760"/>
-            <a:ext cx="3108960" cy="457200"/>
-          </a:xfrm>
-          <a:prstGeom prst="roundRect">
-            <a:avLst>
-              <a:gd name="adj" fmla="val 10000"/>
-            </a:avLst>
-          </a:prstGeom>
-          <a:solidFill>
-            <a:srgbClr val="4A3580"/>
-          </a:solidFill>
-          <a:ln/>
-        </p:spPr>
-      </p:sp>
-      <p:sp>
-        <p:nvSpPr>
-          <p:cNvPr id="14" name="Text 12"/>
-          <p:cNvSpPr/>
-          <p:nvPr/>
-        </p:nvSpPr>
-        <p:spPr>
-          <a:xfrm>
-            <a:off x="822960" y="3794760"/>
-            <a:ext cx="3108960" cy="457200"/>
+          <a:ln/>
+        </p:spPr>
+      </p:sp>
+      <p:pic>
+        <p:nvPicPr>
+          <p:cNvPr id="13" name="Image 3" descr="preencoded.png">    </p:cNvPr>
+          <p:cNvPicPr>
+            <a:picLocks noChangeAspect="1"/>
+          </p:cNvPicPr>
+          <p:nvPr/>
+        </p:nvPicPr>
+        <p:blipFill>
+          <a:blip r:embed="rId4"/>
+          <a:stretch>
+            <a:fillRect/>
+          </a:stretch>
+        </p:blipFill>
+        <p:spPr>
+          <a:xfrm>
+            <a:off x="822960" y="3566160"/>
+            <a:ext cx="457200" cy="457200"/>
+          </a:xfrm>
+          <a:prstGeom prst="rect">
+            <a:avLst/>
+          </a:prstGeom>
+        </p:spPr>
+      </p:pic>
+      <p:sp>
+        <p:nvSpPr>
+          <p:cNvPr id="14" name="Text 8"/>
+          <p:cNvSpPr/>
+          <p:nvPr/>
+        </p:nvSpPr>
+        <p:spPr>
+          <a:xfrm>
+            <a:off x="1463040" y="3547872"/>
+            <a:ext cx="4219956" cy="502920"/>
           </a:xfrm>
           <a:prstGeom prst="rect">
             <a:avLst/>
@@ -4537,34 +4326,34 @@
           <a:bodyPr wrap="square" lIns="0" tIns="0" rIns="0" bIns="0" rtlCol="0" anchor="ctr"/>
           <a:lstStyle/>
           <a:p>
-            <a:pPr algn="ctr" indent="0" marL="0">
-              <a:buNone/>
-            </a:pPr>
-            <a:r>
-              <a:rPr lang="en-US" sz="1400" b="1" spc="100" kern="0" dirty="0">
-                <a:solidFill>
-                  <a:srgbClr val="FFFFFF"/>
-                </a:solidFill>
-                <a:latin typeface="Calibri" pitchFamily="34" charset="0"/>
-                <a:ea typeface="Calibri" pitchFamily="34" charset="-122"/>
-                <a:cs typeface="Calibri" pitchFamily="34" charset="-120"/>
+            <a:pPr indent="0" marL="0">
+              <a:buNone/>
+            </a:pPr>
+            <a:r>
+              <a:rPr lang="en-US" sz="1500" b="1" spc="100" kern="0" dirty="0">
+                <a:solidFill>
+                  <a:srgbClr val="461478"/>
+                </a:solidFill>
+                <a:latin typeface="Montserrat" pitchFamily="34" charset="0"/>
+                <a:ea typeface="Montserrat" pitchFamily="34" charset="-122"/>
+                <a:cs typeface="Montserrat" pitchFamily="34" charset="-120"/>
               </a:rPr>
               <a:t>EVENTS</a:t>
             </a:r>
-            <a:endParaRPr lang="en-US" sz="1400" dirty="0"/>
-          </a:p>
-        </p:txBody>
-      </p:sp>
-      <p:sp>
-        <p:nvSpPr>
-          <p:cNvPr id="15" name="Text 13"/>
-          <p:cNvSpPr/>
-          <p:nvPr/>
-        </p:nvSpPr>
-        <p:spPr>
-          <a:xfrm>
-            <a:off x="822960" y="4389120"/>
-            <a:ext cx="4860036" cy="777240"/>
+            <a:endParaRPr lang="en-US" sz="1500" dirty="0"/>
+          </a:p>
+        </p:txBody>
+      </p:sp>
+      <p:sp>
+        <p:nvSpPr>
+          <p:cNvPr id="15" name="Text 9"/>
+          <p:cNvSpPr/>
+          <p:nvPr/>
+        </p:nvSpPr>
+        <p:spPr>
+          <a:xfrm>
+            <a:off x="841248" y="4169664"/>
+            <a:ext cx="4823460" cy="777240"/>
           </a:xfrm>
           <a:prstGeom prst="rect">
             <a:avLst/>
@@ -4583,79 +4372,76 @@
               <a:buNone/>
             </a:pPr>
             <a:r>
-              <a:rPr lang="en-US" sz="1350" dirty="0">
-                <a:solidFill>
-                  <a:srgbClr val="1E1338"/>
-                </a:solidFill>
-                <a:latin typeface="Calibri" pitchFamily="34" charset="0"/>
-                <a:ea typeface="Calibri" pitchFamily="34" charset="-122"/>
-                <a:cs typeface="Calibri" pitchFamily="34" charset="-120"/>
+              <a:rPr lang="en-US" sz="1250" dirty="0">
+                <a:solidFill>
+                  <a:srgbClr val="5C5C5C"/>
+                </a:solidFill>
+                <a:latin typeface="Montserrat" pitchFamily="34" charset="0"/>
+                <a:ea typeface="Montserrat" pitchFamily="34" charset="-122"/>
+                <a:cs typeface="Montserrat" pitchFamily="34" charset="-120"/>
               </a:rPr>
               <a:t>Advertising Week launch moment → Q4 education → CES amplification</a:t>
             </a:r>
-            <a:endParaRPr lang="en-US" sz="1350" dirty="0"/>
-          </a:p>
-        </p:txBody>
-      </p:sp>
-      <p:sp>
-        <p:nvSpPr>
-          <p:cNvPr id="16" name="Shape 14"/>
-          <p:cNvSpPr/>
-          <p:nvPr/>
-        </p:nvSpPr>
-        <p:spPr>
-          <a:xfrm>
-            <a:off x="6231636" y="3520440"/>
+            <a:endParaRPr lang="en-US" sz="1250" dirty="0"/>
+          </a:p>
+        </p:txBody>
+      </p:sp>
+      <p:sp>
+        <p:nvSpPr>
+          <p:cNvPr id="16" name="Shape 10"/>
+          <p:cNvSpPr/>
+          <p:nvPr/>
+        </p:nvSpPr>
+        <p:spPr>
+          <a:xfrm>
+            <a:off x="6231636" y="3273552"/>
             <a:ext cx="5408676" cy="1783080"/>
           </a:xfrm>
           <a:prstGeom prst="roundRect">
             <a:avLst>
-              <a:gd name="adj" fmla="val 3590"/>
+              <a:gd name="adj" fmla="val 4103"/>
             </a:avLst>
           </a:prstGeom>
           <a:solidFill>
-            <a:srgbClr val="F3F0FA"/>
+            <a:srgbClr val="ECE3F4"/>
           </a:solidFill>
-          <a:ln w="12700">
-            <a:solidFill>
-              <a:srgbClr val="8B5CF6"/>
-            </a:solidFill>
-            <a:prstDash val="solid"/>
-          </a:ln>
-        </p:spPr>
-      </p:sp>
-      <p:sp>
-        <p:nvSpPr>
-          <p:cNvPr id="17" name="Shape 15"/>
-          <p:cNvSpPr/>
-          <p:nvPr/>
-        </p:nvSpPr>
-        <p:spPr>
-          <a:xfrm>
-            <a:off x="6505956" y="3794760"/>
-            <a:ext cx="3108960" cy="457200"/>
-          </a:xfrm>
-          <a:prstGeom prst="roundRect">
-            <a:avLst>
-              <a:gd name="adj" fmla="val 10000"/>
-            </a:avLst>
-          </a:prstGeom>
-          <a:solidFill>
-            <a:srgbClr val="4A3580"/>
-          </a:solidFill>
-          <a:ln/>
-        </p:spPr>
-      </p:sp>
-      <p:sp>
-        <p:nvSpPr>
-          <p:cNvPr id="18" name="Text 16"/>
-          <p:cNvSpPr/>
-          <p:nvPr/>
-        </p:nvSpPr>
-        <p:spPr>
-          <a:xfrm>
-            <a:off x="6505956" y="3794760"/>
-            <a:ext cx="3108960" cy="457200"/>
+          <a:ln/>
+        </p:spPr>
+      </p:sp>
+      <p:pic>
+        <p:nvPicPr>
+          <p:cNvPr id="17" name="Image 4" descr="preencoded.png">    </p:cNvPr>
+          <p:cNvPicPr>
+            <a:picLocks noChangeAspect="1"/>
+          </p:cNvPicPr>
+          <p:nvPr/>
+        </p:nvPicPr>
+        <p:blipFill>
+          <a:blip r:embed="rId5"/>
+          <a:stretch>
+            <a:fillRect/>
+          </a:stretch>
+        </p:blipFill>
+        <p:spPr>
+          <a:xfrm>
+            <a:off x="6505956" y="3566160"/>
+            <a:ext cx="457200" cy="457200"/>
+          </a:xfrm>
+          <a:prstGeom prst="rect">
+            <a:avLst/>
+          </a:prstGeom>
+        </p:spPr>
+      </p:pic>
+      <p:sp>
+        <p:nvSpPr>
+          <p:cNvPr id="18" name="Text 11"/>
+          <p:cNvSpPr/>
+          <p:nvPr/>
+        </p:nvSpPr>
+        <p:spPr>
+          <a:xfrm>
+            <a:off x="7146036" y="3547872"/>
+            <a:ext cx="4219956" cy="502920"/>
           </a:xfrm>
           <a:prstGeom prst="rect">
             <a:avLst/>
@@ -4667,34 +4453,34 @@
           <a:bodyPr wrap="square" lIns="0" tIns="0" rIns="0" bIns="0" rtlCol="0" anchor="ctr"/>
           <a:lstStyle/>
           <a:p>
-            <a:pPr algn="ctr" indent="0" marL="0">
-              <a:buNone/>
-            </a:pPr>
-            <a:r>
-              <a:rPr lang="en-US" sz="1400" b="1" spc="100" kern="0" dirty="0">
-                <a:solidFill>
-                  <a:srgbClr val="FFFFFF"/>
-                </a:solidFill>
-                <a:latin typeface="Calibri" pitchFamily="34" charset="0"/>
-                <a:ea typeface="Calibri" pitchFamily="34" charset="-122"/>
-                <a:cs typeface="Calibri" pitchFamily="34" charset="-120"/>
+            <a:pPr indent="0" marL="0">
+              <a:buNone/>
+            </a:pPr>
+            <a:r>
+              <a:rPr lang="en-US" sz="1500" b="1" spc="100" kern="0" dirty="0">
+                <a:solidFill>
+                  <a:srgbClr val="461478"/>
+                </a:solidFill>
+                <a:latin typeface="Montserrat" pitchFamily="34" charset="0"/>
+                <a:ea typeface="Montserrat" pitchFamily="34" charset="-122"/>
+                <a:cs typeface="Montserrat" pitchFamily="34" charset="-120"/>
               </a:rPr>
               <a:t>PARTNER MARKETING</a:t>
             </a:r>
-            <a:endParaRPr lang="en-US" sz="1400" dirty="0"/>
-          </a:p>
-        </p:txBody>
-      </p:sp>
-      <p:sp>
-        <p:nvSpPr>
-          <p:cNvPr id="19" name="Text 17"/>
-          <p:cNvSpPr/>
-          <p:nvPr/>
-        </p:nvSpPr>
-        <p:spPr>
-          <a:xfrm>
-            <a:off x="6505956" y="4389120"/>
-            <a:ext cx="4860036" cy="777240"/>
+            <a:endParaRPr lang="en-US" sz="1500" dirty="0"/>
+          </a:p>
+        </p:txBody>
+      </p:sp>
+      <p:sp>
+        <p:nvSpPr>
+          <p:cNvPr id="19" name="Text 12"/>
+          <p:cNvSpPr/>
+          <p:nvPr/>
+        </p:nvSpPr>
+        <p:spPr>
+          <a:xfrm>
+            <a:off x="6524244" y="4169664"/>
+            <a:ext cx="4823460" cy="777240"/>
           </a:xfrm>
           <a:prstGeom prst="rect">
             <a:avLst/>
@@ -4713,30 +4499,30 @@
               <a:buNone/>
             </a:pPr>
             <a:r>
-              <a:rPr lang="en-US" sz="1350" dirty="0">
-                <a:solidFill>
-                  <a:srgbClr val="1E1338"/>
-                </a:solidFill>
-                <a:latin typeface="Calibri" pitchFamily="34" charset="0"/>
-                <a:ea typeface="Calibri" pitchFamily="34" charset="-122"/>
-                <a:cs typeface="Calibri" pitchFamily="34" charset="-120"/>
-              </a:rPr>
-              <a:t>Databricks • Snowflake • Narrative / DoorDash • Crossbeam • Vertical alignment • Conexa demo in Databricks</a:t>
-            </a:r>
-            <a:endParaRPr lang="en-US" sz="1350" dirty="0"/>
-          </a:p>
-        </p:txBody>
-      </p:sp>
-      <p:sp>
-        <p:nvSpPr>
-          <p:cNvPr id="20" name="Text 18"/>
-          <p:cNvSpPr/>
-          <p:nvPr/>
-        </p:nvSpPr>
-        <p:spPr>
-          <a:xfrm>
-            <a:off x="548640" y="5925312"/>
-            <a:ext cx="1463040" cy="457200"/>
+              <a:rPr lang="en-US" sz="1250" dirty="0">
+                <a:solidFill>
+                  <a:srgbClr val="5C5C5C"/>
+                </a:solidFill>
+                <a:latin typeface="Montserrat" pitchFamily="34" charset="0"/>
+                <a:ea typeface="Montserrat" pitchFamily="34" charset="-122"/>
+                <a:cs typeface="Montserrat" pitchFamily="34" charset="-120"/>
+              </a:rPr>
+              <a:t>Databricks · Snowflake · Narrative / DoorDash · Crossbeam · Vertical alignment · Conexa demo in Databricks</a:t>
+            </a:r>
+            <a:endParaRPr lang="en-US" sz="1250" dirty="0"/>
+          </a:p>
+        </p:txBody>
+      </p:sp>
+      <p:sp>
+        <p:nvSpPr>
+          <p:cNvPr id="20" name="Text 13"/>
+          <p:cNvSpPr/>
+          <p:nvPr/>
+        </p:nvSpPr>
+        <p:spPr>
+          <a:xfrm>
+            <a:off x="548640" y="5760720"/>
+            <a:ext cx="1371600" cy="457200"/>
           </a:xfrm>
           <a:prstGeom prst="rect">
             <a:avLst/>
@@ -4754,11 +4540,11 @@
             <a:r>
               <a:rPr lang="en-US" sz="1100" b="1" spc="150" kern="0" dirty="0">
                 <a:solidFill>
-                  <a:srgbClr val="6B6480"/>
-                </a:solidFill>
-                <a:latin typeface="Calibri" pitchFamily="34" charset="0"/>
-                <a:ea typeface="Calibri" pitchFamily="34" charset="-122"/>
-                <a:cs typeface="Calibri" pitchFamily="34" charset="-120"/>
+                  <a:srgbClr val="5C5C5C"/>
+                </a:solidFill>
+                <a:latin typeface="Montserrat" pitchFamily="34" charset="0"/>
+                <a:ea typeface="Montserrat" pitchFamily="34" charset="-122"/>
+                <a:cs typeface="Montserrat" pitchFamily="34" charset="-120"/>
               </a:rPr>
               <a:t>TIMELINE</a:t>
             </a:r>
@@ -4768,14 +4554,14 @@
       </p:sp>
       <p:sp>
         <p:nvSpPr>
-          <p:cNvPr id="21" name="Shape 19"/>
-          <p:cNvSpPr/>
-          <p:nvPr/>
-        </p:nvSpPr>
-        <p:spPr>
-          <a:xfrm>
-            <a:off x="2011680" y="5943600"/>
-            <a:ext cx="1669694" cy="457200"/>
+          <p:cNvPr id="21" name="Shape 14"/>
+          <p:cNvSpPr/>
+          <p:nvPr/>
+        </p:nvSpPr>
+        <p:spPr>
+          <a:xfrm>
+            <a:off x="1920240" y="5760720"/>
+            <a:ext cx="1687982" cy="457200"/>
           </a:xfrm>
           <a:prstGeom prst="roundRect">
             <a:avLst>
@@ -4783,21 +4569,21 @@
             </a:avLst>
           </a:prstGeom>
           <a:solidFill>
-            <a:srgbClr val="281A48"/>
+            <a:srgbClr val="461478"/>
           </a:solidFill>
           <a:ln/>
         </p:spPr>
       </p:sp>
       <p:sp>
         <p:nvSpPr>
-          <p:cNvPr id="22" name="Text 20"/>
-          <p:cNvSpPr/>
-          <p:nvPr/>
-        </p:nvSpPr>
-        <p:spPr>
-          <a:xfrm>
-            <a:off x="2011680" y="5943600"/>
-            <a:ext cx="1669694" cy="457200"/>
+          <p:cNvPr id="22" name="Text 15"/>
+          <p:cNvSpPr/>
+          <p:nvPr/>
+        </p:nvSpPr>
+        <p:spPr>
+          <a:xfrm>
+            <a:off x="1920240" y="5760720"/>
+            <a:ext cx="1687982" cy="457200"/>
           </a:xfrm>
           <a:prstGeom prst="rect">
             <a:avLst/>
@@ -4813,29 +4599,29 @@
               <a:buNone/>
             </a:pPr>
             <a:r>
-              <a:rPr lang="en-US" sz="1300" b="1" dirty="0">
+              <a:rPr lang="en-US" sz="1250" b="1" dirty="0">
                 <a:solidFill>
                   <a:srgbClr val="FFFFFF"/>
                 </a:solidFill>
-                <a:latin typeface="Calibri" pitchFamily="34" charset="0"/>
-                <a:ea typeface="Calibri" pitchFamily="34" charset="-122"/>
-                <a:cs typeface="Calibri" pitchFamily="34" charset="-120"/>
+                <a:latin typeface="Montserrat" pitchFamily="34" charset="0"/>
+                <a:ea typeface="Montserrat" pitchFamily="34" charset="-122"/>
+                <a:cs typeface="Montserrat" pitchFamily="34" charset="-120"/>
               </a:rPr>
               <a:t>Seed</a:t>
             </a:r>
-            <a:endParaRPr lang="en-US" sz="1300" dirty="0"/>
-          </a:p>
-        </p:txBody>
-      </p:sp>
-      <p:sp>
-        <p:nvSpPr>
-          <p:cNvPr id="23" name="Text 21"/>
-          <p:cNvSpPr/>
-          <p:nvPr/>
-        </p:nvSpPr>
-        <p:spPr>
-          <a:xfrm>
-            <a:off x="3681374" y="5943600"/>
+            <a:endParaRPr lang="en-US" sz="1250" dirty="0"/>
+          </a:p>
+        </p:txBody>
+      </p:sp>
+      <p:sp>
+        <p:nvSpPr>
+          <p:cNvPr id="23" name="Text 16"/>
+          <p:cNvSpPr/>
+          <p:nvPr/>
+        </p:nvSpPr>
+        <p:spPr>
+          <a:xfrm>
+            <a:off x="3608222" y="5760720"/>
             <a:ext cx="320040" cy="457200"/>
           </a:xfrm>
           <a:prstGeom prst="rect">
@@ -4852,30 +4638,30 @@
               <a:buNone/>
             </a:pPr>
             <a:r>
-              <a:rPr lang="en-US" sz="1500" b="1" dirty="0">
-                <a:solidFill>
-                  <a:srgbClr val="6B6480"/>
-                </a:solidFill>
-                <a:latin typeface="Calibri" pitchFamily="34" charset="0"/>
-                <a:ea typeface="Calibri" pitchFamily="34" charset="-122"/>
-                <a:cs typeface="Calibri" pitchFamily="34" charset="-120"/>
+              <a:rPr lang="en-US" sz="1400" b="1" dirty="0">
+                <a:solidFill>
+                  <a:srgbClr val="9747FF"/>
+                </a:solidFill>
+                <a:latin typeface="Montserrat" pitchFamily="34" charset="0"/>
+                <a:ea typeface="Montserrat" pitchFamily="34" charset="-122"/>
+                <a:cs typeface="Montserrat" pitchFamily="34" charset="-120"/>
               </a:rPr>
               <a:t>→</a:t>
             </a:r>
-            <a:endParaRPr lang="en-US" sz="1500" dirty="0"/>
-          </a:p>
-        </p:txBody>
-      </p:sp>
-      <p:sp>
-        <p:nvSpPr>
-          <p:cNvPr id="24" name="Shape 22"/>
-          <p:cNvSpPr/>
-          <p:nvPr/>
-        </p:nvSpPr>
-        <p:spPr>
-          <a:xfrm>
-            <a:off x="4001414" y="5943600"/>
-            <a:ext cx="1669694" cy="457200"/>
+            <a:endParaRPr lang="en-US" sz="1400" dirty="0"/>
+          </a:p>
+        </p:txBody>
+      </p:sp>
+      <p:sp>
+        <p:nvSpPr>
+          <p:cNvPr id="24" name="Shape 17"/>
+          <p:cNvSpPr/>
+          <p:nvPr/>
+        </p:nvSpPr>
+        <p:spPr>
+          <a:xfrm>
+            <a:off x="3928262" y="5760720"/>
+            <a:ext cx="1687982" cy="457200"/>
           </a:xfrm>
           <a:prstGeom prst="roundRect">
             <a:avLst>
@@ -4883,21 +4669,21 @@
             </a:avLst>
           </a:prstGeom>
           <a:solidFill>
-            <a:srgbClr val="8B5CF6"/>
+            <a:srgbClr val="7719E1"/>
           </a:solidFill>
           <a:ln/>
         </p:spPr>
       </p:sp>
       <p:sp>
         <p:nvSpPr>
-          <p:cNvPr id="25" name="Text 23"/>
-          <p:cNvSpPr/>
-          <p:nvPr/>
-        </p:nvSpPr>
-        <p:spPr>
-          <a:xfrm>
-            <a:off x="4001414" y="5943600"/>
-            <a:ext cx="1669694" cy="457200"/>
+          <p:cNvPr id="25" name="Text 18"/>
+          <p:cNvSpPr/>
+          <p:nvPr/>
+        </p:nvSpPr>
+        <p:spPr>
+          <a:xfrm>
+            <a:off x="3928262" y="5760720"/>
+            <a:ext cx="1687982" cy="457200"/>
           </a:xfrm>
           <a:prstGeom prst="rect">
             <a:avLst/>
@@ -4913,29 +4699,29 @@
               <a:buNone/>
             </a:pPr>
             <a:r>
-              <a:rPr lang="en-US" sz="1300" b="1" dirty="0">
+              <a:rPr lang="en-US" sz="1250" b="1" dirty="0">
                 <a:solidFill>
                   <a:srgbClr val="FFFFFF"/>
                 </a:solidFill>
-                <a:latin typeface="Calibri" pitchFamily="34" charset="0"/>
-                <a:ea typeface="Calibri" pitchFamily="34" charset="-122"/>
-                <a:cs typeface="Calibri" pitchFamily="34" charset="-120"/>
+                <a:latin typeface="Montserrat" pitchFamily="34" charset="0"/>
+                <a:ea typeface="Montserrat" pitchFamily="34" charset="-122"/>
+                <a:cs typeface="Montserrat" pitchFamily="34" charset="-120"/>
               </a:rPr>
               <a:t>Launch</a:t>
             </a:r>
-            <a:endParaRPr lang="en-US" sz="1300" dirty="0"/>
-          </a:p>
-        </p:txBody>
-      </p:sp>
-      <p:sp>
-        <p:nvSpPr>
-          <p:cNvPr id="26" name="Text 24"/>
-          <p:cNvSpPr/>
-          <p:nvPr/>
-        </p:nvSpPr>
-        <p:spPr>
-          <a:xfrm>
-            <a:off x="5671109" y="5943600"/>
+            <a:endParaRPr lang="en-US" sz="1250" dirty="0"/>
+          </a:p>
+        </p:txBody>
+      </p:sp>
+      <p:sp>
+        <p:nvSpPr>
+          <p:cNvPr id="26" name="Text 19"/>
+          <p:cNvSpPr/>
+          <p:nvPr/>
+        </p:nvSpPr>
+        <p:spPr>
+          <a:xfrm>
+            <a:off x="5616245" y="5760720"/>
             <a:ext cx="320040" cy="457200"/>
           </a:xfrm>
           <a:prstGeom prst="rect">
@@ -4952,30 +4738,30 @@
               <a:buNone/>
             </a:pPr>
             <a:r>
-              <a:rPr lang="en-US" sz="1500" b="1" dirty="0">
-                <a:solidFill>
-                  <a:srgbClr val="6B6480"/>
-                </a:solidFill>
-                <a:latin typeface="Calibri" pitchFamily="34" charset="0"/>
-                <a:ea typeface="Calibri" pitchFamily="34" charset="-122"/>
-                <a:cs typeface="Calibri" pitchFamily="34" charset="-120"/>
+              <a:rPr lang="en-US" sz="1400" b="1" dirty="0">
+                <a:solidFill>
+                  <a:srgbClr val="9747FF"/>
+                </a:solidFill>
+                <a:latin typeface="Montserrat" pitchFamily="34" charset="0"/>
+                <a:ea typeface="Montserrat" pitchFamily="34" charset="-122"/>
+                <a:cs typeface="Montserrat" pitchFamily="34" charset="-120"/>
               </a:rPr>
               <a:t>→</a:t>
             </a:r>
-            <a:endParaRPr lang="en-US" sz="1500" dirty="0"/>
-          </a:p>
-        </p:txBody>
-      </p:sp>
-      <p:sp>
-        <p:nvSpPr>
-          <p:cNvPr id="27" name="Shape 25"/>
-          <p:cNvSpPr/>
-          <p:nvPr/>
-        </p:nvSpPr>
-        <p:spPr>
-          <a:xfrm>
-            <a:off x="5991149" y="5943600"/>
-            <a:ext cx="1669694" cy="457200"/>
+            <a:endParaRPr lang="en-US" sz="1400" dirty="0"/>
+          </a:p>
+        </p:txBody>
+      </p:sp>
+      <p:sp>
+        <p:nvSpPr>
+          <p:cNvPr id="27" name="Shape 20"/>
+          <p:cNvSpPr/>
+          <p:nvPr/>
+        </p:nvSpPr>
+        <p:spPr>
+          <a:xfrm>
+            <a:off x="5936285" y="5760720"/>
+            <a:ext cx="1687982" cy="457200"/>
           </a:xfrm>
           <a:prstGeom prst="roundRect">
             <a:avLst>
@@ -4983,21 +4769,21 @@
             </a:avLst>
           </a:prstGeom>
           <a:solidFill>
-            <a:srgbClr val="8B5CF6"/>
+            <a:srgbClr val="7719E1"/>
           </a:solidFill>
           <a:ln/>
         </p:spPr>
       </p:sp>
       <p:sp>
         <p:nvSpPr>
-          <p:cNvPr id="28" name="Text 26"/>
-          <p:cNvSpPr/>
-          <p:nvPr/>
-        </p:nvSpPr>
-        <p:spPr>
-          <a:xfrm>
-            <a:off x="5991149" y="5943600"/>
-            <a:ext cx="1669694" cy="457200"/>
+          <p:cNvPr id="28" name="Text 21"/>
+          <p:cNvSpPr/>
+          <p:nvPr/>
+        </p:nvSpPr>
+        <p:spPr>
+          <a:xfrm>
+            <a:off x="5936285" y="5760720"/>
+            <a:ext cx="1687982" cy="457200"/>
           </a:xfrm>
           <a:prstGeom prst="rect">
             <a:avLst/>
@@ -5013,29 +4799,29 @@
               <a:buNone/>
             </a:pPr>
             <a:r>
-              <a:rPr lang="en-US" sz="1300" b="1" dirty="0">
+              <a:rPr lang="en-US" sz="1250" b="1" dirty="0">
                 <a:solidFill>
                   <a:srgbClr val="FFFFFF"/>
                 </a:solidFill>
-                <a:latin typeface="Calibri" pitchFamily="34" charset="0"/>
-                <a:ea typeface="Calibri" pitchFamily="34" charset="-122"/>
-                <a:cs typeface="Calibri" pitchFamily="34" charset="-120"/>
+                <a:latin typeface="Montserrat" pitchFamily="34" charset="0"/>
+                <a:ea typeface="Montserrat" pitchFamily="34" charset="-122"/>
+                <a:cs typeface="Montserrat" pitchFamily="34" charset="-120"/>
               </a:rPr>
               <a:t>Educate</a:t>
             </a:r>
-            <a:endParaRPr lang="en-US" sz="1300" dirty="0"/>
-          </a:p>
-        </p:txBody>
-      </p:sp>
-      <p:sp>
-        <p:nvSpPr>
-          <p:cNvPr id="29" name="Text 27"/>
-          <p:cNvSpPr/>
-          <p:nvPr/>
-        </p:nvSpPr>
-        <p:spPr>
-          <a:xfrm>
-            <a:off x="7660843" y="5943600"/>
+            <a:endParaRPr lang="en-US" sz="1250" dirty="0"/>
+          </a:p>
+        </p:txBody>
+      </p:sp>
+      <p:sp>
+        <p:nvSpPr>
+          <p:cNvPr id="29" name="Text 22"/>
+          <p:cNvSpPr/>
+          <p:nvPr/>
+        </p:nvSpPr>
+        <p:spPr>
+          <a:xfrm>
+            <a:off x="7624267" y="5760720"/>
             <a:ext cx="320040" cy="457200"/>
           </a:xfrm>
           <a:prstGeom prst="rect">
@@ -5052,30 +4838,30 @@
               <a:buNone/>
             </a:pPr>
             <a:r>
-              <a:rPr lang="en-US" sz="1500" b="1" dirty="0">
-                <a:solidFill>
-                  <a:srgbClr val="6B6480"/>
-                </a:solidFill>
-                <a:latin typeface="Calibri" pitchFamily="34" charset="0"/>
-                <a:ea typeface="Calibri" pitchFamily="34" charset="-122"/>
-                <a:cs typeface="Calibri" pitchFamily="34" charset="-120"/>
+              <a:rPr lang="en-US" sz="1400" b="1" dirty="0">
+                <a:solidFill>
+                  <a:srgbClr val="9747FF"/>
+                </a:solidFill>
+                <a:latin typeface="Montserrat" pitchFamily="34" charset="0"/>
+                <a:ea typeface="Montserrat" pitchFamily="34" charset="-122"/>
+                <a:cs typeface="Montserrat" pitchFamily="34" charset="-120"/>
               </a:rPr>
               <a:t>→</a:t>
             </a:r>
-            <a:endParaRPr lang="en-US" sz="1500" dirty="0"/>
-          </a:p>
-        </p:txBody>
-      </p:sp>
-      <p:sp>
-        <p:nvSpPr>
-          <p:cNvPr id="30" name="Shape 28"/>
-          <p:cNvSpPr/>
-          <p:nvPr/>
-        </p:nvSpPr>
-        <p:spPr>
-          <a:xfrm>
-            <a:off x="7980883" y="5943600"/>
-            <a:ext cx="1669694" cy="457200"/>
+            <a:endParaRPr lang="en-US" sz="1400" dirty="0"/>
+          </a:p>
+        </p:txBody>
+      </p:sp>
+      <p:sp>
+        <p:nvSpPr>
+          <p:cNvPr id="30" name="Shape 23"/>
+          <p:cNvSpPr/>
+          <p:nvPr/>
+        </p:nvSpPr>
+        <p:spPr>
+          <a:xfrm>
+            <a:off x="7944307" y="5760720"/>
+            <a:ext cx="1687982" cy="457200"/>
           </a:xfrm>
           <a:prstGeom prst="roundRect">
             <a:avLst>
@@ -5083,21 +4869,21 @@
             </a:avLst>
           </a:prstGeom>
           <a:solidFill>
-            <a:srgbClr val="8B5CF6"/>
+            <a:srgbClr val="7719E1"/>
           </a:solidFill>
           <a:ln/>
         </p:spPr>
       </p:sp>
       <p:sp>
         <p:nvSpPr>
-          <p:cNvPr id="31" name="Text 29"/>
-          <p:cNvSpPr/>
-          <p:nvPr/>
-        </p:nvSpPr>
-        <p:spPr>
-          <a:xfrm>
-            <a:off x="7980883" y="5943600"/>
-            <a:ext cx="1669694" cy="457200"/>
+          <p:cNvPr id="31" name="Text 24"/>
+          <p:cNvSpPr/>
+          <p:nvPr/>
+        </p:nvSpPr>
+        <p:spPr>
+          <a:xfrm>
+            <a:off x="7944307" y="5760720"/>
+            <a:ext cx="1687982" cy="457200"/>
           </a:xfrm>
           <a:prstGeom prst="rect">
             <a:avLst/>
@@ -5113,29 +4899,29 @@
               <a:buNone/>
             </a:pPr>
             <a:r>
-              <a:rPr lang="en-US" sz="1300" b="1" dirty="0">
+              <a:rPr lang="en-US" sz="1250" b="1" dirty="0">
                 <a:solidFill>
                   <a:srgbClr val="FFFFFF"/>
                 </a:solidFill>
-                <a:latin typeface="Calibri" pitchFamily="34" charset="0"/>
-                <a:ea typeface="Calibri" pitchFamily="34" charset="-122"/>
-                <a:cs typeface="Calibri" pitchFamily="34" charset="-120"/>
+                <a:latin typeface="Montserrat" pitchFamily="34" charset="0"/>
+                <a:ea typeface="Montserrat" pitchFamily="34" charset="-122"/>
+                <a:cs typeface="Montserrat" pitchFamily="34" charset="-120"/>
               </a:rPr>
               <a:t>Prove</a:t>
             </a:r>
-            <a:endParaRPr lang="en-US" sz="1300" dirty="0"/>
-          </a:p>
-        </p:txBody>
-      </p:sp>
-      <p:sp>
-        <p:nvSpPr>
-          <p:cNvPr id="32" name="Text 30"/>
-          <p:cNvSpPr/>
-          <p:nvPr/>
-        </p:nvSpPr>
-        <p:spPr>
-          <a:xfrm>
-            <a:off x="9650578" y="5943600"/>
+            <a:endParaRPr lang="en-US" sz="1250" dirty="0"/>
+          </a:p>
+        </p:txBody>
+      </p:sp>
+      <p:sp>
+        <p:nvSpPr>
+          <p:cNvPr id="32" name="Text 25"/>
+          <p:cNvSpPr/>
+          <p:nvPr/>
+        </p:nvSpPr>
+        <p:spPr>
+          <a:xfrm>
+            <a:off x="9632290" y="5760720"/>
             <a:ext cx="320040" cy="457200"/>
           </a:xfrm>
           <a:prstGeom prst="rect">
@@ -5152,30 +4938,30 @@
               <a:buNone/>
             </a:pPr>
             <a:r>
-              <a:rPr lang="en-US" sz="1500" b="1" dirty="0">
-                <a:solidFill>
-                  <a:srgbClr val="6B6480"/>
-                </a:solidFill>
-                <a:latin typeface="Calibri" pitchFamily="34" charset="0"/>
-                <a:ea typeface="Calibri" pitchFamily="34" charset="-122"/>
-                <a:cs typeface="Calibri" pitchFamily="34" charset="-120"/>
+              <a:rPr lang="en-US" sz="1400" b="1" dirty="0">
+                <a:solidFill>
+                  <a:srgbClr val="9747FF"/>
+                </a:solidFill>
+                <a:latin typeface="Montserrat" pitchFamily="34" charset="0"/>
+                <a:ea typeface="Montserrat" pitchFamily="34" charset="-122"/>
+                <a:cs typeface="Montserrat" pitchFamily="34" charset="-120"/>
               </a:rPr>
               <a:t>→</a:t>
             </a:r>
-            <a:endParaRPr lang="en-US" sz="1500" dirty="0"/>
-          </a:p>
-        </p:txBody>
-      </p:sp>
-      <p:sp>
-        <p:nvSpPr>
-          <p:cNvPr id="33" name="Shape 31"/>
-          <p:cNvSpPr/>
-          <p:nvPr/>
-        </p:nvSpPr>
-        <p:spPr>
-          <a:xfrm>
-            <a:off x="9970618" y="5943600"/>
-            <a:ext cx="1669694" cy="457200"/>
+            <a:endParaRPr lang="en-US" sz="1400" dirty="0"/>
+          </a:p>
+        </p:txBody>
+      </p:sp>
+      <p:sp>
+        <p:nvSpPr>
+          <p:cNvPr id="33" name="Shape 26"/>
+          <p:cNvSpPr/>
+          <p:nvPr/>
+        </p:nvSpPr>
+        <p:spPr>
+          <a:xfrm>
+            <a:off x="9952330" y="5760720"/>
+            <a:ext cx="1687982" cy="457200"/>
           </a:xfrm>
           <a:prstGeom prst="roundRect">
             <a:avLst>
@@ -5183,21 +4969,21 @@
             </a:avLst>
           </a:prstGeom>
           <a:solidFill>
-            <a:srgbClr val="FACC15"/>
+            <a:srgbClr val="FAA825"/>
           </a:solidFill>
           <a:ln/>
         </p:spPr>
       </p:sp>
       <p:sp>
         <p:nvSpPr>
-          <p:cNvPr id="34" name="Text 32"/>
-          <p:cNvSpPr/>
-          <p:nvPr/>
-        </p:nvSpPr>
-        <p:spPr>
-          <a:xfrm>
-            <a:off x="9970618" y="5943600"/>
-            <a:ext cx="1669694" cy="457200"/>
+          <p:cNvPr id="34" name="Text 27"/>
+          <p:cNvSpPr/>
+          <p:nvPr/>
+        </p:nvSpPr>
+        <p:spPr>
+          <a:xfrm>
+            <a:off x="9952330" y="5760720"/>
+            <a:ext cx="1687982" cy="457200"/>
           </a:xfrm>
           <a:prstGeom prst="rect">
             <a:avLst/>
@@ -5213,17 +4999,17 @@
               <a:buNone/>
             </a:pPr>
             <a:r>
-              <a:rPr lang="en-US" sz="1300" b="1" dirty="0">
-                <a:solidFill>
-                  <a:srgbClr val="281A48"/>
-                </a:solidFill>
-                <a:latin typeface="Calibri" pitchFamily="34" charset="0"/>
-                <a:ea typeface="Calibri" pitchFamily="34" charset="-122"/>
-                <a:cs typeface="Calibri" pitchFamily="34" charset="-120"/>
+              <a:rPr lang="en-US" sz="1250" b="1" dirty="0">
+                <a:solidFill>
+                  <a:srgbClr val="461478"/>
+                </a:solidFill>
+                <a:latin typeface="Montserrat" pitchFamily="34" charset="0"/>
+                <a:ea typeface="Montserrat" pitchFamily="34" charset="-122"/>
+                <a:cs typeface="Montserrat" pitchFamily="34" charset="-120"/>
               </a:rPr>
               <a:t>Amplify</a:t>
             </a:r>
-            <a:endParaRPr lang="en-US" sz="1300" dirty="0"/>
+            <a:endParaRPr lang="en-US" sz="1250" dirty="0"/>
           </a:p>
         </p:txBody>
       </p:sp>
@@ -5267,8 +5053,8 @@
         </p:nvSpPr>
         <p:spPr>
           <a:xfrm>
-            <a:off x="548640" y="384048"/>
-            <a:ext cx="11091672" cy="274320"/>
+            <a:off x="548640" y="411480"/>
+            <a:ext cx="11091672" cy="548640"/>
           </a:xfrm>
           <a:prstGeom prst="rect">
             <a:avLst/>
@@ -5284,90 +5070,75 @@
               <a:buNone/>
             </a:pPr>
             <a:r>
-              <a:rPr lang="en-US" sz="1200" b="1" spc="200" kern="0" dirty="0">
-                <a:solidFill>
-                  <a:srgbClr val="8B5CF6"/>
-                </a:solidFill>
-                <a:latin typeface="Calibri" pitchFamily="34" charset="0"/>
-                <a:ea typeface="Calibri" pitchFamily="34" charset="-122"/>
-                <a:cs typeface="Calibri" pitchFamily="34" charset="-120"/>
-              </a:rPr>
-              <a:t>THE CONTENT SYSTEM</a:t>
-            </a:r>
-            <a:endParaRPr lang="en-US" sz="1200" dirty="0"/>
-          </a:p>
-        </p:txBody>
-      </p:sp>
-      <p:sp>
-        <p:nvSpPr>
-          <p:cNvPr id="3" name="Text 1"/>
-          <p:cNvSpPr/>
-          <p:nvPr/>
-        </p:nvSpPr>
-        <p:spPr>
-          <a:xfrm>
-            <a:off x="548640" y="621792"/>
-            <a:ext cx="11091672" cy="640080"/>
-          </a:xfrm>
-          <a:prstGeom prst="rect">
-            <a:avLst/>
-          </a:prstGeom>
-          <a:noFill/>
-          <a:ln/>
-        </p:spPr>
-        <p:txBody>
-          <a:bodyPr wrap="square" rtlCol="0" anchor="ctr"/>
-          <a:lstStyle/>
-          <a:p>
-            <a:pPr algn="l" indent="0" marL="0">
-              <a:buNone/>
-            </a:pPr>
-            <a:r>
-              <a:rPr lang="en-US" sz="3400" b="1" dirty="0">
-                <a:solidFill>
-                  <a:srgbClr val="281A48"/>
-                </a:solidFill>
-                <a:latin typeface="Georgia" pitchFamily="34" charset="0"/>
-                <a:ea typeface="Georgia" pitchFamily="34" charset="-122"/>
-                <a:cs typeface="Georgia" pitchFamily="34" charset="-120"/>
+              <a:rPr lang="en-US" sz="3000" b="1" dirty="0">
+                <a:solidFill>
+                  <a:srgbClr val="461478"/>
+                </a:solidFill>
+                <a:latin typeface="Montserrat" pitchFamily="34" charset="0"/>
+                <a:ea typeface="Montserrat" pitchFamily="34" charset="-122"/>
+                <a:cs typeface="Montserrat" pitchFamily="34" charset="-120"/>
               </a:rPr>
               <a:t>One Campaign, Four Moves</a:t>
             </a:r>
-            <a:endParaRPr lang="en-US" sz="3400" dirty="0"/>
-          </a:p>
-        </p:txBody>
-      </p:sp>
-      <p:sp>
-        <p:nvSpPr>
-          <p:cNvPr id="4" name="Shape 2"/>
-          <p:cNvSpPr/>
-          <p:nvPr/>
-        </p:nvSpPr>
-        <p:spPr>
-          <a:xfrm>
-            <a:off x="548640" y="1417320"/>
+            <a:endParaRPr lang="en-US" sz="3000" dirty="0"/>
+          </a:p>
+        </p:txBody>
+      </p:sp>
+      <p:pic>
+        <p:nvPicPr>
+          <p:cNvPr id="3" name="Image 0" descr="logo_purple.png">    </p:cNvPr>
+          <p:cNvPicPr>
+            <a:picLocks noChangeAspect="1"/>
+          </p:cNvPicPr>
+          <p:nvPr/>
+        </p:nvPicPr>
+        <p:blipFill>
+          <a:blip r:embed="rId1"/>
+          <a:stretch>
+            <a:fillRect/>
+          </a:stretch>
+        </p:blipFill>
+        <p:spPr>
+          <a:xfrm>
+            <a:off x="10680192" y="6400800"/>
+            <a:ext cx="960120" cy="259492"/>
+          </a:xfrm>
+          <a:prstGeom prst="rect">
+            <a:avLst/>
+          </a:prstGeom>
+        </p:spPr>
+      </p:pic>
+      <p:sp>
+        <p:nvSpPr>
+          <p:cNvPr id="4" name="Shape 1"/>
+          <p:cNvSpPr/>
+          <p:nvPr/>
+        </p:nvSpPr>
+        <p:spPr>
+          <a:xfrm>
+            <a:off x="548640" y="1143000"/>
             <a:ext cx="2622042" cy="457200"/>
           </a:xfrm>
           <a:prstGeom prst="roundRect">
             <a:avLst>
-              <a:gd name="adj" fmla="val 10000"/>
+              <a:gd name="adj" fmla="val 12000"/>
             </a:avLst>
           </a:prstGeom>
           <a:solidFill>
-            <a:srgbClr val="281A48"/>
+            <a:srgbClr val="461478"/>
           </a:solidFill>
           <a:ln/>
         </p:spPr>
       </p:sp>
       <p:sp>
         <p:nvSpPr>
-          <p:cNvPr id="5" name="Text 3"/>
-          <p:cNvSpPr/>
-          <p:nvPr/>
-        </p:nvSpPr>
-        <p:spPr>
-          <a:xfrm>
-            <a:off x="640080" y="1417320"/>
+          <p:cNvPr id="5" name="Text 2"/>
+          <p:cNvSpPr/>
+          <p:nvPr/>
+        </p:nvSpPr>
+        <p:spPr>
+          <a:xfrm>
+            <a:off x="640080" y="1143000"/>
             <a:ext cx="2439162" cy="457200"/>
           </a:xfrm>
           <a:prstGeom prst="rect">
@@ -5384,52 +5155,52 @@
               <a:buNone/>
             </a:pPr>
             <a:r>
-              <a:rPr lang="en-US" sz="1150" b="1" spc="50" kern="0" dirty="0">
+              <a:rPr lang="en-US" sz="1100" b="1" dirty="0">
                 <a:solidFill>
                   <a:srgbClr val="FFFFFF"/>
                 </a:solidFill>
-                <a:latin typeface="Calibri" pitchFamily="34" charset="0"/>
-                <a:ea typeface="Calibri" pitchFamily="34" charset="-122"/>
-                <a:cs typeface="Calibri" pitchFamily="34" charset="-120"/>
+                <a:latin typeface="Montserrat" pitchFamily="34" charset="0"/>
+                <a:ea typeface="Montserrat" pitchFamily="34" charset="-122"/>
+                <a:cs typeface="Montserrat" pitchFamily="34" charset="-120"/>
               </a:rPr>
               <a:t>CREATE AWARENESS</a:t>
             </a:r>
-            <a:endParaRPr lang="en-US" sz="1150" dirty="0"/>
-          </a:p>
-        </p:txBody>
-      </p:sp>
-      <p:sp>
-        <p:nvSpPr>
-          <p:cNvPr id="6" name="Shape 4"/>
-          <p:cNvSpPr/>
-          <p:nvPr/>
-        </p:nvSpPr>
-        <p:spPr>
-          <a:xfrm>
-            <a:off x="548640" y="1965960"/>
-            <a:ext cx="2622042" cy="2331720"/>
+            <a:endParaRPr lang="en-US" sz="1100" dirty="0"/>
+          </a:p>
+        </p:txBody>
+      </p:sp>
+      <p:sp>
+        <p:nvSpPr>
+          <p:cNvPr id="6" name="Shape 3"/>
+          <p:cNvSpPr/>
+          <p:nvPr/>
+        </p:nvSpPr>
+        <p:spPr>
+          <a:xfrm>
+            <a:off x="548640" y="1691640"/>
+            <a:ext cx="2622042" cy="2240280"/>
           </a:xfrm>
           <a:prstGeom prst="roundRect">
             <a:avLst>
-              <a:gd name="adj" fmla="val 1961"/>
+              <a:gd name="adj" fmla="val 2449"/>
             </a:avLst>
           </a:prstGeom>
           <a:solidFill>
-            <a:srgbClr val="F3F0FA"/>
+            <a:srgbClr val="ECE3F4"/>
           </a:solidFill>
           <a:ln/>
         </p:spPr>
       </p:sp>
       <p:sp>
         <p:nvSpPr>
-          <p:cNvPr id="7" name="Text 5"/>
-          <p:cNvSpPr/>
-          <p:nvPr/>
-        </p:nvSpPr>
-        <p:spPr>
-          <a:xfrm>
-            <a:off x="749808" y="2103120"/>
-            <a:ext cx="2256282" cy="2057400"/>
+          <p:cNvPr id="7" name="Text 4"/>
+          <p:cNvSpPr/>
+          <p:nvPr/>
+        </p:nvSpPr>
+        <p:spPr>
+          <a:xfrm>
+            <a:off x="749808" y="1801368"/>
+            <a:ext cx="2256282" cy="1965960"/>
           </a:xfrm>
           <a:prstGeom prst="rect">
             <a:avLst/>
@@ -5449,17 +5220,17 @@
               <a:buChar char="•"/>
             </a:pPr>
             <a:r>
-              <a:rPr lang="en-US" sz="1200" dirty="0">
-                <a:solidFill>
-                  <a:srgbClr val="1E1338"/>
-                </a:solidFill>
-                <a:latin typeface="Calibri" pitchFamily="34" charset="0"/>
-                <a:ea typeface="Calibri" pitchFamily="34" charset="-122"/>
-                <a:cs typeface="Calibri" pitchFamily="34" charset="-120"/>
+              <a:rPr lang="en-US" sz="1100" dirty="0">
+                <a:solidFill>
+                  <a:srgbClr val="333333"/>
+                </a:solidFill>
+                <a:latin typeface="Montserrat" pitchFamily="34" charset="0"/>
+                <a:ea typeface="Montserrat" pitchFamily="34" charset="-122"/>
+                <a:cs typeface="Montserrat" pitchFamily="34" charset="-120"/>
               </a:rPr>
               <a:t>Hype video</a:t>
             </a:r>
-            <a:endParaRPr lang="en-US" sz="1200" dirty="0"/>
+            <a:endParaRPr lang="en-US" sz="1100" dirty="0"/>
           </a:p>
           <a:p>
             <a:pPr marL="152400" indent="-152400">
@@ -5470,17 +5241,17 @@
               <a:buChar char="•"/>
             </a:pPr>
             <a:r>
-              <a:rPr lang="en-US" sz="1200" dirty="0">
-                <a:solidFill>
-                  <a:srgbClr val="1E1338"/>
-                </a:solidFill>
-                <a:latin typeface="Calibri" pitchFamily="34" charset="0"/>
-                <a:ea typeface="Calibri" pitchFamily="34" charset="-122"/>
-                <a:cs typeface="Calibri" pitchFamily="34" charset="-120"/>
+              <a:rPr lang="en-US" sz="1100" dirty="0">
+                <a:solidFill>
+                  <a:srgbClr val="333333"/>
+                </a:solidFill>
+                <a:latin typeface="Montserrat" pitchFamily="34" charset="0"/>
+                <a:ea typeface="Montserrat" pitchFamily="34" charset="-122"/>
+                <a:cs typeface="Montserrat" pitchFamily="34" charset="-120"/>
               </a:rPr>
               <a:t>Paid / social</a:t>
             </a:r>
-            <a:endParaRPr lang="en-US" sz="1200" dirty="0"/>
+            <a:endParaRPr lang="en-US" sz="1100" dirty="0"/>
           </a:p>
           <a:p>
             <a:pPr marL="152400" indent="-152400">
@@ -5491,17 +5262,17 @@
               <a:buChar char="•"/>
             </a:pPr>
             <a:r>
-              <a:rPr lang="en-US" sz="1200" dirty="0">
-                <a:solidFill>
-                  <a:srgbClr val="1E1338"/>
-                </a:solidFill>
-                <a:latin typeface="Calibri" pitchFamily="34" charset="0"/>
-                <a:ea typeface="Calibri" pitchFamily="34" charset="-122"/>
-                <a:cs typeface="Calibri" pitchFamily="34" charset="-120"/>
+              <a:rPr lang="en-US" sz="1100" dirty="0">
+                <a:solidFill>
+                  <a:srgbClr val="333333"/>
+                </a:solidFill>
+                <a:latin typeface="Montserrat" pitchFamily="34" charset="0"/>
+                <a:ea typeface="Montserrat" pitchFamily="34" charset="-122"/>
+                <a:cs typeface="Montserrat" pitchFamily="34" charset="-120"/>
               </a:rPr>
               <a:t>PR</a:t>
             </a:r>
-            <a:endParaRPr lang="en-US" sz="1200" dirty="0"/>
+            <a:endParaRPr lang="en-US" sz="1100" dirty="0"/>
           </a:p>
           <a:p>
             <a:pPr marL="152400" indent="-152400">
@@ -5512,17 +5283,17 @@
               <a:buChar char="•"/>
             </a:pPr>
             <a:r>
-              <a:rPr lang="en-US" sz="1200" dirty="0">
-                <a:solidFill>
-                  <a:srgbClr val="1E1338"/>
-                </a:solidFill>
-                <a:latin typeface="Calibri" pitchFamily="34" charset="0"/>
-                <a:ea typeface="Calibri" pitchFamily="34" charset="-122"/>
-                <a:cs typeface="Calibri" pitchFamily="34" charset="-120"/>
+              <a:rPr lang="en-US" sz="1100" dirty="0">
+                <a:solidFill>
+                  <a:srgbClr val="333333"/>
+                </a:solidFill>
+                <a:latin typeface="Montserrat" pitchFamily="34" charset="0"/>
+                <a:ea typeface="Montserrat" pitchFamily="34" charset="-122"/>
+                <a:cs typeface="Montserrat" pitchFamily="34" charset="-120"/>
               </a:rPr>
               <a:t>Advertising Week</a:t>
             </a:r>
-            <a:endParaRPr lang="en-US" sz="1200" dirty="0"/>
+            <a:endParaRPr lang="en-US" sz="1100" dirty="0"/>
           </a:p>
           <a:p>
             <a:pPr marL="152400" indent="-152400">
@@ -5533,51 +5304,51 @@
               <a:buChar char="•"/>
             </a:pPr>
             <a:r>
-              <a:rPr lang="en-US" sz="1200" dirty="0">
-                <a:solidFill>
-                  <a:srgbClr val="1E1338"/>
-                </a:solidFill>
-                <a:latin typeface="Calibri" pitchFamily="34" charset="0"/>
-                <a:ea typeface="Calibri" pitchFamily="34" charset="-122"/>
-                <a:cs typeface="Calibri" pitchFamily="34" charset="-120"/>
+              <a:rPr lang="en-US" sz="1100" dirty="0">
+                <a:solidFill>
+                  <a:srgbClr val="333333"/>
+                </a:solidFill>
+                <a:latin typeface="Montserrat" pitchFamily="34" charset="0"/>
+                <a:ea typeface="Montserrat" pitchFamily="34" charset="-122"/>
+                <a:cs typeface="Montserrat" pitchFamily="34" charset="-120"/>
               </a:rPr>
               <a:t>Executive POV</a:t>
             </a:r>
-            <a:endParaRPr lang="en-US" sz="1200" dirty="0"/>
-          </a:p>
-        </p:txBody>
-      </p:sp>
-      <p:sp>
-        <p:nvSpPr>
-          <p:cNvPr id="8" name="Shape 6"/>
-          <p:cNvSpPr/>
-          <p:nvPr/>
-        </p:nvSpPr>
-        <p:spPr>
-          <a:xfrm>
-            <a:off x="3371850" y="1417320"/>
+            <a:endParaRPr lang="en-US" sz="1100" dirty="0"/>
+          </a:p>
+        </p:txBody>
+      </p:sp>
+      <p:sp>
+        <p:nvSpPr>
+          <p:cNvPr id="8" name="Shape 5"/>
+          <p:cNvSpPr/>
+          <p:nvPr/>
+        </p:nvSpPr>
+        <p:spPr>
+          <a:xfrm>
+            <a:off x="3371850" y="1143000"/>
             <a:ext cx="2622042" cy="457200"/>
           </a:xfrm>
           <a:prstGeom prst="roundRect">
             <a:avLst>
-              <a:gd name="adj" fmla="val 10000"/>
+              <a:gd name="adj" fmla="val 12000"/>
             </a:avLst>
           </a:prstGeom>
           <a:solidFill>
-            <a:srgbClr val="4A3580"/>
+            <a:srgbClr val="461478"/>
           </a:solidFill>
           <a:ln/>
         </p:spPr>
       </p:sp>
       <p:sp>
         <p:nvSpPr>
-          <p:cNvPr id="9" name="Text 7"/>
-          <p:cNvSpPr/>
-          <p:nvPr/>
-        </p:nvSpPr>
-        <p:spPr>
-          <a:xfrm>
-            <a:off x="3463290" y="1417320"/>
+          <p:cNvPr id="9" name="Text 6"/>
+          <p:cNvSpPr/>
+          <p:nvPr/>
+        </p:nvSpPr>
+        <p:spPr>
+          <a:xfrm>
+            <a:off x="3463290" y="1143000"/>
             <a:ext cx="2439162" cy="457200"/>
           </a:xfrm>
           <a:prstGeom prst="rect">
@@ -5594,52 +5365,52 @@
               <a:buNone/>
             </a:pPr>
             <a:r>
-              <a:rPr lang="en-US" sz="1150" b="1" spc="50" kern="0" dirty="0">
+              <a:rPr lang="en-US" sz="1100" b="1" dirty="0">
                 <a:solidFill>
                   <a:srgbClr val="FFFFFF"/>
                 </a:solidFill>
-                <a:latin typeface="Calibri" pitchFamily="34" charset="0"/>
-                <a:ea typeface="Calibri" pitchFamily="34" charset="-122"/>
-                <a:cs typeface="Calibri" pitchFamily="34" charset="-120"/>
+                <a:latin typeface="Montserrat" pitchFamily="34" charset="0"/>
+                <a:ea typeface="Montserrat" pitchFamily="34" charset="-122"/>
+                <a:cs typeface="Montserrat" pitchFamily="34" charset="-120"/>
               </a:rPr>
               <a:t>CREATE UNDERSTANDING</a:t>
             </a:r>
-            <a:endParaRPr lang="en-US" sz="1150" dirty="0"/>
-          </a:p>
-        </p:txBody>
-      </p:sp>
-      <p:sp>
-        <p:nvSpPr>
-          <p:cNvPr id="10" name="Shape 8"/>
-          <p:cNvSpPr/>
-          <p:nvPr/>
-        </p:nvSpPr>
-        <p:spPr>
-          <a:xfrm>
-            <a:off x="3371850" y="1965960"/>
-            <a:ext cx="2622042" cy="2331720"/>
+            <a:endParaRPr lang="en-US" sz="1100" dirty="0"/>
+          </a:p>
+        </p:txBody>
+      </p:sp>
+      <p:sp>
+        <p:nvSpPr>
+          <p:cNvPr id="10" name="Shape 7"/>
+          <p:cNvSpPr/>
+          <p:nvPr/>
+        </p:nvSpPr>
+        <p:spPr>
+          <a:xfrm>
+            <a:off x="3371850" y="1691640"/>
+            <a:ext cx="2622042" cy="2240280"/>
           </a:xfrm>
           <a:prstGeom prst="roundRect">
             <a:avLst>
-              <a:gd name="adj" fmla="val 1961"/>
+              <a:gd name="adj" fmla="val 2449"/>
             </a:avLst>
           </a:prstGeom>
           <a:solidFill>
-            <a:srgbClr val="F3F0FA"/>
+            <a:srgbClr val="ECE3F4"/>
           </a:solidFill>
           <a:ln/>
         </p:spPr>
       </p:sp>
       <p:sp>
         <p:nvSpPr>
-          <p:cNvPr id="11" name="Text 9"/>
-          <p:cNvSpPr/>
-          <p:nvPr/>
-        </p:nvSpPr>
-        <p:spPr>
-          <a:xfrm>
-            <a:off x="3573018" y="2103120"/>
-            <a:ext cx="2256282" cy="2057400"/>
+          <p:cNvPr id="11" name="Text 8"/>
+          <p:cNvSpPr/>
+          <p:nvPr/>
+        </p:nvSpPr>
+        <p:spPr>
+          <a:xfrm>
+            <a:off x="3573018" y="1801368"/>
+            <a:ext cx="2256282" cy="1965960"/>
           </a:xfrm>
           <a:prstGeom prst="rect">
             <a:avLst/>
@@ -5659,17 +5430,17 @@
               <a:buChar char="•"/>
             </a:pPr>
             <a:r>
-              <a:rPr lang="en-US" sz="1200" dirty="0">
-                <a:solidFill>
-                  <a:srgbClr val="1E1338"/>
-                </a:solidFill>
-                <a:latin typeface="Calibri" pitchFamily="34" charset="0"/>
-                <a:ea typeface="Calibri" pitchFamily="34" charset="-122"/>
-                <a:cs typeface="Calibri" pitchFamily="34" charset="-120"/>
+              <a:rPr lang="en-US" sz="1100" dirty="0">
+                <a:solidFill>
+                  <a:srgbClr val="333333"/>
+                </a:solidFill>
+                <a:latin typeface="Montserrat" pitchFamily="34" charset="0"/>
+                <a:ea typeface="Montserrat" pitchFamily="34" charset="-122"/>
+                <a:cs typeface="Montserrat" pitchFamily="34" charset="-120"/>
               </a:rPr>
               <a:t>ICS explainer</a:t>
             </a:r>
-            <a:endParaRPr lang="en-US" sz="1200" dirty="0"/>
+            <a:endParaRPr lang="en-US" sz="1100" dirty="0"/>
           </a:p>
           <a:p>
             <a:pPr marL="152400" indent="-152400">
@@ -5680,17 +5451,17 @@
               <a:buChar char="•"/>
             </a:pPr>
             <a:r>
-              <a:rPr lang="en-US" sz="1200" dirty="0">
-                <a:solidFill>
-                  <a:srgbClr val="1E1338"/>
-                </a:solidFill>
-                <a:latin typeface="Calibri" pitchFamily="34" charset="0"/>
-                <a:ea typeface="Calibri" pitchFamily="34" charset="-122"/>
-                <a:cs typeface="Calibri" pitchFamily="34" charset="-120"/>
+              <a:rPr lang="en-US" sz="1100" dirty="0">
+                <a:solidFill>
+                  <a:srgbClr val="333333"/>
+                </a:solidFill>
+                <a:latin typeface="Montserrat" pitchFamily="34" charset="0"/>
+                <a:ea typeface="Montserrat" pitchFamily="34" charset="-122"/>
+                <a:cs typeface="Montserrat" pitchFamily="34" charset="-120"/>
               </a:rPr>
               <a:t>ID interoperability explainer</a:t>
             </a:r>
-            <a:endParaRPr lang="en-US" sz="1200" dirty="0"/>
+            <a:endParaRPr lang="en-US" sz="1100" dirty="0"/>
           </a:p>
           <a:p>
             <a:pPr marL="152400" indent="-152400">
@@ -5701,17 +5472,17 @@
               <a:buChar char="•"/>
             </a:pPr>
             <a:r>
-              <a:rPr lang="en-US" sz="1200" dirty="0">
-                <a:solidFill>
-                  <a:srgbClr val="1E1338"/>
-                </a:solidFill>
-                <a:latin typeface="Calibri" pitchFamily="34" charset="0"/>
-                <a:ea typeface="Calibri" pitchFamily="34" charset="-122"/>
-                <a:cs typeface="Calibri" pitchFamily="34" charset="-120"/>
+              <a:rPr lang="en-US" sz="1100" dirty="0">
+                <a:solidFill>
+                  <a:srgbClr val="333333"/>
+                </a:solidFill>
+                <a:latin typeface="Montserrat" pitchFamily="34" charset="0"/>
+                <a:ea typeface="Montserrat" pitchFamily="34" charset="-122"/>
+                <a:cs typeface="Montserrat" pitchFamily="34" charset="-120"/>
               </a:rPr>
               <a:t>Thought leadership</a:t>
             </a:r>
-            <a:endParaRPr lang="en-US" sz="1200" dirty="0"/>
+            <a:endParaRPr lang="en-US" sz="1100" dirty="0"/>
           </a:p>
           <a:p>
             <a:pPr marL="152400" indent="-152400">
@@ -5722,17 +5493,17 @@
               <a:buChar char="•"/>
             </a:pPr>
             <a:r>
-              <a:rPr lang="en-US" sz="1200" dirty="0">
-                <a:solidFill>
-                  <a:srgbClr val="1E1338"/>
-                </a:solidFill>
-                <a:latin typeface="Calibri" pitchFamily="34" charset="0"/>
-                <a:ea typeface="Calibri" pitchFamily="34" charset="-122"/>
-                <a:cs typeface="Calibri" pitchFamily="34" charset="-120"/>
+              <a:rPr lang="en-US" sz="1100" dirty="0">
+                <a:solidFill>
+                  <a:srgbClr val="333333"/>
+                </a:solidFill>
+                <a:latin typeface="Montserrat" pitchFamily="34" charset="0"/>
+                <a:ea typeface="Montserrat" pitchFamily="34" charset="-122"/>
+                <a:cs typeface="Montserrat" pitchFamily="34" charset="-120"/>
               </a:rPr>
               <a:t>Landing experiences</a:t>
             </a:r>
-            <a:endParaRPr lang="en-US" sz="1200" dirty="0"/>
+            <a:endParaRPr lang="en-US" sz="1100" dirty="0"/>
           </a:p>
           <a:p>
             <a:pPr marL="152400" indent="-152400">
@@ -5743,51 +5514,51 @@
               <a:buChar char="•"/>
             </a:pPr>
             <a:r>
-              <a:rPr lang="en-US" sz="1200" dirty="0">
-                <a:solidFill>
-                  <a:srgbClr val="1E1338"/>
-                </a:solidFill>
-                <a:latin typeface="Calibri" pitchFamily="34" charset="0"/>
-                <a:ea typeface="Calibri" pitchFamily="34" charset="-122"/>
-                <a:cs typeface="Calibri" pitchFamily="34" charset="-120"/>
+              <a:rPr lang="en-US" sz="1100" dirty="0">
+                <a:solidFill>
+                  <a:srgbClr val="333333"/>
+                </a:solidFill>
+                <a:latin typeface="Montserrat" pitchFamily="34" charset="0"/>
+                <a:ea typeface="Montserrat" pitchFamily="34" charset="-122"/>
+                <a:cs typeface="Montserrat" pitchFamily="34" charset="-120"/>
               </a:rPr>
               <a:t>Email nurture</a:t>
             </a:r>
-            <a:endParaRPr lang="en-US" sz="1200" dirty="0"/>
-          </a:p>
-        </p:txBody>
-      </p:sp>
-      <p:sp>
-        <p:nvSpPr>
-          <p:cNvPr id="12" name="Shape 10"/>
-          <p:cNvSpPr/>
-          <p:nvPr/>
-        </p:nvSpPr>
-        <p:spPr>
-          <a:xfrm>
-            <a:off x="6195060" y="1417320"/>
+            <a:endParaRPr lang="en-US" sz="1100" dirty="0"/>
+          </a:p>
+        </p:txBody>
+      </p:sp>
+      <p:sp>
+        <p:nvSpPr>
+          <p:cNvPr id="12" name="Shape 9"/>
+          <p:cNvSpPr/>
+          <p:nvPr/>
+        </p:nvSpPr>
+        <p:spPr>
+          <a:xfrm>
+            <a:off x="6195060" y="1143000"/>
             <a:ext cx="2622042" cy="457200"/>
           </a:xfrm>
           <a:prstGeom prst="roundRect">
             <a:avLst>
-              <a:gd name="adj" fmla="val 10000"/>
+              <a:gd name="adj" fmla="val 12000"/>
             </a:avLst>
           </a:prstGeom>
           <a:solidFill>
-            <a:srgbClr val="8B5CF6"/>
+            <a:srgbClr val="461478"/>
           </a:solidFill>
           <a:ln/>
         </p:spPr>
       </p:sp>
       <p:sp>
         <p:nvSpPr>
-          <p:cNvPr id="13" name="Text 11"/>
-          <p:cNvSpPr/>
-          <p:nvPr/>
-        </p:nvSpPr>
-        <p:spPr>
-          <a:xfrm>
-            <a:off x="6286500" y="1417320"/>
+          <p:cNvPr id="13" name="Text 10"/>
+          <p:cNvSpPr/>
+          <p:nvPr/>
+        </p:nvSpPr>
+        <p:spPr>
+          <a:xfrm>
+            <a:off x="6286500" y="1143000"/>
             <a:ext cx="2439162" cy="457200"/>
           </a:xfrm>
           <a:prstGeom prst="rect">
@@ -5804,52 +5575,52 @@
               <a:buNone/>
             </a:pPr>
             <a:r>
-              <a:rPr lang="en-US" sz="1150" b="1" spc="50" kern="0" dirty="0">
+              <a:rPr lang="en-US" sz="1100" b="1" dirty="0">
                 <a:solidFill>
                   <a:srgbClr val="FFFFFF"/>
                 </a:solidFill>
-                <a:latin typeface="Calibri" pitchFamily="34" charset="0"/>
-                <a:ea typeface="Calibri" pitchFamily="34" charset="-122"/>
-                <a:cs typeface="Calibri" pitchFamily="34" charset="-120"/>
+                <a:latin typeface="Montserrat" pitchFamily="34" charset="0"/>
+                <a:ea typeface="Montserrat" pitchFamily="34" charset="-122"/>
+                <a:cs typeface="Montserrat" pitchFamily="34" charset="-120"/>
               </a:rPr>
               <a:t>CREATE BELIEF</a:t>
             </a:r>
-            <a:endParaRPr lang="en-US" sz="1150" dirty="0"/>
-          </a:p>
-        </p:txBody>
-      </p:sp>
-      <p:sp>
-        <p:nvSpPr>
-          <p:cNvPr id="14" name="Shape 12"/>
-          <p:cNvSpPr/>
-          <p:nvPr/>
-        </p:nvSpPr>
-        <p:spPr>
-          <a:xfrm>
-            <a:off x="6195060" y="1965960"/>
-            <a:ext cx="2622042" cy="2331720"/>
+            <a:endParaRPr lang="en-US" sz="1100" dirty="0"/>
+          </a:p>
+        </p:txBody>
+      </p:sp>
+      <p:sp>
+        <p:nvSpPr>
+          <p:cNvPr id="14" name="Shape 11"/>
+          <p:cNvSpPr/>
+          <p:nvPr/>
+        </p:nvSpPr>
+        <p:spPr>
+          <a:xfrm>
+            <a:off x="6195060" y="1691640"/>
+            <a:ext cx="2622042" cy="2240280"/>
           </a:xfrm>
           <a:prstGeom prst="roundRect">
             <a:avLst>
-              <a:gd name="adj" fmla="val 1961"/>
+              <a:gd name="adj" fmla="val 2449"/>
             </a:avLst>
           </a:prstGeom>
           <a:solidFill>
-            <a:srgbClr val="F3F0FA"/>
+            <a:srgbClr val="ECE3F4"/>
           </a:solidFill>
           <a:ln/>
         </p:spPr>
       </p:sp>
       <p:sp>
         <p:nvSpPr>
-          <p:cNvPr id="15" name="Text 13"/>
-          <p:cNvSpPr/>
-          <p:nvPr/>
-        </p:nvSpPr>
-        <p:spPr>
-          <a:xfrm>
-            <a:off x="6396228" y="2103120"/>
-            <a:ext cx="2256282" cy="2057400"/>
+          <p:cNvPr id="15" name="Text 12"/>
+          <p:cNvSpPr/>
+          <p:nvPr/>
+        </p:nvSpPr>
+        <p:spPr>
+          <a:xfrm>
+            <a:off x="6396228" y="1801368"/>
+            <a:ext cx="2256282" cy="1965960"/>
           </a:xfrm>
           <a:prstGeom prst="rect">
             <a:avLst/>
@@ -5869,17 +5640,17 @@
               <a:buChar char="•"/>
             </a:pPr>
             <a:r>
-              <a:rPr lang="en-US" sz="1200" dirty="0">
-                <a:solidFill>
-                  <a:srgbClr val="1E1338"/>
-                </a:solidFill>
-                <a:latin typeface="Calibri" pitchFamily="34" charset="0"/>
-                <a:ea typeface="Calibri" pitchFamily="34" charset="-122"/>
-                <a:cs typeface="Calibri" pitchFamily="34" charset="-120"/>
+              <a:rPr lang="en-US" sz="1100" dirty="0">
+                <a:solidFill>
+                  <a:srgbClr val="333333"/>
+                </a:solidFill>
+                <a:latin typeface="Montserrat" pitchFamily="34" charset="0"/>
+                <a:ea typeface="Montserrat" pitchFamily="34" charset="-122"/>
+                <a:cs typeface="Montserrat" pitchFamily="34" charset="-120"/>
               </a:rPr>
               <a:t>Databricks demo</a:t>
             </a:r>
-            <a:endParaRPr lang="en-US" sz="1200" dirty="0"/>
+            <a:endParaRPr lang="en-US" sz="1100" dirty="0"/>
           </a:p>
           <a:p>
             <a:pPr marL="152400" indent="-152400">
@@ -5890,17 +5661,17 @@
               <a:buChar char="•"/>
             </a:pPr>
             <a:r>
-              <a:rPr lang="en-US" sz="1200" dirty="0">
-                <a:solidFill>
-                  <a:srgbClr val="1E1338"/>
-                </a:solidFill>
-                <a:latin typeface="Calibri" pitchFamily="34" charset="0"/>
-                <a:ea typeface="Calibri" pitchFamily="34" charset="-122"/>
-                <a:cs typeface="Calibri" pitchFamily="34" charset="-120"/>
+              <a:rPr lang="en-US" sz="1100" dirty="0">
+                <a:solidFill>
+                  <a:srgbClr val="333333"/>
+                </a:solidFill>
+                <a:latin typeface="Montserrat" pitchFamily="34" charset="0"/>
+                <a:ea typeface="Montserrat" pitchFamily="34" charset="-122"/>
+                <a:cs typeface="Montserrat" pitchFamily="34" charset="-120"/>
               </a:rPr>
               <a:t>DoorDash / Narrative</a:t>
             </a:r>
-            <a:endParaRPr lang="en-US" sz="1200" dirty="0"/>
+            <a:endParaRPr lang="en-US" sz="1100" dirty="0"/>
           </a:p>
           <a:p>
             <a:pPr marL="152400" indent="-152400">
@@ -5911,17 +5682,17 @@
               <a:buChar char="•"/>
             </a:pPr>
             <a:r>
-              <a:rPr lang="en-US" sz="1200" dirty="0">
-                <a:solidFill>
-                  <a:srgbClr val="1E1338"/>
-                </a:solidFill>
-                <a:latin typeface="Calibri" pitchFamily="34" charset="0"/>
-                <a:ea typeface="Calibri" pitchFamily="34" charset="-122"/>
-                <a:cs typeface="Calibri" pitchFamily="34" charset="-120"/>
+              <a:rPr lang="en-US" sz="1100" dirty="0">
+                <a:solidFill>
+                  <a:srgbClr val="333333"/>
+                </a:solidFill>
+                <a:latin typeface="Montserrat" pitchFamily="34" charset="0"/>
+                <a:ea typeface="Montserrat" pitchFamily="34" charset="-122"/>
+                <a:cs typeface="Montserrat" pitchFamily="34" charset="-120"/>
               </a:rPr>
               <a:t>Partner content</a:t>
             </a:r>
-            <a:endParaRPr lang="en-US" sz="1200" dirty="0"/>
+            <a:endParaRPr lang="en-US" sz="1100" dirty="0"/>
           </a:p>
           <a:p>
             <a:pPr marL="152400" indent="-152400">
@@ -5932,17 +5703,17 @@
               <a:buChar char="•"/>
             </a:pPr>
             <a:r>
-              <a:rPr lang="en-US" sz="1200" dirty="0">
-                <a:solidFill>
-                  <a:srgbClr val="1E1338"/>
-                </a:solidFill>
-                <a:latin typeface="Calibri" pitchFamily="34" charset="0"/>
-                <a:ea typeface="Calibri" pitchFamily="34" charset="-122"/>
-                <a:cs typeface="Calibri" pitchFamily="34" charset="-120"/>
+              <a:rPr lang="en-US" sz="1100" dirty="0">
+                <a:solidFill>
+                  <a:srgbClr val="333333"/>
+                </a:solidFill>
+                <a:latin typeface="Montserrat" pitchFamily="34" charset="0"/>
+                <a:ea typeface="Montserrat" pitchFamily="34" charset="-122"/>
+                <a:cs typeface="Montserrat" pitchFamily="34" charset="-120"/>
               </a:rPr>
               <a:t>Customer results</a:t>
             </a:r>
-            <a:endParaRPr lang="en-US" sz="1200" dirty="0"/>
+            <a:endParaRPr lang="en-US" sz="1100" dirty="0"/>
           </a:p>
           <a:p>
             <a:pPr marL="152400" indent="-152400">
@@ -5953,51 +5724,51 @@
               <a:buChar char="•"/>
             </a:pPr>
             <a:r>
-              <a:rPr lang="en-US" sz="1200" dirty="0">
-                <a:solidFill>
-                  <a:srgbClr val="1E1338"/>
-                </a:solidFill>
-                <a:latin typeface="Calibri" pitchFamily="34" charset="0"/>
-                <a:ea typeface="Calibri" pitchFamily="34" charset="-122"/>
-                <a:cs typeface="Calibri" pitchFamily="34" charset="-120"/>
+              <a:rPr lang="en-US" sz="1100" dirty="0">
+                <a:solidFill>
+                  <a:srgbClr val="333333"/>
+                </a:solidFill>
+                <a:latin typeface="Montserrat" pitchFamily="34" charset="0"/>
+                <a:ea typeface="Montserrat" pitchFamily="34" charset="-122"/>
+                <a:cs typeface="Montserrat" pitchFamily="34" charset="-120"/>
               </a:rPr>
               <a:t>Webinars / events</a:t>
             </a:r>
-            <a:endParaRPr lang="en-US" sz="1200" dirty="0"/>
-          </a:p>
-        </p:txBody>
-      </p:sp>
-      <p:sp>
-        <p:nvSpPr>
-          <p:cNvPr id="16" name="Shape 14"/>
-          <p:cNvSpPr/>
-          <p:nvPr/>
-        </p:nvSpPr>
-        <p:spPr>
-          <a:xfrm>
-            <a:off x="9018270" y="1417320"/>
+            <a:endParaRPr lang="en-US" sz="1100" dirty="0"/>
+          </a:p>
+        </p:txBody>
+      </p:sp>
+      <p:sp>
+        <p:nvSpPr>
+          <p:cNvPr id="16" name="Shape 13"/>
+          <p:cNvSpPr/>
+          <p:nvPr/>
+        </p:nvSpPr>
+        <p:spPr>
+          <a:xfrm>
+            <a:off x="9018270" y="1143000"/>
             <a:ext cx="2622042" cy="457200"/>
           </a:xfrm>
           <a:prstGeom prst="roundRect">
             <a:avLst>
-              <a:gd name="adj" fmla="val 10000"/>
+              <a:gd name="adj" fmla="val 12000"/>
             </a:avLst>
           </a:prstGeom>
           <a:solidFill>
-            <a:srgbClr val="FACC15"/>
+            <a:srgbClr val="461478"/>
           </a:solidFill>
           <a:ln/>
         </p:spPr>
       </p:sp>
       <p:sp>
         <p:nvSpPr>
-          <p:cNvPr id="17" name="Text 15"/>
-          <p:cNvSpPr/>
-          <p:nvPr/>
-        </p:nvSpPr>
-        <p:spPr>
-          <a:xfrm>
-            <a:off x="9109710" y="1417320"/>
+          <p:cNvPr id="17" name="Text 14"/>
+          <p:cNvSpPr/>
+          <p:nvPr/>
+        </p:nvSpPr>
+        <p:spPr>
+          <a:xfrm>
+            <a:off x="9109710" y="1143000"/>
             <a:ext cx="2439162" cy="457200"/>
           </a:xfrm>
           <a:prstGeom prst="rect">
@@ -6014,52 +5785,52 @@
               <a:buNone/>
             </a:pPr>
             <a:r>
-              <a:rPr lang="en-US" sz="1150" b="1" spc="50" kern="0" dirty="0">
-                <a:solidFill>
-                  <a:srgbClr val="281A48"/>
-                </a:solidFill>
-                <a:latin typeface="Calibri" pitchFamily="34" charset="0"/>
-                <a:ea typeface="Calibri" pitchFamily="34" charset="-122"/>
-                <a:cs typeface="Calibri" pitchFamily="34" charset="-120"/>
+              <a:rPr lang="en-US" sz="1100" b="1" dirty="0">
+                <a:solidFill>
+                  <a:srgbClr val="FFFFFF"/>
+                </a:solidFill>
+                <a:latin typeface="Montserrat" pitchFamily="34" charset="0"/>
+                <a:ea typeface="Montserrat" pitchFamily="34" charset="-122"/>
+                <a:cs typeface="Montserrat" pitchFamily="34" charset="-120"/>
               </a:rPr>
               <a:t>CREATE ACTION</a:t>
             </a:r>
-            <a:endParaRPr lang="en-US" sz="1150" dirty="0"/>
-          </a:p>
-        </p:txBody>
-      </p:sp>
-      <p:sp>
-        <p:nvSpPr>
-          <p:cNvPr id="18" name="Shape 16"/>
-          <p:cNvSpPr/>
-          <p:nvPr/>
-        </p:nvSpPr>
-        <p:spPr>
-          <a:xfrm>
-            <a:off x="9018270" y="1965960"/>
-            <a:ext cx="2622042" cy="2331720"/>
+            <a:endParaRPr lang="en-US" sz="1100" dirty="0"/>
+          </a:p>
+        </p:txBody>
+      </p:sp>
+      <p:sp>
+        <p:nvSpPr>
+          <p:cNvPr id="18" name="Shape 15"/>
+          <p:cNvSpPr/>
+          <p:nvPr/>
+        </p:nvSpPr>
+        <p:spPr>
+          <a:xfrm>
+            <a:off x="9018270" y="1691640"/>
+            <a:ext cx="2622042" cy="2240280"/>
           </a:xfrm>
           <a:prstGeom prst="roundRect">
             <a:avLst>
-              <a:gd name="adj" fmla="val 1961"/>
+              <a:gd name="adj" fmla="val 2449"/>
             </a:avLst>
           </a:prstGeom>
           <a:solidFill>
-            <a:srgbClr val="F3F0FA"/>
+            <a:srgbClr val="ECE3F4"/>
           </a:solidFill>
           <a:ln/>
         </p:spPr>
       </p:sp>
       <p:sp>
         <p:nvSpPr>
-          <p:cNvPr id="19" name="Text 17"/>
-          <p:cNvSpPr/>
-          <p:nvPr/>
-        </p:nvSpPr>
-        <p:spPr>
-          <a:xfrm>
-            <a:off x="9219438" y="2103120"/>
-            <a:ext cx="2256282" cy="2057400"/>
+          <p:cNvPr id="19" name="Text 16"/>
+          <p:cNvSpPr/>
+          <p:nvPr/>
+        </p:nvSpPr>
+        <p:spPr>
+          <a:xfrm>
+            <a:off x="9219438" y="1801368"/>
+            <a:ext cx="2256282" cy="1965960"/>
           </a:xfrm>
           <a:prstGeom prst="rect">
             <a:avLst/>
@@ -6079,17 +5850,17 @@
               <a:buChar char="•"/>
             </a:pPr>
             <a:r>
-              <a:rPr lang="en-US" sz="1200" dirty="0">
-                <a:solidFill>
-                  <a:srgbClr val="1E1338"/>
-                </a:solidFill>
-                <a:latin typeface="Calibri" pitchFamily="34" charset="0"/>
-                <a:ea typeface="Calibri" pitchFamily="34" charset="-122"/>
-                <a:cs typeface="Calibri" pitchFamily="34" charset="-120"/>
+              <a:rPr lang="en-US" sz="1100" dirty="0">
+                <a:solidFill>
+                  <a:srgbClr val="333333"/>
+                </a:solidFill>
+                <a:latin typeface="Montserrat" pitchFamily="34" charset="0"/>
+                <a:ea typeface="Montserrat" pitchFamily="34" charset="-122"/>
+                <a:cs typeface="Montserrat" pitchFamily="34" charset="-120"/>
               </a:rPr>
               <a:t>ABM</a:t>
             </a:r>
-            <a:endParaRPr lang="en-US" sz="1200" dirty="0"/>
+            <a:endParaRPr lang="en-US" sz="1100" dirty="0"/>
           </a:p>
           <a:p>
             <a:pPr marL="152400" indent="-152400">
@@ -6100,17 +5871,17 @@
               <a:buChar char="•"/>
             </a:pPr>
             <a:r>
-              <a:rPr lang="en-US" sz="1200" dirty="0">
-                <a:solidFill>
-                  <a:srgbClr val="1E1338"/>
-                </a:solidFill>
-                <a:latin typeface="Calibri" pitchFamily="34" charset="0"/>
-                <a:ea typeface="Calibri" pitchFamily="34" charset="-122"/>
-                <a:cs typeface="Calibri" pitchFamily="34" charset="-120"/>
+              <a:rPr lang="en-US" sz="1100" dirty="0">
+                <a:solidFill>
+                  <a:srgbClr val="333333"/>
+                </a:solidFill>
+                <a:latin typeface="Montserrat" pitchFamily="34" charset="0"/>
+                <a:ea typeface="Montserrat" pitchFamily="34" charset="-122"/>
+                <a:cs typeface="Montserrat" pitchFamily="34" charset="-120"/>
               </a:rPr>
               <a:t>Sales outreach</a:t>
             </a:r>
-            <a:endParaRPr lang="en-US" sz="1200" dirty="0"/>
+            <a:endParaRPr lang="en-US" sz="1100" dirty="0"/>
           </a:p>
           <a:p>
             <a:pPr marL="152400" indent="-152400">
@@ -6121,17 +5892,17 @@
               <a:buChar char="•"/>
             </a:pPr>
             <a:r>
-              <a:rPr lang="en-US" sz="1200" dirty="0">
-                <a:solidFill>
-                  <a:srgbClr val="1E1338"/>
-                </a:solidFill>
-                <a:latin typeface="Calibri" pitchFamily="34" charset="0"/>
-                <a:ea typeface="Calibri" pitchFamily="34" charset="-122"/>
-                <a:cs typeface="Calibri" pitchFamily="34" charset="-120"/>
+              <a:rPr lang="en-US" sz="1100" dirty="0">
+                <a:solidFill>
+                  <a:srgbClr val="333333"/>
+                </a:solidFill>
+                <a:latin typeface="Montserrat" pitchFamily="34" charset="0"/>
+                <a:ea typeface="Montserrat" pitchFamily="34" charset="-122"/>
+                <a:cs typeface="Montserrat" pitchFamily="34" charset="-120"/>
               </a:rPr>
               <a:t>Partner co-sell</a:t>
             </a:r>
-            <a:endParaRPr lang="en-US" sz="1200" dirty="0"/>
+            <a:endParaRPr lang="en-US" sz="1100" dirty="0"/>
           </a:p>
           <a:p>
             <a:pPr marL="152400" indent="-152400">
@@ -6142,17 +5913,17 @@
               <a:buChar char="•"/>
             </a:pPr>
             <a:r>
-              <a:rPr lang="en-US" sz="1200" dirty="0">
-                <a:solidFill>
-                  <a:srgbClr val="1E1338"/>
-                </a:solidFill>
-                <a:latin typeface="Calibri" pitchFamily="34" charset="0"/>
-                <a:ea typeface="Calibri" pitchFamily="34" charset="-122"/>
-                <a:cs typeface="Calibri" pitchFamily="34" charset="-120"/>
+              <a:rPr lang="en-US" sz="1100" dirty="0">
+                <a:solidFill>
+                  <a:srgbClr val="333333"/>
+                </a:solidFill>
+                <a:latin typeface="Montserrat" pitchFamily="34" charset="0"/>
+                <a:ea typeface="Montserrat" pitchFamily="34" charset="-122"/>
+                <a:cs typeface="Montserrat" pitchFamily="34" charset="-120"/>
               </a:rPr>
               <a:t>Demo requests</a:t>
             </a:r>
-            <a:endParaRPr lang="en-US" sz="1200" dirty="0"/>
+            <a:endParaRPr lang="en-US" sz="1100" dirty="0"/>
           </a:p>
           <a:p>
             <a:pPr marL="152400" indent="-152400">
@@ -6163,29 +5934,29 @@
               <a:buChar char="•"/>
             </a:pPr>
             <a:r>
-              <a:rPr lang="en-US" sz="1200" dirty="0">
-                <a:solidFill>
-                  <a:srgbClr val="1E1338"/>
-                </a:solidFill>
-                <a:latin typeface="Calibri" pitchFamily="34" charset="0"/>
-                <a:ea typeface="Calibri" pitchFamily="34" charset="-122"/>
-                <a:cs typeface="Calibri" pitchFamily="34" charset="-120"/>
+              <a:rPr lang="en-US" sz="1100" dirty="0">
+                <a:solidFill>
+                  <a:srgbClr val="333333"/>
+                </a:solidFill>
+                <a:latin typeface="Montserrat" pitchFamily="34" charset="0"/>
+                <a:ea typeface="Montserrat" pitchFamily="34" charset="-122"/>
+                <a:cs typeface="Montserrat" pitchFamily="34" charset="-120"/>
               </a:rPr>
               <a:t>Meetings</a:t>
             </a:r>
-            <a:endParaRPr lang="en-US" sz="1200" dirty="0"/>
-          </a:p>
-        </p:txBody>
-      </p:sp>
-      <p:sp>
-        <p:nvSpPr>
-          <p:cNvPr id="20" name="Text 18"/>
-          <p:cNvSpPr/>
-          <p:nvPr/>
-        </p:nvSpPr>
-        <p:spPr>
-          <a:xfrm>
-            <a:off x="548640" y="4526280"/>
+            <a:endParaRPr lang="en-US" sz="1100" dirty="0"/>
+          </a:p>
+        </p:txBody>
+      </p:sp>
+      <p:sp>
+        <p:nvSpPr>
+          <p:cNvPr id="20" name="Text 17"/>
+          <p:cNvSpPr/>
+          <p:nvPr/>
+        </p:nvSpPr>
+        <p:spPr>
+          <a:xfrm>
+            <a:off x="548640" y="4297680"/>
             <a:ext cx="11091672" cy="274320"/>
           </a:xfrm>
           <a:prstGeom prst="rect">
@@ -6204,11 +5975,11 @@
             <a:r>
               <a:rPr lang="en-US" sz="1100" b="1" spc="150" kern="0" dirty="0">
                 <a:solidFill>
-                  <a:srgbClr val="8B5CF6"/>
-                </a:solidFill>
-                <a:latin typeface="Calibri" pitchFamily="34" charset="0"/>
-                <a:ea typeface="Calibri" pitchFamily="34" charset="-122"/>
-                <a:cs typeface="Calibri" pitchFamily="34" charset="-120"/>
+                  <a:srgbClr val="7719E1"/>
+                </a:solidFill>
+                <a:latin typeface="Montserrat" pitchFamily="34" charset="0"/>
+                <a:ea typeface="Montserrat" pitchFamily="34" charset="-122"/>
+                <a:cs typeface="Montserrat" pitchFamily="34" charset="-120"/>
               </a:rPr>
               <a:t>ONE PROGRESSIVELY DEEPER STORY</a:t>
             </a:r>
@@ -6218,36 +5989,89 @@
       </p:sp>
       <p:sp>
         <p:nvSpPr>
-          <p:cNvPr id="21" name="Shape 19"/>
-          <p:cNvSpPr/>
-          <p:nvPr/>
-        </p:nvSpPr>
-        <p:spPr>
-          <a:xfrm>
-            <a:off x="548640" y="4892040"/>
-            <a:ext cx="1380744" cy="1325880"/>
+          <p:cNvPr id="21" name="Shape 18"/>
+          <p:cNvSpPr/>
+          <p:nvPr/>
+        </p:nvSpPr>
+        <p:spPr>
+          <a:xfrm>
+            <a:off x="548640" y="4663440"/>
+            <a:ext cx="1396419" cy="1371600"/>
           </a:xfrm>
           <a:prstGeom prst="roundRect">
             <a:avLst>
-              <a:gd name="adj" fmla="val 3448"/>
+              <a:gd name="adj" fmla="val 4000"/>
             </a:avLst>
           </a:prstGeom>
           <a:solidFill>
-            <a:srgbClr val="281A48"/>
+            <a:srgbClr val="461478"/>
           </a:solidFill>
           <a:ln/>
         </p:spPr>
       </p:sp>
       <p:sp>
         <p:nvSpPr>
-          <p:cNvPr id="22" name="Text 20"/>
-          <p:cNvSpPr/>
-          <p:nvPr/>
-        </p:nvSpPr>
-        <p:spPr>
-          <a:xfrm>
-            <a:off x="594360" y="5001768"/>
-            <a:ext cx="1289304" cy="502920"/>
+          <p:cNvPr id="22" name="Text 19"/>
+          <p:cNvSpPr/>
+          <p:nvPr/>
+        </p:nvSpPr>
+        <p:spPr>
+          <a:xfrm>
+            <a:off x="594360" y="4773168"/>
+            <a:ext cx="1304979" cy="502920"/>
+          </a:xfrm>
+          <a:prstGeom prst="rect">
+            <a:avLst/>
+          </a:prstGeom>
+          <a:noFill/>
+          <a:ln/>
+        </p:spPr>
+        <p:txBody>
+          <a:bodyPr wrap="square" lIns="0" tIns="0" rIns="0" bIns="0" rtlCol="0" anchor="t"/>
+          <a:lstStyle/>
+          <a:p>
+            <a:pPr algn="ctr" indent="0" marL="0">
+              <a:buNone/>
+            </a:pPr>
+            <a:r>
+              <a:rPr lang="en-US" sz="1100" b="1" dirty="0">
+                <a:solidFill>
+                  <a:srgbClr val="FAA825"/>
+                </a:solidFill>
+                <a:latin typeface="Montserrat" pitchFamily="34" charset="0"/>
+                <a:ea typeface="Montserrat" pitchFamily="34" charset="-122"/>
+                <a:cs typeface="Montserrat" pitchFamily="34" charset="-120"/>
+              </a:rPr>
+              <a:t>1  </a:t>
+            </a:r>
+            <a:pPr algn="ctr" indent="0" marL="0">
+              <a:buNone/>
+            </a:pPr>
+            <a:r>
+              <a:rPr lang="en-US" sz="850" b="1" dirty="0">
+                <a:solidFill>
+                  <a:srgbClr val="FFFFFF"/>
+                </a:solidFill>
+                <a:latin typeface="Montserrat" pitchFamily="34" charset="0"/>
+                <a:ea typeface="Montserrat" pitchFamily="34" charset="-122"/>
+                <a:cs typeface="Montserrat" pitchFamily="34" charset="-120"/>
+              </a:rPr>
+              <a:t>PROBLEM</a:t>
+            </a:r>
+            <a:endParaRPr lang="en-US" sz="1100" dirty="0"/>
+          </a:p>
+        </p:txBody>
+      </p:sp>
+      <p:sp>
+        <p:nvSpPr>
+          <p:cNvPr id="23" name="Text 20"/>
+          <p:cNvSpPr/>
+          <p:nvPr/>
+        </p:nvSpPr>
+        <p:spPr>
+          <a:xfrm>
+            <a:off x="621792" y="5321808"/>
+            <a:ext cx="1250115" cy="594360"/>
           </a:xfrm>
           <a:prstGeom prst="rect">
             <a:avLst/>
@@ -6266,16 +6090,155 @@
               <a:buNone/>
             </a:pPr>
             <a:r>
+              <a:rPr lang="en-US" sz="850" dirty="0">
+                <a:solidFill>
+                  <a:srgbClr val="EADBFF"/>
+                </a:solidFill>
+                <a:latin typeface="Montserrat" pitchFamily="34" charset="0"/>
+                <a:ea typeface="Montserrat" pitchFamily="34" charset="-122"/>
+                <a:cs typeface="Montserrat" pitchFamily="34" charset="-120"/>
+              </a:rPr>
+              <a:t>Data fragmented by identity</a:t>
+            </a:r>
+            <a:endParaRPr lang="en-US" sz="850" dirty="0"/>
+          </a:p>
+        </p:txBody>
+      </p:sp>
+      <p:sp>
+        <p:nvSpPr>
+          <p:cNvPr id="24" name="Text 21"/>
+          <p:cNvSpPr/>
+          <p:nvPr/>
+        </p:nvSpPr>
+        <p:spPr>
+          <a:xfrm>
+            <a:off x="1945059" y="4663440"/>
+            <a:ext cx="219456" cy="1371600"/>
+          </a:xfrm>
+          <a:prstGeom prst="rect">
+            <a:avLst/>
+          </a:prstGeom>
+          <a:noFill/>
+          <a:ln/>
+        </p:spPr>
+        <p:txBody>
+          <a:bodyPr wrap="square" lIns="0" tIns="0" rIns="0" bIns="0" rtlCol="0" anchor="ctr"/>
+          <a:lstStyle/>
+          <a:p>
+            <a:pPr algn="ctr" indent="0" marL="0">
+              <a:buNone/>
+            </a:pPr>
+            <a:r>
+              <a:rPr lang="en-US" sz="1200" b="1" dirty="0">
+                <a:solidFill>
+                  <a:srgbClr val="9747FF"/>
+                </a:solidFill>
+                <a:latin typeface="Montserrat" pitchFamily="34" charset="0"/>
+                <a:ea typeface="Montserrat" pitchFamily="34" charset="-122"/>
+                <a:cs typeface="Montserrat" pitchFamily="34" charset="-120"/>
+              </a:rPr>
+              <a:t>→</a:t>
+            </a:r>
+            <a:endParaRPr lang="en-US" sz="1200" dirty="0"/>
+          </a:p>
+        </p:txBody>
+      </p:sp>
+      <p:sp>
+        <p:nvSpPr>
+          <p:cNvPr id="25" name="Shape 22"/>
+          <p:cNvSpPr/>
+          <p:nvPr/>
+        </p:nvSpPr>
+        <p:spPr>
+          <a:xfrm>
+            <a:off x="2164515" y="4663440"/>
+            <a:ext cx="1396419" cy="1371600"/>
+          </a:xfrm>
+          <a:prstGeom prst="roundRect">
+            <a:avLst>
+              <a:gd name="adj" fmla="val 4000"/>
+            </a:avLst>
+          </a:prstGeom>
+          <a:solidFill>
+            <a:srgbClr val="7719E1"/>
+          </a:solidFill>
+          <a:ln/>
+        </p:spPr>
+      </p:sp>
+      <p:sp>
+        <p:nvSpPr>
+          <p:cNvPr id="26" name="Text 23"/>
+          <p:cNvSpPr/>
+          <p:nvPr/>
+        </p:nvSpPr>
+        <p:spPr>
+          <a:xfrm>
+            <a:off x="2210235" y="4773168"/>
+            <a:ext cx="1304979" cy="502920"/>
+          </a:xfrm>
+          <a:prstGeom prst="rect">
+            <a:avLst/>
+          </a:prstGeom>
+          <a:noFill/>
+          <a:ln/>
+        </p:spPr>
+        <p:txBody>
+          <a:bodyPr wrap="square" lIns="0" tIns="0" rIns="0" bIns="0" rtlCol="0" anchor="t"/>
+          <a:lstStyle/>
+          <a:p>
+            <a:pPr algn="ctr" indent="0" marL="0">
+              <a:buNone/>
+            </a:pPr>
+            <a:r>
               <a:rPr lang="en-US" sz="1100" b="1" dirty="0">
                 <a:solidFill>
-                  <a:srgbClr val="FACC15"/>
-                </a:solidFill>
-                <a:latin typeface="Calibri" pitchFamily="34" charset="0"/>
-                <a:ea typeface="Calibri" pitchFamily="34" charset="-122"/>
-                <a:cs typeface="Calibri" pitchFamily="34" charset="-120"/>
-              </a:rPr>
-              <a:t>1  </a:t>
-            </a:r>
+                  <a:srgbClr val="FAA825"/>
+                </a:solidFill>
+                <a:latin typeface="Montserrat" pitchFamily="34" charset="0"/>
+                <a:ea typeface="Montserrat" pitchFamily="34" charset="-122"/>
+                <a:cs typeface="Montserrat" pitchFamily="34" charset="-120"/>
+              </a:rPr>
+              <a:t>2  </a:t>
+            </a:r>
+            <a:pPr algn="ctr" indent="0" marL="0">
+              <a:buNone/>
+            </a:pPr>
+            <a:r>
+              <a:rPr lang="en-US" sz="850" b="1" dirty="0">
+                <a:solidFill>
+                  <a:srgbClr val="FFFFFF"/>
+                </a:solidFill>
+                <a:latin typeface="Montserrat" pitchFamily="34" charset="0"/>
+                <a:ea typeface="Montserrat" pitchFamily="34" charset="-122"/>
+                <a:cs typeface="Montserrat" pitchFamily="34" charset="-120"/>
+              </a:rPr>
+              <a:t>PROMISE</a:t>
+            </a:r>
+            <a:endParaRPr lang="en-US" sz="1100" dirty="0"/>
+          </a:p>
+        </p:txBody>
+      </p:sp>
+      <p:sp>
+        <p:nvSpPr>
+          <p:cNvPr id="27" name="Text 24"/>
+          <p:cNvSpPr/>
+          <p:nvPr/>
+        </p:nvSpPr>
+        <p:spPr>
+          <a:xfrm>
+            <a:off x="2237667" y="5321808"/>
+            <a:ext cx="1250115" cy="594360"/>
+          </a:xfrm>
+          <a:prstGeom prst="rect">
+            <a:avLst/>
+          </a:prstGeom>
+          <a:noFill/>
+          <a:ln/>
+        </p:spPr>
+        <p:txBody>
+          <a:bodyPr wrap="square" lIns="0" tIns="0" rIns="0" bIns="0" rtlCol="0" anchor="t"/>
+          <a:lstStyle/>
+          <a:p>
             <a:pPr algn="ctr" indent="0" marL="0">
               <a:lnSpc>
                 <a:spcPct val="100000"/>
@@ -6283,15 +6246,129 @@
               <a:buNone/>
             </a:pPr>
             <a:r>
-              <a:rPr lang="en-US" sz="900" b="1" dirty="0">
-                <a:solidFill>
-                  <a:srgbClr val="FACC15"/>
-                </a:solidFill>
-                <a:latin typeface="Calibri" pitchFamily="34" charset="0"/>
-                <a:ea typeface="Calibri" pitchFamily="34" charset="-122"/>
-                <a:cs typeface="Calibri" pitchFamily="34" charset="-120"/>
-              </a:rPr>
-              <a:t>PROBLEM</a:t>
+              <a:rPr lang="en-US" sz="850" dirty="0">
+                <a:solidFill>
+                  <a:srgbClr val="EADBFF"/>
+                </a:solidFill>
+                <a:latin typeface="Montserrat" pitchFamily="34" charset="0"/>
+                <a:ea typeface="Montserrat" pitchFamily="34" charset="-122"/>
+                <a:cs typeface="Montserrat" pitchFamily="34" charset="-120"/>
+              </a:rPr>
+              <a:t>Accurate, complete, useful</a:t>
+            </a:r>
+            <a:endParaRPr lang="en-US" sz="850" dirty="0"/>
+          </a:p>
+        </p:txBody>
+      </p:sp>
+      <p:sp>
+        <p:nvSpPr>
+          <p:cNvPr id="28" name="Text 25"/>
+          <p:cNvSpPr/>
+          <p:nvPr/>
+        </p:nvSpPr>
+        <p:spPr>
+          <a:xfrm>
+            <a:off x="3560935" y="4663440"/>
+            <a:ext cx="219456" cy="1371600"/>
+          </a:xfrm>
+          <a:prstGeom prst="rect">
+            <a:avLst/>
+          </a:prstGeom>
+          <a:noFill/>
+          <a:ln/>
+        </p:spPr>
+        <p:txBody>
+          <a:bodyPr wrap="square" lIns="0" tIns="0" rIns="0" bIns="0" rtlCol="0" anchor="ctr"/>
+          <a:lstStyle/>
+          <a:p>
+            <a:pPr algn="ctr" indent="0" marL="0">
+              <a:buNone/>
+            </a:pPr>
+            <a:r>
+              <a:rPr lang="en-US" sz="1200" b="1" dirty="0">
+                <a:solidFill>
+                  <a:srgbClr val="9747FF"/>
+                </a:solidFill>
+                <a:latin typeface="Montserrat" pitchFamily="34" charset="0"/>
+                <a:ea typeface="Montserrat" pitchFamily="34" charset="-122"/>
+                <a:cs typeface="Montserrat" pitchFamily="34" charset="-120"/>
+              </a:rPr>
+              <a:t>→</a:t>
+            </a:r>
+            <a:endParaRPr lang="en-US" sz="1200" dirty="0"/>
+          </a:p>
+        </p:txBody>
+      </p:sp>
+      <p:sp>
+        <p:nvSpPr>
+          <p:cNvPr id="29" name="Shape 26"/>
+          <p:cNvSpPr/>
+          <p:nvPr/>
+        </p:nvSpPr>
+        <p:spPr>
+          <a:xfrm>
+            <a:off x="3780391" y="4663440"/>
+            <a:ext cx="1396419" cy="1371600"/>
+          </a:xfrm>
+          <a:prstGeom prst="roundRect">
+            <a:avLst>
+              <a:gd name="adj" fmla="val 4000"/>
+            </a:avLst>
+          </a:prstGeom>
+          <a:solidFill>
+            <a:srgbClr val="461478"/>
+          </a:solidFill>
+          <a:ln/>
+        </p:spPr>
+      </p:sp>
+      <p:sp>
+        <p:nvSpPr>
+          <p:cNvPr id="30" name="Text 27"/>
+          <p:cNvSpPr/>
+          <p:nvPr/>
+        </p:nvSpPr>
+        <p:spPr>
+          <a:xfrm>
+            <a:off x="3826111" y="4773168"/>
+            <a:ext cx="1304979" cy="502920"/>
+          </a:xfrm>
+          <a:prstGeom prst="rect">
+            <a:avLst/>
+          </a:prstGeom>
+          <a:noFill/>
+          <a:ln/>
+        </p:spPr>
+        <p:txBody>
+          <a:bodyPr wrap="square" lIns="0" tIns="0" rIns="0" bIns="0" rtlCol="0" anchor="t"/>
+          <a:lstStyle/>
+          <a:p>
+            <a:pPr algn="ctr" indent="0" marL="0">
+              <a:buNone/>
+            </a:pPr>
+            <a:r>
+              <a:rPr lang="en-US" sz="1100" b="1" dirty="0">
+                <a:solidFill>
+                  <a:srgbClr val="FAA825"/>
+                </a:solidFill>
+                <a:latin typeface="Montserrat" pitchFamily="34" charset="0"/>
+                <a:ea typeface="Montserrat" pitchFamily="34" charset="-122"/>
+                <a:cs typeface="Montserrat" pitchFamily="34" charset="-120"/>
+              </a:rPr>
+              <a:t>3  </a:t>
+            </a:r>
+            <a:pPr algn="ctr" indent="0" marL="0">
+              <a:buNone/>
+            </a:pPr>
+            <a:r>
+              <a:rPr lang="en-US" sz="850" b="1" dirty="0">
+                <a:solidFill>
+                  <a:srgbClr val="FFFFFF"/>
+                </a:solidFill>
+                <a:latin typeface="Montserrat" pitchFamily="34" charset="0"/>
+                <a:ea typeface="Montserrat" pitchFamily="34" charset="-122"/>
+                <a:cs typeface="Montserrat" pitchFamily="34" charset="-120"/>
+              </a:rPr>
+              <a:t>METHOD</a:t>
             </a:r>
             <a:endParaRPr lang="en-US" sz="1100" dirty="0"/>
           </a:p>
@@ -6299,14 +6376,14 @@
       </p:sp>
       <p:sp>
         <p:nvSpPr>
-          <p:cNvPr id="23" name="Text 21"/>
-          <p:cNvSpPr/>
-          <p:nvPr/>
-        </p:nvSpPr>
-        <p:spPr>
-          <a:xfrm>
-            <a:off x="621792" y="5550408"/>
-            <a:ext cx="1234440" cy="548640"/>
+          <p:cNvPr id="31" name="Text 28"/>
+          <p:cNvSpPr/>
+          <p:nvPr/>
+        </p:nvSpPr>
+        <p:spPr>
+          <a:xfrm>
+            <a:off x="3853543" y="5321808"/>
+            <a:ext cx="1250115" cy="594360"/>
           </a:xfrm>
           <a:prstGeom prst="rect">
             <a:avLst/>
@@ -6327,13 +6404,13 @@
             <a:r>
               <a:rPr lang="en-US" sz="850" dirty="0">
                 <a:solidFill>
-                  <a:srgbClr val="FFFFFF"/>
-                </a:solidFill>
-                <a:latin typeface="Calibri" pitchFamily="34" charset="0"/>
-                <a:ea typeface="Calibri" pitchFamily="34" charset="-122"/>
-                <a:cs typeface="Calibri" pitchFamily="34" charset="-120"/>
-              </a:rPr>
-              <a:t>Data fragmented by identity</a:t>
+                  <a:srgbClr val="EADBFF"/>
+                </a:solidFill>
+                <a:latin typeface="Montserrat" pitchFamily="34" charset="0"/>
+                <a:ea typeface="Montserrat" pitchFamily="34" charset="-122"/>
+                <a:cs typeface="Montserrat" pitchFamily="34" charset="-120"/>
+              </a:rPr>
+              <a:t>Resolve. Enhance. Collaborate.</a:t>
             </a:r>
             <a:endParaRPr lang="en-US" sz="850" dirty="0"/>
           </a:p>
@@ -6341,14 +6418,14 @@
       </p:sp>
       <p:sp>
         <p:nvSpPr>
-          <p:cNvPr id="24" name="Text 22"/>
-          <p:cNvSpPr/>
-          <p:nvPr/>
-        </p:nvSpPr>
-        <p:spPr>
-          <a:xfrm>
-            <a:off x="1929384" y="4892040"/>
-            <a:ext cx="237744" cy="1325880"/>
+          <p:cNvPr id="32" name="Text 29"/>
+          <p:cNvSpPr/>
+          <p:nvPr/>
+        </p:nvSpPr>
+        <p:spPr>
+          <a:xfrm>
+            <a:off x="5176810" y="4663440"/>
+            <a:ext cx="219456" cy="1371600"/>
           </a:xfrm>
           <a:prstGeom prst="rect">
             <a:avLst/>
@@ -6366,11 +6443,11 @@
             <a:r>
               <a:rPr lang="en-US" sz="1200" b="1" dirty="0">
                 <a:solidFill>
-                  <a:srgbClr val="8B5CF6"/>
-                </a:solidFill>
-                <a:latin typeface="Calibri" pitchFamily="34" charset="0"/>
-                <a:ea typeface="Calibri" pitchFamily="34" charset="-122"/>
-                <a:cs typeface="Calibri" pitchFamily="34" charset="-120"/>
+                  <a:srgbClr val="9747FF"/>
+                </a:solidFill>
+                <a:latin typeface="Montserrat" pitchFamily="34" charset="0"/>
+                <a:ea typeface="Montserrat" pitchFamily="34" charset="-122"/>
+                <a:cs typeface="Montserrat" pitchFamily="34" charset="-120"/>
               </a:rPr>
               <a:t>→</a:t>
             </a:r>
@@ -6380,36 +6457,89 @@
       </p:sp>
       <p:sp>
         <p:nvSpPr>
-          <p:cNvPr id="25" name="Shape 23"/>
-          <p:cNvSpPr/>
-          <p:nvPr/>
-        </p:nvSpPr>
-        <p:spPr>
-          <a:xfrm>
-            <a:off x="2167128" y="4892040"/>
-            <a:ext cx="1380744" cy="1325880"/>
+          <p:cNvPr id="33" name="Shape 30"/>
+          <p:cNvSpPr/>
+          <p:nvPr/>
+        </p:nvSpPr>
+        <p:spPr>
+          <a:xfrm>
+            <a:off x="5396266" y="4663440"/>
+            <a:ext cx="1396419" cy="1371600"/>
           </a:xfrm>
           <a:prstGeom prst="roundRect">
             <a:avLst>
-              <a:gd name="adj" fmla="val 3448"/>
+              <a:gd name="adj" fmla="val 4000"/>
             </a:avLst>
           </a:prstGeom>
           <a:solidFill>
-            <a:srgbClr val="281A48"/>
+            <a:srgbClr val="7719E1"/>
           </a:solidFill>
           <a:ln/>
         </p:spPr>
       </p:sp>
       <p:sp>
         <p:nvSpPr>
-          <p:cNvPr id="26" name="Text 24"/>
-          <p:cNvSpPr/>
-          <p:nvPr/>
-        </p:nvSpPr>
-        <p:spPr>
-          <a:xfrm>
-            <a:off x="2212848" y="5001768"/>
-            <a:ext cx="1289304" cy="502920"/>
+          <p:cNvPr id="34" name="Text 31"/>
+          <p:cNvSpPr/>
+          <p:nvPr/>
+        </p:nvSpPr>
+        <p:spPr>
+          <a:xfrm>
+            <a:off x="5441986" y="4773168"/>
+            <a:ext cx="1304979" cy="502920"/>
+          </a:xfrm>
+          <a:prstGeom prst="rect">
+            <a:avLst/>
+          </a:prstGeom>
+          <a:noFill/>
+          <a:ln/>
+        </p:spPr>
+        <p:txBody>
+          <a:bodyPr wrap="square" lIns="0" tIns="0" rIns="0" bIns="0" rtlCol="0" anchor="t"/>
+          <a:lstStyle/>
+          <a:p>
+            <a:pPr algn="ctr" indent="0" marL="0">
+              <a:buNone/>
+            </a:pPr>
+            <a:r>
+              <a:rPr lang="en-US" sz="1100" b="1" dirty="0">
+                <a:solidFill>
+                  <a:srgbClr val="FAA825"/>
+                </a:solidFill>
+                <a:latin typeface="Montserrat" pitchFamily="34" charset="0"/>
+                <a:ea typeface="Montserrat" pitchFamily="34" charset="-122"/>
+                <a:cs typeface="Montserrat" pitchFamily="34" charset="-120"/>
+              </a:rPr>
+              <a:t>4  </a:t>
+            </a:r>
+            <a:pPr algn="ctr" indent="0" marL="0">
+              <a:buNone/>
+            </a:pPr>
+            <a:r>
+              <a:rPr lang="en-US" sz="850" b="1" dirty="0">
+                <a:solidFill>
+                  <a:srgbClr val="FFFFFF"/>
+                </a:solidFill>
+                <a:latin typeface="Montserrat" pitchFamily="34" charset="0"/>
+                <a:ea typeface="Montserrat" pitchFamily="34" charset="-122"/>
+                <a:cs typeface="Montserrat" pitchFamily="34" charset="-120"/>
+              </a:rPr>
+              <a:t>DIFFERENTIATION</a:t>
+            </a:r>
+            <a:endParaRPr lang="en-US" sz="1100" dirty="0"/>
+          </a:p>
+        </p:txBody>
+      </p:sp>
+      <p:sp>
+        <p:nvSpPr>
+          <p:cNvPr id="35" name="Text 32"/>
+          <p:cNvSpPr/>
+          <p:nvPr/>
+        </p:nvSpPr>
+        <p:spPr>
+          <a:xfrm>
+            <a:off x="5469418" y="5321808"/>
+            <a:ext cx="1250115" cy="594360"/>
           </a:xfrm>
           <a:prstGeom prst="rect">
             <a:avLst/>
@@ -6428,16 +6558,155 @@
               <a:buNone/>
             </a:pPr>
             <a:r>
+              <a:rPr lang="en-US" sz="850" dirty="0">
+                <a:solidFill>
+                  <a:srgbClr val="EADBFF"/>
+                </a:solidFill>
+                <a:latin typeface="Montserrat" pitchFamily="34" charset="0"/>
+                <a:ea typeface="Montserrat" pitchFamily="34" charset="-122"/>
+                <a:cs typeface="Montserrat" pitchFamily="34" charset="-120"/>
+              </a:rPr>
+              <a:t>ICS + persistent ID + interop</a:t>
+            </a:r>
+            <a:endParaRPr lang="en-US" sz="850" dirty="0"/>
+          </a:p>
+        </p:txBody>
+      </p:sp>
+      <p:sp>
+        <p:nvSpPr>
+          <p:cNvPr id="36" name="Text 33"/>
+          <p:cNvSpPr/>
+          <p:nvPr/>
+        </p:nvSpPr>
+        <p:spPr>
+          <a:xfrm>
+            <a:off x="6792686" y="4663440"/>
+            <a:ext cx="219456" cy="1371600"/>
+          </a:xfrm>
+          <a:prstGeom prst="rect">
+            <a:avLst/>
+          </a:prstGeom>
+          <a:noFill/>
+          <a:ln/>
+        </p:spPr>
+        <p:txBody>
+          <a:bodyPr wrap="square" lIns="0" tIns="0" rIns="0" bIns="0" rtlCol="0" anchor="ctr"/>
+          <a:lstStyle/>
+          <a:p>
+            <a:pPr algn="ctr" indent="0" marL="0">
+              <a:buNone/>
+            </a:pPr>
+            <a:r>
+              <a:rPr lang="en-US" sz="1200" b="1" dirty="0">
+                <a:solidFill>
+                  <a:srgbClr val="9747FF"/>
+                </a:solidFill>
+                <a:latin typeface="Montserrat" pitchFamily="34" charset="0"/>
+                <a:ea typeface="Montserrat" pitchFamily="34" charset="-122"/>
+                <a:cs typeface="Montserrat" pitchFamily="34" charset="-120"/>
+              </a:rPr>
+              <a:t>→</a:t>
+            </a:r>
+            <a:endParaRPr lang="en-US" sz="1200" dirty="0"/>
+          </a:p>
+        </p:txBody>
+      </p:sp>
+      <p:sp>
+        <p:nvSpPr>
+          <p:cNvPr id="37" name="Shape 34"/>
+          <p:cNvSpPr/>
+          <p:nvPr/>
+        </p:nvSpPr>
+        <p:spPr>
+          <a:xfrm>
+            <a:off x="7012142" y="4663440"/>
+            <a:ext cx="1396419" cy="1371600"/>
+          </a:xfrm>
+          <a:prstGeom prst="roundRect">
+            <a:avLst>
+              <a:gd name="adj" fmla="val 4000"/>
+            </a:avLst>
+          </a:prstGeom>
+          <a:solidFill>
+            <a:srgbClr val="461478"/>
+          </a:solidFill>
+          <a:ln/>
+        </p:spPr>
+      </p:sp>
+      <p:sp>
+        <p:nvSpPr>
+          <p:cNvPr id="38" name="Text 35"/>
+          <p:cNvSpPr/>
+          <p:nvPr/>
+        </p:nvSpPr>
+        <p:spPr>
+          <a:xfrm>
+            <a:off x="7057862" y="4773168"/>
+            <a:ext cx="1304979" cy="502920"/>
+          </a:xfrm>
+          <a:prstGeom prst="rect">
+            <a:avLst/>
+          </a:prstGeom>
+          <a:noFill/>
+          <a:ln/>
+        </p:spPr>
+        <p:txBody>
+          <a:bodyPr wrap="square" lIns="0" tIns="0" rIns="0" bIns="0" rtlCol="0" anchor="t"/>
+          <a:lstStyle/>
+          <a:p>
+            <a:pPr algn="ctr" indent="0" marL="0">
+              <a:buNone/>
+            </a:pPr>
+            <a:r>
               <a:rPr lang="en-US" sz="1100" b="1" dirty="0">
                 <a:solidFill>
-                  <a:srgbClr val="FACC15"/>
-                </a:solidFill>
-                <a:latin typeface="Calibri" pitchFamily="34" charset="0"/>
-                <a:ea typeface="Calibri" pitchFamily="34" charset="-122"/>
-                <a:cs typeface="Calibri" pitchFamily="34" charset="-120"/>
-              </a:rPr>
-              <a:t>2  </a:t>
-            </a:r>
+                  <a:srgbClr val="FAA825"/>
+                </a:solidFill>
+                <a:latin typeface="Montserrat" pitchFamily="34" charset="0"/>
+                <a:ea typeface="Montserrat" pitchFamily="34" charset="-122"/>
+                <a:cs typeface="Montserrat" pitchFamily="34" charset="-120"/>
+              </a:rPr>
+              <a:t>5  </a:t>
+            </a:r>
+            <a:pPr algn="ctr" indent="0" marL="0">
+              <a:buNone/>
+            </a:pPr>
+            <a:r>
+              <a:rPr lang="en-US" sz="850" b="1" dirty="0">
+                <a:solidFill>
+                  <a:srgbClr val="FFFFFF"/>
+                </a:solidFill>
+                <a:latin typeface="Montserrat" pitchFamily="34" charset="0"/>
+                <a:ea typeface="Montserrat" pitchFamily="34" charset="-122"/>
+                <a:cs typeface="Montserrat" pitchFamily="34" charset="-120"/>
+              </a:rPr>
+              <a:t>ARCHITECTURE</a:t>
+            </a:r>
+            <a:endParaRPr lang="en-US" sz="1100" dirty="0"/>
+          </a:p>
+        </p:txBody>
+      </p:sp>
+      <p:sp>
+        <p:nvSpPr>
+          <p:cNvPr id="39" name="Text 36"/>
+          <p:cNvSpPr/>
+          <p:nvPr/>
+        </p:nvSpPr>
+        <p:spPr>
+          <a:xfrm>
+            <a:off x="7085294" y="5321808"/>
+            <a:ext cx="1250115" cy="594360"/>
+          </a:xfrm>
+          <a:prstGeom prst="rect">
+            <a:avLst/>
+          </a:prstGeom>
+          <a:noFill/>
+          <a:ln/>
+        </p:spPr>
+        <p:txBody>
+          <a:bodyPr wrap="square" lIns="0" tIns="0" rIns="0" bIns="0" rtlCol="0" anchor="t"/>
+          <a:lstStyle/>
+          <a:p>
             <a:pPr algn="ctr" indent="0" marL="0">
               <a:lnSpc>
                 <a:spcPct val="100000"/>
@@ -6445,15 +6714,129 @@
               <a:buNone/>
             </a:pPr>
             <a:r>
-              <a:rPr lang="en-US" sz="900" b="1" dirty="0">
-                <a:solidFill>
-                  <a:srgbClr val="FACC15"/>
-                </a:solidFill>
-                <a:latin typeface="Calibri" pitchFamily="34" charset="0"/>
-                <a:ea typeface="Calibri" pitchFamily="34" charset="-122"/>
-                <a:cs typeface="Calibri" pitchFamily="34" charset="-120"/>
-              </a:rPr>
-              <a:t>PROMISE</a:t>
+              <a:rPr lang="en-US" sz="850" dirty="0">
+                <a:solidFill>
+                  <a:srgbClr val="EADBFF"/>
+                </a:solidFill>
+                <a:latin typeface="Montserrat" pitchFamily="34" charset="0"/>
+                <a:ea typeface="Montserrat" pitchFamily="34" charset="-122"/>
+                <a:cs typeface="Montserrat" pitchFamily="34" charset="-120"/>
+              </a:rPr>
+              <a:t>Identity in Databricks / Snowflake</a:t>
+            </a:r>
+            <a:endParaRPr lang="en-US" sz="850" dirty="0"/>
+          </a:p>
+        </p:txBody>
+      </p:sp>
+      <p:sp>
+        <p:nvSpPr>
+          <p:cNvPr id="40" name="Text 37"/>
+          <p:cNvSpPr/>
+          <p:nvPr/>
+        </p:nvSpPr>
+        <p:spPr>
+          <a:xfrm>
+            <a:off x="8408561" y="4663440"/>
+            <a:ext cx="219456" cy="1371600"/>
+          </a:xfrm>
+          <a:prstGeom prst="rect">
+            <a:avLst/>
+          </a:prstGeom>
+          <a:noFill/>
+          <a:ln/>
+        </p:spPr>
+        <p:txBody>
+          <a:bodyPr wrap="square" lIns="0" tIns="0" rIns="0" bIns="0" rtlCol="0" anchor="ctr"/>
+          <a:lstStyle/>
+          <a:p>
+            <a:pPr algn="ctr" indent="0" marL="0">
+              <a:buNone/>
+            </a:pPr>
+            <a:r>
+              <a:rPr lang="en-US" sz="1200" b="1" dirty="0">
+                <a:solidFill>
+                  <a:srgbClr val="9747FF"/>
+                </a:solidFill>
+                <a:latin typeface="Montserrat" pitchFamily="34" charset="0"/>
+                <a:ea typeface="Montserrat" pitchFamily="34" charset="-122"/>
+                <a:cs typeface="Montserrat" pitchFamily="34" charset="-120"/>
+              </a:rPr>
+              <a:t>→</a:t>
+            </a:r>
+            <a:endParaRPr lang="en-US" sz="1200" dirty="0"/>
+          </a:p>
+        </p:txBody>
+      </p:sp>
+      <p:sp>
+        <p:nvSpPr>
+          <p:cNvPr id="41" name="Shape 38"/>
+          <p:cNvSpPr/>
+          <p:nvPr/>
+        </p:nvSpPr>
+        <p:spPr>
+          <a:xfrm>
+            <a:off x="8628017" y="4663440"/>
+            <a:ext cx="1396419" cy="1371600"/>
+          </a:xfrm>
+          <a:prstGeom prst="roundRect">
+            <a:avLst>
+              <a:gd name="adj" fmla="val 4000"/>
+            </a:avLst>
+          </a:prstGeom>
+          <a:solidFill>
+            <a:srgbClr val="7719E1"/>
+          </a:solidFill>
+          <a:ln/>
+        </p:spPr>
+      </p:sp>
+      <p:sp>
+        <p:nvSpPr>
+          <p:cNvPr id="42" name="Text 39"/>
+          <p:cNvSpPr/>
+          <p:nvPr/>
+        </p:nvSpPr>
+        <p:spPr>
+          <a:xfrm>
+            <a:off x="8673737" y="4773168"/>
+            <a:ext cx="1304979" cy="502920"/>
+          </a:xfrm>
+          <a:prstGeom prst="rect">
+            <a:avLst/>
+          </a:prstGeom>
+          <a:noFill/>
+          <a:ln/>
+        </p:spPr>
+        <p:txBody>
+          <a:bodyPr wrap="square" lIns="0" tIns="0" rIns="0" bIns="0" rtlCol="0" anchor="t"/>
+          <a:lstStyle/>
+          <a:p>
+            <a:pPr algn="ctr" indent="0" marL="0">
+              <a:buNone/>
+            </a:pPr>
+            <a:r>
+              <a:rPr lang="en-US" sz="1100" b="1" dirty="0">
+                <a:solidFill>
+                  <a:srgbClr val="FAA825"/>
+                </a:solidFill>
+                <a:latin typeface="Montserrat" pitchFamily="34" charset="0"/>
+                <a:ea typeface="Montserrat" pitchFamily="34" charset="-122"/>
+                <a:cs typeface="Montserrat" pitchFamily="34" charset="-120"/>
+              </a:rPr>
+              <a:t>6  </a:t>
+            </a:r>
+            <a:pPr algn="ctr" indent="0" marL="0">
+              <a:buNone/>
+            </a:pPr>
+            <a:r>
+              <a:rPr lang="en-US" sz="850" b="1" dirty="0">
+                <a:solidFill>
+                  <a:srgbClr val="FFFFFF"/>
+                </a:solidFill>
+                <a:latin typeface="Montserrat" pitchFamily="34" charset="0"/>
+                <a:ea typeface="Montserrat" pitchFamily="34" charset="-122"/>
+                <a:cs typeface="Montserrat" pitchFamily="34" charset="-120"/>
+              </a:rPr>
+              <a:t>PROOF</a:t>
             </a:r>
             <a:endParaRPr lang="en-US" sz="1100" dirty="0"/>
           </a:p>
@@ -6461,14 +6844,14 @@
       </p:sp>
       <p:sp>
         <p:nvSpPr>
-          <p:cNvPr id="27" name="Text 25"/>
-          <p:cNvSpPr/>
-          <p:nvPr/>
-        </p:nvSpPr>
-        <p:spPr>
-          <a:xfrm>
-            <a:off x="2240280" y="5550408"/>
-            <a:ext cx="1234440" cy="548640"/>
+          <p:cNvPr id="43" name="Text 40"/>
+          <p:cNvSpPr/>
+          <p:nvPr/>
+        </p:nvSpPr>
+        <p:spPr>
+          <a:xfrm>
+            <a:off x="8701169" y="5321808"/>
+            <a:ext cx="1250115" cy="594360"/>
           </a:xfrm>
           <a:prstGeom prst="rect">
             <a:avLst/>
@@ -6489,13 +6872,13 @@
             <a:r>
               <a:rPr lang="en-US" sz="850" dirty="0">
                 <a:solidFill>
-                  <a:srgbClr val="FFFFFF"/>
-                </a:solidFill>
-                <a:latin typeface="Calibri" pitchFamily="34" charset="0"/>
-                <a:ea typeface="Calibri" pitchFamily="34" charset="-122"/>
-                <a:cs typeface="Calibri" pitchFamily="34" charset="-120"/>
-              </a:rPr>
-              <a:t>Accurate, complete, useful</a:t>
+                  <a:srgbClr val="EADBFF"/>
+                </a:solidFill>
+                <a:latin typeface="Montserrat" pitchFamily="34" charset="0"/>
+                <a:ea typeface="Montserrat" pitchFamily="34" charset="-122"/>
+                <a:cs typeface="Montserrat" pitchFamily="34" charset="-120"/>
+              </a:rPr>
+              <a:t>DoorDash / Narrative + demos</a:t>
             </a:r>
             <a:endParaRPr lang="en-US" sz="850" dirty="0"/>
           </a:p>
@@ -6503,14 +6886,14 @@
       </p:sp>
       <p:sp>
         <p:nvSpPr>
-          <p:cNvPr id="28" name="Text 26"/>
-          <p:cNvSpPr/>
-          <p:nvPr/>
-        </p:nvSpPr>
-        <p:spPr>
-          <a:xfrm>
-            <a:off x="3547872" y="4892040"/>
-            <a:ext cx="237744" cy="1325880"/>
+          <p:cNvPr id="44" name="Text 41"/>
+          <p:cNvSpPr/>
+          <p:nvPr/>
+        </p:nvSpPr>
+        <p:spPr>
+          <a:xfrm>
+            <a:off x="10024437" y="4663440"/>
+            <a:ext cx="219456" cy="1371600"/>
           </a:xfrm>
           <a:prstGeom prst="rect">
             <a:avLst/>
@@ -6528,11 +6911,11 @@
             <a:r>
               <a:rPr lang="en-US" sz="1200" b="1" dirty="0">
                 <a:solidFill>
-                  <a:srgbClr val="8B5CF6"/>
-                </a:solidFill>
-                <a:latin typeface="Calibri" pitchFamily="34" charset="0"/>
-                <a:ea typeface="Calibri" pitchFamily="34" charset="-122"/>
-                <a:cs typeface="Calibri" pitchFamily="34" charset="-120"/>
+                  <a:srgbClr val="9747FF"/>
+                </a:solidFill>
+                <a:latin typeface="Montserrat" pitchFamily="34" charset="0"/>
+                <a:ea typeface="Montserrat" pitchFamily="34" charset="-122"/>
+                <a:cs typeface="Montserrat" pitchFamily="34" charset="-120"/>
               </a:rPr>
               <a:t>→</a:t>
             </a:r>
@@ -6542,36 +6925,89 @@
       </p:sp>
       <p:sp>
         <p:nvSpPr>
-          <p:cNvPr id="29" name="Shape 27"/>
-          <p:cNvSpPr/>
-          <p:nvPr/>
-        </p:nvSpPr>
-        <p:spPr>
-          <a:xfrm>
-            <a:off x="3785616" y="4892040"/>
-            <a:ext cx="1380744" cy="1325880"/>
+          <p:cNvPr id="45" name="Shape 42"/>
+          <p:cNvSpPr/>
+          <p:nvPr/>
+        </p:nvSpPr>
+        <p:spPr>
+          <a:xfrm>
+            <a:off x="10243893" y="4663440"/>
+            <a:ext cx="1396419" cy="1371600"/>
           </a:xfrm>
           <a:prstGeom prst="roundRect">
             <a:avLst>
-              <a:gd name="adj" fmla="val 3448"/>
+              <a:gd name="adj" fmla="val 4000"/>
             </a:avLst>
           </a:prstGeom>
           <a:solidFill>
-            <a:srgbClr val="281A48"/>
+            <a:srgbClr val="461478"/>
           </a:solidFill>
           <a:ln/>
         </p:spPr>
       </p:sp>
       <p:sp>
         <p:nvSpPr>
-          <p:cNvPr id="30" name="Text 28"/>
-          <p:cNvSpPr/>
-          <p:nvPr/>
-        </p:nvSpPr>
-        <p:spPr>
-          <a:xfrm>
-            <a:off x="3831336" y="5001768"/>
-            <a:ext cx="1289304" cy="502920"/>
+          <p:cNvPr id="46" name="Text 43"/>
+          <p:cNvSpPr/>
+          <p:nvPr/>
+        </p:nvSpPr>
+        <p:spPr>
+          <a:xfrm>
+            <a:off x="10289613" y="4773168"/>
+            <a:ext cx="1304979" cy="502920"/>
+          </a:xfrm>
+          <a:prstGeom prst="rect">
+            <a:avLst/>
+          </a:prstGeom>
+          <a:noFill/>
+          <a:ln/>
+        </p:spPr>
+        <p:txBody>
+          <a:bodyPr wrap="square" lIns="0" tIns="0" rIns="0" bIns="0" rtlCol="0" anchor="t"/>
+          <a:lstStyle/>
+          <a:p>
+            <a:pPr algn="ctr" indent="0" marL="0">
+              <a:buNone/>
+            </a:pPr>
+            <a:r>
+              <a:rPr lang="en-US" sz="1100" b="1" dirty="0">
+                <a:solidFill>
+                  <a:srgbClr val="FAA825"/>
+                </a:solidFill>
+                <a:latin typeface="Montserrat" pitchFamily="34" charset="0"/>
+                <a:ea typeface="Montserrat" pitchFamily="34" charset="-122"/>
+                <a:cs typeface="Montserrat" pitchFamily="34" charset="-120"/>
+              </a:rPr>
+              <a:t>7  </a:t>
+            </a:r>
+            <a:pPr algn="ctr" indent="0" marL="0">
+              <a:buNone/>
+            </a:pPr>
+            <a:r>
+              <a:rPr lang="en-US" sz="850" b="1" dirty="0">
+                <a:solidFill>
+                  <a:srgbClr val="FFFFFF"/>
+                </a:solidFill>
+                <a:latin typeface="Montserrat" pitchFamily="34" charset="0"/>
+                <a:ea typeface="Montserrat" pitchFamily="34" charset="-122"/>
+                <a:cs typeface="Montserrat" pitchFamily="34" charset="-120"/>
+              </a:rPr>
+              <a:t>ACTION</a:t>
+            </a:r>
+            <a:endParaRPr lang="en-US" sz="1100" dirty="0"/>
+          </a:p>
+        </p:txBody>
+      </p:sp>
+      <p:sp>
+        <p:nvSpPr>
+          <p:cNvPr id="47" name="Text 44"/>
+          <p:cNvSpPr/>
+          <p:nvPr/>
+        </p:nvSpPr>
+        <p:spPr>
+          <a:xfrm>
+            <a:off x="10317045" y="5321808"/>
+            <a:ext cx="1250115" cy="594360"/>
           </a:xfrm>
           <a:prstGeom prst="rect">
             <a:avLst/>
@@ -6590,720 +7026,13 @@
               <a:buNone/>
             </a:pPr>
             <a:r>
-              <a:rPr lang="en-US" sz="1100" b="1" dirty="0">
-                <a:solidFill>
-                  <a:srgbClr val="FACC15"/>
-                </a:solidFill>
-                <a:latin typeface="Calibri" pitchFamily="34" charset="0"/>
-                <a:ea typeface="Calibri" pitchFamily="34" charset="-122"/>
-                <a:cs typeface="Calibri" pitchFamily="34" charset="-120"/>
-              </a:rPr>
-              <a:t>3  </a:t>
-            </a:r>
-            <a:pPr algn="ctr" indent="0" marL="0">
-              <a:lnSpc>
-                <a:spcPct val="100000"/>
-              </a:lnSpc>
-              <a:buNone/>
-            </a:pPr>
-            <a:r>
-              <a:rPr lang="en-US" sz="900" b="1" dirty="0">
-                <a:solidFill>
-                  <a:srgbClr val="FACC15"/>
-                </a:solidFill>
-                <a:latin typeface="Calibri" pitchFamily="34" charset="0"/>
-                <a:ea typeface="Calibri" pitchFamily="34" charset="-122"/>
-                <a:cs typeface="Calibri" pitchFamily="34" charset="-120"/>
-              </a:rPr>
-              <a:t>METHOD</a:t>
-            </a:r>
-            <a:endParaRPr lang="en-US" sz="1100" dirty="0"/>
-          </a:p>
-        </p:txBody>
-      </p:sp>
-      <p:sp>
-        <p:nvSpPr>
-          <p:cNvPr id="31" name="Text 29"/>
-          <p:cNvSpPr/>
-          <p:nvPr/>
-        </p:nvSpPr>
-        <p:spPr>
-          <a:xfrm>
-            <a:off x="3858768" y="5550408"/>
-            <a:ext cx="1234440" cy="548640"/>
-          </a:xfrm>
-          <a:prstGeom prst="rect">
-            <a:avLst/>
-          </a:prstGeom>
-          <a:noFill/>
-          <a:ln/>
-        </p:spPr>
-        <p:txBody>
-          <a:bodyPr wrap="square" lIns="0" tIns="0" rIns="0" bIns="0" rtlCol="0" anchor="t"/>
-          <a:lstStyle/>
-          <a:p>
-            <a:pPr algn="ctr" indent="0" marL="0">
-              <a:lnSpc>
-                <a:spcPct val="100000"/>
-              </a:lnSpc>
-              <a:buNone/>
-            </a:pPr>
-            <a:r>
               <a:rPr lang="en-US" sz="850" dirty="0">
                 <a:solidFill>
-                  <a:srgbClr val="FFFFFF"/>
-                </a:solidFill>
-                <a:latin typeface="Calibri" pitchFamily="34" charset="0"/>
-                <a:ea typeface="Calibri" pitchFamily="34" charset="-122"/>
-                <a:cs typeface="Calibri" pitchFamily="34" charset="-120"/>
-              </a:rPr>
-              <a:t>Resolve. Enhance. Collaborate.</a:t>
-            </a:r>
-            <a:endParaRPr lang="en-US" sz="850" dirty="0"/>
-          </a:p>
-        </p:txBody>
-      </p:sp>
-      <p:sp>
-        <p:nvSpPr>
-          <p:cNvPr id="32" name="Text 30"/>
-          <p:cNvSpPr/>
-          <p:nvPr/>
-        </p:nvSpPr>
-        <p:spPr>
-          <a:xfrm>
-            <a:off x="5166360" y="4892040"/>
-            <a:ext cx="237744" cy="1325880"/>
-          </a:xfrm>
-          <a:prstGeom prst="rect">
-            <a:avLst/>
-          </a:prstGeom>
-          <a:noFill/>
-          <a:ln/>
-        </p:spPr>
-        <p:txBody>
-          <a:bodyPr wrap="square" lIns="0" tIns="0" rIns="0" bIns="0" rtlCol="0" anchor="ctr"/>
-          <a:lstStyle/>
-          <a:p>
-            <a:pPr algn="ctr" indent="0" marL="0">
-              <a:buNone/>
-            </a:pPr>
-            <a:r>
-              <a:rPr lang="en-US" sz="1200" b="1" dirty="0">
-                <a:solidFill>
-                  <a:srgbClr val="8B5CF6"/>
-                </a:solidFill>
-                <a:latin typeface="Calibri" pitchFamily="34" charset="0"/>
-                <a:ea typeface="Calibri" pitchFamily="34" charset="-122"/>
-                <a:cs typeface="Calibri" pitchFamily="34" charset="-120"/>
-              </a:rPr>
-              <a:t>→</a:t>
-            </a:r>
-            <a:endParaRPr lang="en-US" sz="1200" dirty="0"/>
-          </a:p>
-        </p:txBody>
-      </p:sp>
-      <p:sp>
-        <p:nvSpPr>
-          <p:cNvPr id="33" name="Shape 31"/>
-          <p:cNvSpPr/>
-          <p:nvPr/>
-        </p:nvSpPr>
-        <p:spPr>
-          <a:xfrm>
-            <a:off x="5404104" y="4892040"/>
-            <a:ext cx="1380744" cy="1325880"/>
-          </a:xfrm>
-          <a:prstGeom prst="roundRect">
-            <a:avLst>
-              <a:gd name="adj" fmla="val 3448"/>
-            </a:avLst>
-          </a:prstGeom>
-          <a:solidFill>
-            <a:srgbClr val="281A48"/>
-          </a:solidFill>
-          <a:ln/>
-        </p:spPr>
-      </p:sp>
-      <p:sp>
-        <p:nvSpPr>
-          <p:cNvPr id="34" name="Text 32"/>
-          <p:cNvSpPr/>
-          <p:nvPr/>
-        </p:nvSpPr>
-        <p:spPr>
-          <a:xfrm>
-            <a:off x="5449824" y="5001768"/>
-            <a:ext cx="1289304" cy="502920"/>
-          </a:xfrm>
-          <a:prstGeom prst="rect">
-            <a:avLst/>
-          </a:prstGeom>
-          <a:noFill/>
-          <a:ln/>
-        </p:spPr>
-        <p:txBody>
-          <a:bodyPr wrap="square" lIns="0" tIns="0" rIns="0" bIns="0" rtlCol="0" anchor="t"/>
-          <a:lstStyle/>
-          <a:p>
-            <a:pPr algn="ctr" indent="0" marL="0">
-              <a:lnSpc>
-                <a:spcPct val="100000"/>
-              </a:lnSpc>
-              <a:buNone/>
-            </a:pPr>
-            <a:r>
-              <a:rPr lang="en-US" sz="1100" b="1" dirty="0">
-                <a:solidFill>
-                  <a:srgbClr val="FACC15"/>
-                </a:solidFill>
-                <a:latin typeface="Calibri" pitchFamily="34" charset="0"/>
-                <a:ea typeface="Calibri" pitchFamily="34" charset="-122"/>
-                <a:cs typeface="Calibri" pitchFamily="34" charset="-120"/>
-              </a:rPr>
-              <a:t>4  </a:t>
-            </a:r>
-            <a:pPr algn="ctr" indent="0" marL="0">
-              <a:lnSpc>
-                <a:spcPct val="100000"/>
-              </a:lnSpc>
-              <a:buNone/>
-            </a:pPr>
-            <a:r>
-              <a:rPr lang="en-US" sz="900" b="1" dirty="0">
-                <a:solidFill>
-                  <a:srgbClr val="FACC15"/>
-                </a:solidFill>
-                <a:latin typeface="Calibri" pitchFamily="34" charset="0"/>
-                <a:ea typeface="Calibri" pitchFamily="34" charset="-122"/>
-                <a:cs typeface="Calibri" pitchFamily="34" charset="-120"/>
-              </a:rPr>
-              <a:t>DIFFERENTIATION</a:t>
-            </a:r>
-            <a:endParaRPr lang="en-US" sz="1100" dirty="0"/>
-          </a:p>
-        </p:txBody>
-      </p:sp>
-      <p:sp>
-        <p:nvSpPr>
-          <p:cNvPr id="35" name="Text 33"/>
-          <p:cNvSpPr/>
-          <p:nvPr/>
-        </p:nvSpPr>
-        <p:spPr>
-          <a:xfrm>
-            <a:off x="5477256" y="5550408"/>
-            <a:ext cx="1234440" cy="548640"/>
-          </a:xfrm>
-          <a:prstGeom prst="rect">
-            <a:avLst/>
-          </a:prstGeom>
-          <a:noFill/>
-          <a:ln/>
-        </p:spPr>
-        <p:txBody>
-          <a:bodyPr wrap="square" lIns="0" tIns="0" rIns="0" bIns="0" rtlCol="0" anchor="t"/>
-          <a:lstStyle/>
-          <a:p>
-            <a:pPr algn="ctr" indent="0" marL="0">
-              <a:lnSpc>
-                <a:spcPct val="100000"/>
-              </a:lnSpc>
-              <a:buNone/>
-            </a:pPr>
-            <a:r>
-              <a:rPr lang="en-US" sz="850" dirty="0">
-                <a:solidFill>
-                  <a:srgbClr val="FFFFFF"/>
-                </a:solidFill>
-                <a:latin typeface="Calibri" pitchFamily="34" charset="0"/>
-                <a:ea typeface="Calibri" pitchFamily="34" charset="-122"/>
-                <a:cs typeface="Calibri" pitchFamily="34" charset="-120"/>
-              </a:rPr>
-              <a:t>ICS + persistent ID + interop</a:t>
-            </a:r>
-            <a:endParaRPr lang="en-US" sz="850" dirty="0"/>
-          </a:p>
-        </p:txBody>
-      </p:sp>
-      <p:sp>
-        <p:nvSpPr>
-          <p:cNvPr id="36" name="Text 34"/>
-          <p:cNvSpPr/>
-          <p:nvPr/>
-        </p:nvSpPr>
-        <p:spPr>
-          <a:xfrm>
-            <a:off x="6784848" y="4892040"/>
-            <a:ext cx="237744" cy="1325880"/>
-          </a:xfrm>
-          <a:prstGeom prst="rect">
-            <a:avLst/>
-          </a:prstGeom>
-          <a:noFill/>
-          <a:ln/>
-        </p:spPr>
-        <p:txBody>
-          <a:bodyPr wrap="square" lIns="0" tIns="0" rIns="0" bIns="0" rtlCol="0" anchor="ctr"/>
-          <a:lstStyle/>
-          <a:p>
-            <a:pPr algn="ctr" indent="0" marL="0">
-              <a:buNone/>
-            </a:pPr>
-            <a:r>
-              <a:rPr lang="en-US" sz="1200" b="1" dirty="0">
-                <a:solidFill>
-                  <a:srgbClr val="8B5CF6"/>
-                </a:solidFill>
-                <a:latin typeface="Calibri" pitchFamily="34" charset="0"/>
-                <a:ea typeface="Calibri" pitchFamily="34" charset="-122"/>
-                <a:cs typeface="Calibri" pitchFamily="34" charset="-120"/>
-              </a:rPr>
-              <a:t>→</a:t>
-            </a:r>
-            <a:endParaRPr lang="en-US" sz="1200" dirty="0"/>
-          </a:p>
-        </p:txBody>
-      </p:sp>
-      <p:sp>
-        <p:nvSpPr>
-          <p:cNvPr id="37" name="Shape 35"/>
-          <p:cNvSpPr/>
-          <p:nvPr/>
-        </p:nvSpPr>
-        <p:spPr>
-          <a:xfrm>
-            <a:off x="7022592" y="4892040"/>
-            <a:ext cx="1380744" cy="1325880"/>
-          </a:xfrm>
-          <a:prstGeom prst="roundRect">
-            <a:avLst>
-              <a:gd name="adj" fmla="val 3448"/>
-            </a:avLst>
-          </a:prstGeom>
-          <a:solidFill>
-            <a:srgbClr val="281A48"/>
-          </a:solidFill>
-          <a:ln/>
-        </p:spPr>
-      </p:sp>
-      <p:sp>
-        <p:nvSpPr>
-          <p:cNvPr id="38" name="Text 36"/>
-          <p:cNvSpPr/>
-          <p:nvPr/>
-        </p:nvSpPr>
-        <p:spPr>
-          <a:xfrm>
-            <a:off x="7068312" y="5001768"/>
-            <a:ext cx="1289304" cy="502920"/>
-          </a:xfrm>
-          <a:prstGeom prst="rect">
-            <a:avLst/>
-          </a:prstGeom>
-          <a:noFill/>
-          <a:ln/>
-        </p:spPr>
-        <p:txBody>
-          <a:bodyPr wrap="square" lIns="0" tIns="0" rIns="0" bIns="0" rtlCol="0" anchor="t"/>
-          <a:lstStyle/>
-          <a:p>
-            <a:pPr algn="ctr" indent="0" marL="0">
-              <a:lnSpc>
-                <a:spcPct val="100000"/>
-              </a:lnSpc>
-              <a:buNone/>
-            </a:pPr>
-            <a:r>
-              <a:rPr lang="en-US" sz="1100" b="1" dirty="0">
-                <a:solidFill>
-                  <a:srgbClr val="FACC15"/>
-                </a:solidFill>
-                <a:latin typeface="Calibri" pitchFamily="34" charset="0"/>
-                <a:ea typeface="Calibri" pitchFamily="34" charset="-122"/>
-                <a:cs typeface="Calibri" pitchFamily="34" charset="-120"/>
-              </a:rPr>
-              <a:t>5  </a:t>
-            </a:r>
-            <a:pPr algn="ctr" indent="0" marL="0">
-              <a:lnSpc>
-                <a:spcPct val="100000"/>
-              </a:lnSpc>
-              <a:buNone/>
-            </a:pPr>
-            <a:r>
-              <a:rPr lang="en-US" sz="900" b="1" dirty="0">
-                <a:solidFill>
-                  <a:srgbClr val="FACC15"/>
-                </a:solidFill>
-                <a:latin typeface="Calibri" pitchFamily="34" charset="0"/>
-                <a:ea typeface="Calibri" pitchFamily="34" charset="-122"/>
-                <a:cs typeface="Calibri" pitchFamily="34" charset="-120"/>
-              </a:rPr>
-              <a:t>ARCHITECTURE</a:t>
-            </a:r>
-            <a:endParaRPr lang="en-US" sz="1100" dirty="0"/>
-          </a:p>
-        </p:txBody>
-      </p:sp>
-      <p:sp>
-        <p:nvSpPr>
-          <p:cNvPr id="39" name="Text 37"/>
-          <p:cNvSpPr/>
-          <p:nvPr/>
-        </p:nvSpPr>
-        <p:spPr>
-          <a:xfrm>
-            <a:off x="7095744" y="5550408"/>
-            <a:ext cx="1234440" cy="548640"/>
-          </a:xfrm>
-          <a:prstGeom prst="rect">
-            <a:avLst/>
-          </a:prstGeom>
-          <a:noFill/>
-          <a:ln/>
-        </p:spPr>
-        <p:txBody>
-          <a:bodyPr wrap="square" lIns="0" tIns="0" rIns="0" bIns="0" rtlCol="0" anchor="t"/>
-          <a:lstStyle/>
-          <a:p>
-            <a:pPr algn="ctr" indent="0" marL="0">
-              <a:lnSpc>
-                <a:spcPct val="100000"/>
-              </a:lnSpc>
-              <a:buNone/>
-            </a:pPr>
-            <a:r>
-              <a:rPr lang="en-US" sz="850" dirty="0">
-                <a:solidFill>
-                  <a:srgbClr val="FFFFFF"/>
-                </a:solidFill>
-                <a:latin typeface="Calibri" pitchFamily="34" charset="0"/>
-                <a:ea typeface="Calibri" pitchFamily="34" charset="-122"/>
-                <a:cs typeface="Calibri" pitchFamily="34" charset="-120"/>
-              </a:rPr>
-              <a:t>Identity in Databricks / Snowflake</a:t>
-            </a:r>
-            <a:endParaRPr lang="en-US" sz="850" dirty="0"/>
-          </a:p>
-        </p:txBody>
-      </p:sp>
-      <p:sp>
-        <p:nvSpPr>
-          <p:cNvPr id="40" name="Text 38"/>
-          <p:cNvSpPr/>
-          <p:nvPr/>
-        </p:nvSpPr>
-        <p:spPr>
-          <a:xfrm>
-            <a:off x="8403336" y="4892040"/>
-            <a:ext cx="237744" cy="1325880"/>
-          </a:xfrm>
-          <a:prstGeom prst="rect">
-            <a:avLst/>
-          </a:prstGeom>
-          <a:noFill/>
-          <a:ln/>
-        </p:spPr>
-        <p:txBody>
-          <a:bodyPr wrap="square" lIns="0" tIns="0" rIns="0" bIns="0" rtlCol="0" anchor="ctr"/>
-          <a:lstStyle/>
-          <a:p>
-            <a:pPr algn="ctr" indent="0" marL="0">
-              <a:buNone/>
-            </a:pPr>
-            <a:r>
-              <a:rPr lang="en-US" sz="1200" b="1" dirty="0">
-                <a:solidFill>
-                  <a:srgbClr val="8B5CF6"/>
-                </a:solidFill>
-                <a:latin typeface="Calibri" pitchFamily="34" charset="0"/>
-                <a:ea typeface="Calibri" pitchFamily="34" charset="-122"/>
-                <a:cs typeface="Calibri" pitchFamily="34" charset="-120"/>
-              </a:rPr>
-              <a:t>→</a:t>
-            </a:r>
-            <a:endParaRPr lang="en-US" sz="1200" dirty="0"/>
-          </a:p>
-        </p:txBody>
-      </p:sp>
-      <p:sp>
-        <p:nvSpPr>
-          <p:cNvPr id="41" name="Shape 39"/>
-          <p:cNvSpPr/>
-          <p:nvPr/>
-        </p:nvSpPr>
-        <p:spPr>
-          <a:xfrm>
-            <a:off x="8641080" y="4892040"/>
-            <a:ext cx="1380744" cy="1325880"/>
-          </a:xfrm>
-          <a:prstGeom prst="roundRect">
-            <a:avLst>
-              <a:gd name="adj" fmla="val 3448"/>
-            </a:avLst>
-          </a:prstGeom>
-          <a:solidFill>
-            <a:srgbClr val="281A48"/>
-          </a:solidFill>
-          <a:ln/>
-        </p:spPr>
-      </p:sp>
-      <p:sp>
-        <p:nvSpPr>
-          <p:cNvPr id="42" name="Text 40"/>
-          <p:cNvSpPr/>
-          <p:nvPr/>
-        </p:nvSpPr>
-        <p:spPr>
-          <a:xfrm>
-            <a:off x="8686800" y="5001768"/>
-            <a:ext cx="1289304" cy="502920"/>
-          </a:xfrm>
-          <a:prstGeom prst="rect">
-            <a:avLst/>
-          </a:prstGeom>
-          <a:noFill/>
-          <a:ln/>
-        </p:spPr>
-        <p:txBody>
-          <a:bodyPr wrap="square" lIns="0" tIns="0" rIns="0" bIns="0" rtlCol="0" anchor="t"/>
-          <a:lstStyle/>
-          <a:p>
-            <a:pPr algn="ctr" indent="0" marL="0">
-              <a:lnSpc>
-                <a:spcPct val="100000"/>
-              </a:lnSpc>
-              <a:buNone/>
-            </a:pPr>
-            <a:r>
-              <a:rPr lang="en-US" sz="1100" b="1" dirty="0">
-                <a:solidFill>
-                  <a:srgbClr val="FACC15"/>
-                </a:solidFill>
-                <a:latin typeface="Calibri" pitchFamily="34" charset="0"/>
-                <a:ea typeface="Calibri" pitchFamily="34" charset="-122"/>
-                <a:cs typeface="Calibri" pitchFamily="34" charset="-120"/>
-              </a:rPr>
-              <a:t>6  </a:t>
-            </a:r>
-            <a:pPr algn="ctr" indent="0" marL="0">
-              <a:lnSpc>
-                <a:spcPct val="100000"/>
-              </a:lnSpc>
-              <a:buNone/>
-            </a:pPr>
-            <a:r>
-              <a:rPr lang="en-US" sz="900" b="1" dirty="0">
-                <a:solidFill>
-                  <a:srgbClr val="FACC15"/>
-                </a:solidFill>
-                <a:latin typeface="Calibri" pitchFamily="34" charset="0"/>
-                <a:ea typeface="Calibri" pitchFamily="34" charset="-122"/>
-                <a:cs typeface="Calibri" pitchFamily="34" charset="-120"/>
-              </a:rPr>
-              <a:t>PROOF</a:t>
-            </a:r>
-            <a:endParaRPr lang="en-US" sz="1100" dirty="0"/>
-          </a:p>
-        </p:txBody>
-      </p:sp>
-      <p:sp>
-        <p:nvSpPr>
-          <p:cNvPr id="43" name="Text 41"/>
-          <p:cNvSpPr/>
-          <p:nvPr/>
-        </p:nvSpPr>
-        <p:spPr>
-          <a:xfrm>
-            <a:off x="8714232" y="5550408"/>
-            <a:ext cx="1234440" cy="548640"/>
-          </a:xfrm>
-          <a:prstGeom prst="rect">
-            <a:avLst/>
-          </a:prstGeom>
-          <a:noFill/>
-          <a:ln/>
-        </p:spPr>
-        <p:txBody>
-          <a:bodyPr wrap="square" lIns="0" tIns="0" rIns="0" bIns="0" rtlCol="0" anchor="t"/>
-          <a:lstStyle/>
-          <a:p>
-            <a:pPr algn="ctr" indent="0" marL="0">
-              <a:lnSpc>
-                <a:spcPct val="100000"/>
-              </a:lnSpc>
-              <a:buNone/>
-            </a:pPr>
-            <a:r>
-              <a:rPr lang="en-US" sz="850" dirty="0">
-                <a:solidFill>
-                  <a:srgbClr val="FFFFFF"/>
-                </a:solidFill>
-                <a:latin typeface="Calibri" pitchFamily="34" charset="0"/>
-                <a:ea typeface="Calibri" pitchFamily="34" charset="-122"/>
-                <a:cs typeface="Calibri" pitchFamily="34" charset="-120"/>
-              </a:rPr>
-              <a:t>DoorDash / Narrative + demos</a:t>
-            </a:r>
-            <a:endParaRPr lang="en-US" sz="850" dirty="0"/>
-          </a:p>
-        </p:txBody>
-      </p:sp>
-      <p:sp>
-        <p:nvSpPr>
-          <p:cNvPr id="44" name="Text 42"/>
-          <p:cNvSpPr/>
-          <p:nvPr/>
-        </p:nvSpPr>
-        <p:spPr>
-          <a:xfrm>
-            <a:off x="10021824" y="4892040"/>
-            <a:ext cx="237744" cy="1325880"/>
-          </a:xfrm>
-          <a:prstGeom prst="rect">
-            <a:avLst/>
-          </a:prstGeom>
-          <a:noFill/>
-          <a:ln/>
-        </p:spPr>
-        <p:txBody>
-          <a:bodyPr wrap="square" lIns="0" tIns="0" rIns="0" bIns="0" rtlCol="0" anchor="ctr"/>
-          <a:lstStyle/>
-          <a:p>
-            <a:pPr algn="ctr" indent="0" marL="0">
-              <a:buNone/>
-            </a:pPr>
-            <a:r>
-              <a:rPr lang="en-US" sz="1200" b="1" dirty="0">
-                <a:solidFill>
-                  <a:srgbClr val="8B5CF6"/>
-                </a:solidFill>
-                <a:latin typeface="Calibri" pitchFamily="34" charset="0"/>
-                <a:ea typeface="Calibri" pitchFamily="34" charset="-122"/>
-                <a:cs typeface="Calibri" pitchFamily="34" charset="-120"/>
-              </a:rPr>
-              <a:t>→</a:t>
-            </a:r>
-            <a:endParaRPr lang="en-US" sz="1200" dirty="0"/>
-          </a:p>
-        </p:txBody>
-      </p:sp>
-      <p:sp>
-        <p:nvSpPr>
-          <p:cNvPr id="45" name="Shape 43"/>
-          <p:cNvSpPr/>
-          <p:nvPr/>
-        </p:nvSpPr>
-        <p:spPr>
-          <a:xfrm>
-            <a:off x="10259568" y="4892040"/>
-            <a:ext cx="1380744" cy="1325880"/>
-          </a:xfrm>
-          <a:prstGeom prst="roundRect">
-            <a:avLst>
-              <a:gd name="adj" fmla="val 3448"/>
-            </a:avLst>
-          </a:prstGeom>
-          <a:solidFill>
-            <a:srgbClr val="281A48"/>
-          </a:solidFill>
-          <a:ln/>
-        </p:spPr>
-      </p:sp>
-      <p:sp>
-        <p:nvSpPr>
-          <p:cNvPr id="46" name="Text 44"/>
-          <p:cNvSpPr/>
-          <p:nvPr/>
-        </p:nvSpPr>
-        <p:spPr>
-          <a:xfrm>
-            <a:off x="10305288" y="5001768"/>
-            <a:ext cx="1289304" cy="502920"/>
-          </a:xfrm>
-          <a:prstGeom prst="rect">
-            <a:avLst/>
-          </a:prstGeom>
-          <a:noFill/>
-          <a:ln/>
-        </p:spPr>
-        <p:txBody>
-          <a:bodyPr wrap="square" lIns="0" tIns="0" rIns="0" bIns="0" rtlCol="0" anchor="t"/>
-          <a:lstStyle/>
-          <a:p>
-            <a:pPr algn="ctr" indent="0" marL="0">
-              <a:lnSpc>
-                <a:spcPct val="100000"/>
-              </a:lnSpc>
-              <a:buNone/>
-            </a:pPr>
-            <a:r>
-              <a:rPr lang="en-US" sz="1100" b="1" dirty="0">
-                <a:solidFill>
-                  <a:srgbClr val="FACC15"/>
-                </a:solidFill>
-                <a:latin typeface="Calibri" pitchFamily="34" charset="0"/>
-                <a:ea typeface="Calibri" pitchFamily="34" charset="-122"/>
-                <a:cs typeface="Calibri" pitchFamily="34" charset="-120"/>
-              </a:rPr>
-              <a:t>7  </a:t>
-            </a:r>
-            <a:pPr algn="ctr" indent="0" marL="0">
-              <a:lnSpc>
-                <a:spcPct val="100000"/>
-              </a:lnSpc>
-              <a:buNone/>
-            </a:pPr>
-            <a:r>
-              <a:rPr lang="en-US" sz="900" b="1" dirty="0">
-                <a:solidFill>
-                  <a:srgbClr val="FACC15"/>
-                </a:solidFill>
-                <a:latin typeface="Calibri" pitchFamily="34" charset="0"/>
-                <a:ea typeface="Calibri" pitchFamily="34" charset="-122"/>
-                <a:cs typeface="Calibri" pitchFamily="34" charset="-120"/>
-              </a:rPr>
-              <a:t>ACTION</a:t>
-            </a:r>
-            <a:endParaRPr lang="en-US" sz="1100" dirty="0"/>
-          </a:p>
-        </p:txBody>
-      </p:sp>
-      <p:sp>
-        <p:nvSpPr>
-          <p:cNvPr id="47" name="Text 45"/>
-          <p:cNvSpPr/>
-          <p:nvPr/>
-        </p:nvSpPr>
-        <p:spPr>
-          <a:xfrm>
-            <a:off x="10332720" y="5550408"/>
-            <a:ext cx="1234440" cy="548640"/>
-          </a:xfrm>
-          <a:prstGeom prst="rect">
-            <a:avLst/>
-          </a:prstGeom>
-          <a:noFill/>
-          <a:ln/>
-        </p:spPr>
-        <p:txBody>
-          <a:bodyPr wrap="square" lIns="0" tIns="0" rIns="0" bIns="0" rtlCol="0" anchor="t"/>
-          <a:lstStyle/>
-          <a:p>
-            <a:pPr algn="ctr" indent="0" marL="0">
-              <a:lnSpc>
-                <a:spcPct val="100000"/>
-              </a:lnSpc>
-              <a:buNone/>
-            </a:pPr>
-            <a:r>
-              <a:rPr lang="en-US" sz="850" dirty="0">
-                <a:solidFill>
-                  <a:srgbClr val="FFFFFF"/>
-                </a:solidFill>
-                <a:latin typeface="Calibri" pitchFamily="34" charset="0"/>
-                <a:ea typeface="Calibri" pitchFamily="34" charset="-122"/>
-                <a:cs typeface="Calibri" pitchFamily="34" charset="-120"/>
+                  <a:srgbClr val="EADBFF"/>
+                </a:solidFill>
+                <a:latin typeface="Montserrat" pitchFamily="34" charset="0"/>
+                <a:ea typeface="Montserrat" pitchFamily="34" charset="-122"/>
+                <a:cs typeface="Montserrat" pitchFamily="34" charset="-120"/>
               </a:rPr>
               <a:t>See what Conexa can do</a:t>
             </a:r>
@@ -7351,8 +7080,8 @@
         </p:nvSpPr>
         <p:spPr>
           <a:xfrm>
-            <a:off x="548640" y="384048"/>
-            <a:ext cx="11091672" cy="274320"/>
+            <a:off x="548640" y="411480"/>
+            <a:ext cx="11091672" cy="548640"/>
           </a:xfrm>
           <a:prstGeom prst="rect">
             <a:avLst/>
@@ -7368,118 +7097,98 @@
               <a:buNone/>
             </a:pPr>
             <a:r>
-              <a:rPr lang="en-US" sz="1200" b="1" spc="200" kern="0" dirty="0">
-                <a:solidFill>
-                  <a:srgbClr val="8B5CF6"/>
-                </a:solidFill>
-                <a:latin typeface="Calibri" pitchFamily="34" charset="0"/>
-                <a:ea typeface="Calibri" pitchFamily="34" charset="-122"/>
-                <a:cs typeface="Calibri" pitchFamily="34" charset="-120"/>
-              </a:rPr>
-              <a:t>PRIORITY WORKSTREAMS / DECISIONS</a:t>
-            </a:r>
-            <a:endParaRPr lang="en-US" sz="1200" dirty="0"/>
-          </a:p>
-        </p:txBody>
-      </p:sp>
-      <p:sp>
-        <p:nvSpPr>
-          <p:cNvPr id="3" name="Text 1"/>
-          <p:cNvSpPr/>
-          <p:nvPr/>
-        </p:nvSpPr>
-        <p:spPr>
-          <a:xfrm>
-            <a:off x="548640" y="621792"/>
-            <a:ext cx="11091672" cy="640080"/>
-          </a:xfrm>
-          <a:prstGeom prst="rect">
-            <a:avLst/>
-          </a:prstGeom>
-          <a:noFill/>
-          <a:ln/>
-        </p:spPr>
-        <p:txBody>
-          <a:bodyPr wrap="square" rtlCol="0" anchor="ctr"/>
-          <a:lstStyle/>
-          <a:p>
-            <a:pPr algn="l" indent="0" marL="0">
-              <a:buNone/>
-            </a:pPr>
-            <a:r>
-              <a:rPr lang="en-US" sz="3400" b="1" dirty="0">
-                <a:solidFill>
-                  <a:srgbClr val="281A48"/>
-                </a:solidFill>
-                <a:latin typeface="Georgia" pitchFamily="34" charset="0"/>
-                <a:ea typeface="Georgia" pitchFamily="34" charset="-122"/>
-                <a:cs typeface="Georgia" pitchFamily="34" charset="-120"/>
+              <a:rPr lang="en-US" sz="3000" b="1" dirty="0">
+                <a:solidFill>
+                  <a:srgbClr val="461478"/>
+                </a:solidFill>
+                <a:latin typeface="Montserrat" pitchFamily="34" charset="0"/>
+                <a:ea typeface="Montserrat" pitchFamily="34" charset="-122"/>
+                <a:cs typeface="Montserrat" pitchFamily="34" charset="-120"/>
               </a:rPr>
               <a:t>What We Need to Build &amp; Decide</a:t>
             </a:r>
-            <a:endParaRPr lang="en-US" sz="3400" dirty="0"/>
-          </a:p>
-        </p:txBody>
-      </p:sp>
-      <p:sp>
-        <p:nvSpPr>
-          <p:cNvPr id="4" name="Shape 2"/>
-          <p:cNvSpPr/>
-          <p:nvPr/>
-        </p:nvSpPr>
-        <p:spPr>
-          <a:xfrm>
-            <a:off x="548640" y="1554480"/>
+            <a:endParaRPr lang="en-US" sz="3000" dirty="0"/>
+          </a:p>
+        </p:txBody>
+      </p:sp>
+      <p:pic>
+        <p:nvPicPr>
+          <p:cNvPr id="3" name="Image 0" descr="logo_purple.png">    </p:cNvPr>
+          <p:cNvPicPr>
+            <a:picLocks noChangeAspect="1"/>
+          </p:cNvPicPr>
+          <p:nvPr/>
+        </p:nvPicPr>
+        <p:blipFill>
+          <a:blip r:embed="rId1"/>
+          <a:stretch>
+            <a:fillRect/>
+          </a:stretch>
+        </p:blipFill>
+        <p:spPr>
+          <a:xfrm>
+            <a:off x="10680192" y="6400800"/>
+            <a:ext cx="960120" cy="259492"/>
+          </a:xfrm>
+          <a:prstGeom prst="rect">
+            <a:avLst/>
+          </a:prstGeom>
+        </p:spPr>
+      </p:pic>
+      <p:sp>
+        <p:nvSpPr>
+          <p:cNvPr id="4" name="Shape 1"/>
+          <p:cNvSpPr/>
+          <p:nvPr/>
+        </p:nvSpPr>
+        <p:spPr>
+          <a:xfrm>
+            <a:off x="548640" y="1325880"/>
             <a:ext cx="5408676" cy="914400"/>
           </a:xfrm>
           <a:prstGeom prst="roundRect">
             <a:avLst>
-              <a:gd name="adj" fmla="val 7000"/>
+              <a:gd name="adj" fmla="val 8000"/>
             </a:avLst>
           </a:prstGeom>
           <a:solidFill>
-            <a:srgbClr val="F3F0FA"/>
+            <a:srgbClr val="ECE3F4"/>
           </a:solidFill>
-          <a:ln w="12700">
-            <a:solidFill>
-              <a:srgbClr val="C9BCE8"/>
-            </a:solidFill>
-            <a:prstDash val="solid"/>
-          </a:ln>
-        </p:spPr>
-      </p:sp>
-      <p:sp>
-        <p:nvSpPr>
-          <p:cNvPr id="5" name="Shape 3"/>
-          <p:cNvSpPr/>
-          <p:nvPr/>
-        </p:nvSpPr>
-        <p:spPr>
-          <a:xfrm>
-            <a:off x="777240" y="1760220"/>
-            <a:ext cx="502920" cy="502920"/>
+          <a:ln/>
+        </p:spPr>
+      </p:sp>
+      <p:sp>
+        <p:nvSpPr>
+          <p:cNvPr id="5" name="Shape 2"/>
+          <p:cNvSpPr/>
+          <p:nvPr/>
+        </p:nvSpPr>
+        <p:spPr>
+          <a:xfrm>
+            <a:off x="777240" y="1508760"/>
+            <a:ext cx="548640" cy="548640"/>
           </a:xfrm>
           <a:prstGeom prst="roundRect">
             <a:avLst>
-              <a:gd name="adj" fmla="val 12727"/>
+              <a:gd name="adj" fmla="val 13333"/>
             </a:avLst>
           </a:prstGeom>
           <a:solidFill>
-            <a:srgbClr val="4A3580"/>
+            <a:srgbClr val="461478"/>
           </a:solidFill>
           <a:ln/>
         </p:spPr>
       </p:sp>
       <p:sp>
         <p:nvSpPr>
-          <p:cNvPr id="6" name="Text 4"/>
-          <p:cNvSpPr/>
-          <p:nvPr/>
-        </p:nvSpPr>
-        <p:spPr>
-          <a:xfrm>
-            <a:off x="777240" y="1760220"/>
-            <a:ext cx="502920" cy="502920"/>
+          <p:cNvPr id="6" name="Text 3"/>
+          <p:cNvSpPr/>
+          <p:nvPr/>
+        </p:nvSpPr>
+        <p:spPr>
+          <a:xfrm>
+            <a:off x="777240" y="1508760"/>
+            <a:ext cx="548640" cy="548640"/>
           </a:xfrm>
           <a:prstGeom prst="rect">
             <a:avLst/>
@@ -7495,30 +7204,30 @@
               <a:buNone/>
             </a:pPr>
             <a:r>
-              <a:rPr lang="en-US" sz="1800" b="1" dirty="0">
+              <a:rPr lang="en-US" sz="2000" b="1" dirty="0">
                 <a:solidFill>
                   <a:srgbClr val="FFFFFF"/>
                 </a:solidFill>
-                <a:latin typeface="Georgia" pitchFamily="34" charset="0"/>
-                <a:ea typeface="Georgia" pitchFamily="34" charset="-122"/>
-                <a:cs typeface="Georgia" pitchFamily="34" charset="-120"/>
+                <a:latin typeface="Montserrat" pitchFamily="34" charset="0"/>
+                <a:ea typeface="Montserrat" pitchFamily="34" charset="-122"/>
+                <a:cs typeface="Montserrat" pitchFamily="34" charset="-120"/>
               </a:rPr>
               <a:t>1</a:t>
             </a:r>
-            <a:endParaRPr lang="en-US" sz="1800" dirty="0"/>
-          </a:p>
-        </p:txBody>
-      </p:sp>
-      <p:sp>
-        <p:nvSpPr>
-          <p:cNvPr id="7" name="Text 5"/>
-          <p:cNvSpPr/>
-          <p:nvPr/>
-        </p:nvSpPr>
-        <p:spPr>
-          <a:xfrm>
-            <a:off x="1463040" y="1554480"/>
-            <a:ext cx="4265676" cy="914400"/>
+            <a:endParaRPr lang="en-US" sz="2000" dirty="0"/>
+          </a:p>
+        </p:txBody>
+      </p:sp>
+      <p:sp>
+        <p:nvSpPr>
+          <p:cNvPr id="7" name="Text 4"/>
+          <p:cNvSpPr/>
+          <p:nvPr/>
+        </p:nvSpPr>
+        <p:spPr>
+          <a:xfrm>
+            <a:off x="1508760" y="1325880"/>
+            <a:ext cx="4219956" cy="914400"/>
           </a:xfrm>
           <a:prstGeom prst="rect">
             <a:avLst/>
@@ -7536,11 +7245,11 @@
             <a:r>
               <a:rPr lang="en-US" sz="1500" b="1" dirty="0">
                 <a:solidFill>
-                  <a:srgbClr val="1E1338"/>
-                </a:solidFill>
-                <a:latin typeface="Calibri" pitchFamily="34" charset="0"/>
-                <a:ea typeface="Calibri" pitchFamily="34" charset="-122"/>
-                <a:cs typeface="Calibri" pitchFamily="34" charset="-120"/>
+                  <a:srgbClr val="461478"/>
+                </a:solidFill>
+                <a:latin typeface="Montserrat" pitchFamily="34" charset="0"/>
+                <a:ea typeface="Montserrat" pitchFamily="34" charset="-122"/>
+                <a:cs typeface="Montserrat" pitchFamily="34" charset="-120"/>
               </a:rPr>
               <a:t>Finalize ICS story</a:t>
             </a:r>
@@ -7550,63 +7259,58 @@
       </p:sp>
       <p:sp>
         <p:nvSpPr>
-          <p:cNvPr id="8" name="Shape 6"/>
-          <p:cNvSpPr/>
-          <p:nvPr/>
-        </p:nvSpPr>
-        <p:spPr>
-          <a:xfrm>
-            <a:off x="6231636" y="1554480"/>
+          <p:cNvPr id="8" name="Shape 5"/>
+          <p:cNvSpPr/>
+          <p:nvPr/>
+        </p:nvSpPr>
+        <p:spPr>
+          <a:xfrm>
+            <a:off x="6231636" y="1325880"/>
             <a:ext cx="5408676" cy="914400"/>
           </a:xfrm>
           <a:prstGeom prst="roundRect">
             <a:avLst>
-              <a:gd name="adj" fmla="val 7000"/>
+              <a:gd name="adj" fmla="val 8000"/>
             </a:avLst>
           </a:prstGeom>
           <a:solidFill>
-            <a:srgbClr val="F3F0FA"/>
+            <a:srgbClr val="ECE3F4"/>
           </a:solidFill>
-          <a:ln w="12700">
-            <a:solidFill>
-              <a:srgbClr val="C9BCE8"/>
-            </a:solidFill>
-            <a:prstDash val="solid"/>
-          </a:ln>
-        </p:spPr>
-      </p:sp>
-      <p:sp>
-        <p:nvSpPr>
-          <p:cNvPr id="9" name="Shape 7"/>
-          <p:cNvSpPr/>
-          <p:nvPr/>
-        </p:nvSpPr>
-        <p:spPr>
-          <a:xfrm>
-            <a:off x="6460236" y="1760220"/>
-            <a:ext cx="502920" cy="502920"/>
+          <a:ln/>
+        </p:spPr>
+      </p:sp>
+      <p:sp>
+        <p:nvSpPr>
+          <p:cNvPr id="9" name="Shape 6"/>
+          <p:cNvSpPr/>
+          <p:nvPr/>
+        </p:nvSpPr>
+        <p:spPr>
+          <a:xfrm>
+            <a:off x="6460236" y="1508760"/>
+            <a:ext cx="548640" cy="548640"/>
           </a:xfrm>
           <a:prstGeom prst="roundRect">
             <a:avLst>
-              <a:gd name="adj" fmla="val 12727"/>
+              <a:gd name="adj" fmla="val 13333"/>
             </a:avLst>
           </a:prstGeom>
           <a:solidFill>
-            <a:srgbClr val="4A3580"/>
+            <a:srgbClr val="461478"/>
           </a:solidFill>
           <a:ln/>
         </p:spPr>
       </p:sp>
       <p:sp>
         <p:nvSpPr>
-          <p:cNvPr id="10" name="Text 8"/>
-          <p:cNvSpPr/>
-          <p:nvPr/>
-        </p:nvSpPr>
-        <p:spPr>
-          <a:xfrm>
-            <a:off x="6460236" y="1760220"/>
-            <a:ext cx="502920" cy="502920"/>
+          <p:cNvPr id="10" name="Text 7"/>
+          <p:cNvSpPr/>
+          <p:nvPr/>
+        </p:nvSpPr>
+        <p:spPr>
+          <a:xfrm>
+            <a:off x="6460236" y="1508760"/>
+            <a:ext cx="548640" cy="548640"/>
           </a:xfrm>
           <a:prstGeom prst="rect">
             <a:avLst/>
@@ -7622,30 +7326,30 @@
               <a:buNone/>
             </a:pPr>
             <a:r>
-              <a:rPr lang="en-US" sz="1800" b="1" dirty="0">
+              <a:rPr lang="en-US" sz="2000" b="1" dirty="0">
                 <a:solidFill>
                   <a:srgbClr val="FFFFFF"/>
                 </a:solidFill>
-                <a:latin typeface="Georgia" pitchFamily="34" charset="0"/>
-                <a:ea typeface="Georgia" pitchFamily="34" charset="-122"/>
-                <a:cs typeface="Georgia" pitchFamily="34" charset="-120"/>
+                <a:latin typeface="Montserrat" pitchFamily="34" charset="0"/>
+                <a:ea typeface="Montserrat" pitchFamily="34" charset="-122"/>
+                <a:cs typeface="Montserrat" pitchFamily="34" charset="-120"/>
               </a:rPr>
               <a:t>2</a:t>
             </a:r>
-            <a:endParaRPr lang="en-US" sz="1800" dirty="0"/>
-          </a:p>
-        </p:txBody>
-      </p:sp>
-      <p:sp>
-        <p:nvSpPr>
-          <p:cNvPr id="11" name="Text 9"/>
-          <p:cNvSpPr/>
-          <p:nvPr/>
-        </p:nvSpPr>
-        <p:spPr>
-          <a:xfrm>
-            <a:off x="7146036" y="1554480"/>
-            <a:ext cx="4265676" cy="914400"/>
+            <a:endParaRPr lang="en-US" sz="2000" dirty="0"/>
+          </a:p>
+        </p:txBody>
+      </p:sp>
+      <p:sp>
+        <p:nvSpPr>
+          <p:cNvPr id="11" name="Text 8"/>
+          <p:cNvSpPr/>
+          <p:nvPr/>
+        </p:nvSpPr>
+        <p:spPr>
+          <a:xfrm>
+            <a:off x="7191756" y="1325880"/>
+            <a:ext cx="4219956" cy="914400"/>
           </a:xfrm>
           <a:prstGeom prst="rect">
             <a:avLst/>
@@ -7663,11 +7367,11 @@
             <a:r>
               <a:rPr lang="en-US" sz="1500" b="1" dirty="0">
                 <a:solidFill>
-                  <a:srgbClr val="1E1338"/>
-                </a:solidFill>
-                <a:latin typeface="Calibri" pitchFamily="34" charset="0"/>
-                <a:ea typeface="Calibri" pitchFamily="34" charset="-122"/>
-                <a:cs typeface="Calibri" pitchFamily="34" charset="-120"/>
+                  <a:srgbClr val="461478"/>
+                </a:solidFill>
+                <a:latin typeface="Montserrat" pitchFamily="34" charset="0"/>
+                <a:ea typeface="Montserrat" pitchFamily="34" charset="-122"/>
+                <a:cs typeface="Montserrat" pitchFamily="34" charset="-120"/>
               </a:rPr>
               <a:t>Rename / position ID Translator</a:t>
             </a:r>
@@ -7677,63 +7381,58 @@
       </p:sp>
       <p:sp>
         <p:nvSpPr>
-          <p:cNvPr id="12" name="Shape 10"/>
-          <p:cNvSpPr/>
-          <p:nvPr/>
-        </p:nvSpPr>
-        <p:spPr>
-          <a:xfrm>
-            <a:off x="548640" y="2724912"/>
+          <p:cNvPr id="12" name="Shape 9"/>
+          <p:cNvSpPr/>
+          <p:nvPr/>
+        </p:nvSpPr>
+        <p:spPr>
+          <a:xfrm>
+            <a:off x="548640" y="2514600"/>
             <a:ext cx="5408676" cy="914400"/>
           </a:xfrm>
           <a:prstGeom prst="roundRect">
             <a:avLst>
-              <a:gd name="adj" fmla="val 7000"/>
+              <a:gd name="adj" fmla="val 8000"/>
             </a:avLst>
           </a:prstGeom>
           <a:solidFill>
-            <a:srgbClr val="F3F0FA"/>
+            <a:srgbClr val="ECE3F4"/>
           </a:solidFill>
-          <a:ln w="12700">
-            <a:solidFill>
-              <a:srgbClr val="C9BCE8"/>
-            </a:solidFill>
-            <a:prstDash val="solid"/>
-          </a:ln>
-        </p:spPr>
-      </p:sp>
-      <p:sp>
-        <p:nvSpPr>
-          <p:cNvPr id="13" name="Shape 11"/>
-          <p:cNvSpPr/>
-          <p:nvPr/>
-        </p:nvSpPr>
-        <p:spPr>
-          <a:xfrm>
-            <a:off x="777240" y="2930652"/>
-            <a:ext cx="502920" cy="502920"/>
+          <a:ln/>
+        </p:spPr>
+      </p:sp>
+      <p:sp>
+        <p:nvSpPr>
+          <p:cNvPr id="13" name="Shape 10"/>
+          <p:cNvSpPr/>
+          <p:nvPr/>
+        </p:nvSpPr>
+        <p:spPr>
+          <a:xfrm>
+            <a:off x="777240" y="2697480"/>
+            <a:ext cx="548640" cy="548640"/>
           </a:xfrm>
           <a:prstGeom prst="roundRect">
             <a:avLst>
-              <a:gd name="adj" fmla="val 12727"/>
+              <a:gd name="adj" fmla="val 13333"/>
             </a:avLst>
           </a:prstGeom>
           <a:solidFill>
-            <a:srgbClr val="4A3580"/>
+            <a:srgbClr val="461478"/>
           </a:solidFill>
           <a:ln/>
         </p:spPr>
       </p:sp>
       <p:sp>
         <p:nvSpPr>
-          <p:cNvPr id="14" name="Text 12"/>
-          <p:cNvSpPr/>
-          <p:nvPr/>
-        </p:nvSpPr>
-        <p:spPr>
-          <a:xfrm>
-            <a:off x="777240" y="2930652"/>
-            <a:ext cx="502920" cy="502920"/>
+          <p:cNvPr id="14" name="Text 11"/>
+          <p:cNvSpPr/>
+          <p:nvPr/>
+        </p:nvSpPr>
+        <p:spPr>
+          <a:xfrm>
+            <a:off x="777240" y="2697480"/>
+            <a:ext cx="548640" cy="548640"/>
           </a:xfrm>
           <a:prstGeom prst="rect">
             <a:avLst/>
@@ -7749,30 +7448,30 @@
               <a:buNone/>
             </a:pPr>
             <a:r>
-              <a:rPr lang="en-US" sz="1800" b="1" dirty="0">
+              <a:rPr lang="en-US" sz="2000" b="1" dirty="0">
                 <a:solidFill>
                   <a:srgbClr val="FFFFFF"/>
                 </a:solidFill>
-                <a:latin typeface="Georgia" pitchFamily="34" charset="0"/>
-                <a:ea typeface="Georgia" pitchFamily="34" charset="-122"/>
-                <a:cs typeface="Georgia" pitchFamily="34" charset="-120"/>
+                <a:latin typeface="Montserrat" pitchFamily="34" charset="0"/>
+                <a:ea typeface="Montserrat" pitchFamily="34" charset="-122"/>
+                <a:cs typeface="Montserrat" pitchFamily="34" charset="-120"/>
               </a:rPr>
               <a:t>3</a:t>
             </a:r>
-            <a:endParaRPr lang="en-US" sz="1800" dirty="0"/>
-          </a:p>
-        </p:txBody>
-      </p:sp>
-      <p:sp>
-        <p:nvSpPr>
-          <p:cNvPr id="15" name="Text 13"/>
-          <p:cNvSpPr/>
-          <p:nvPr/>
-        </p:nvSpPr>
-        <p:spPr>
-          <a:xfrm>
-            <a:off x="1463040" y="2724912"/>
-            <a:ext cx="4265676" cy="914400"/>
+            <a:endParaRPr lang="en-US" sz="2000" dirty="0"/>
+          </a:p>
+        </p:txBody>
+      </p:sp>
+      <p:sp>
+        <p:nvSpPr>
+          <p:cNvPr id="15" name="Text 12"/>
+          <p:cNvSpPr/>
+          <p:nvPr/>
+        </p:nvSpPr>
+        <p:spPr>
+          <a:xfrm>
+            <a:off x="1508760" y="2514600"/>
+            <a:ext cx="4219956" cy="914400"/>
           </a:xfrm>
           <a:prstGeom prst="rect">
             <a:avLst/>
@@ -7790,11 +7489,11 @@
             <a:r>
               <a:rPr lang="en-US" sz="1500" b="1" dirty="0">
                 <a:solidFill>
-                  <a:srgbClr val="1E1338"/>
-                </a:solidFill>
-                <a:latin typeface="Calibri" pitchFamily="34" charset="0"/>
-                <a:ea typeface="Calibri" pitchFamily="34" charset="-122"/>
-                <a:cs typeface="Calibri" pitchFamily="34" charset="-120"/>
+                  <a:srgbClr val="461478"/>
+                </a:solidFill>
+                <a:latin typeface="Montserrat" pitchFamily="34" charset="0"/>
+                <a:ea typeface="Montserrat" pitchFamily="34" charset="-122"/>
+                <a:cs typeface="Montserrat" pitchFamily="34" charset="-120"/>
               </a:rPr>
               <a:t>Build Databricks demo</a:t>
             </a:r>
@@ -7804,63 +7503,58 @@
       </p:sp>
       <p:sp>
         <p:nvSpPr>
-          <p:cNvPr id="16" name="Shape 14"/>
-          <p:cNvSpPr/>
-          <p:nvPr/>
-        </p:nvSpPr>
-        <p:spPr>
-          <a:xfrm>
-            <a:off x="6231636" y="2724912"/>
+          <p:cNvPr id="16" name="Shape 13"/>
+          <p:cNvSpPr/>
+          <p:nvPr/>
+        </p:nvSpPr>
+        <p:spPr>
+          <a:xfrm>
+            <a:off x="6231636" y="2514600"/>
             <a:ext cx="5408676" cy="914400"/>
           </a:xfrm>
           <a:prstGeom prst="roundRect">
             <a:avLst>
-              <a:gd name="adj" fmla="val 7000"/>
+              <a:gd name="adj" fmla="val 8000"/>
             </a:avLst>
           </a:prstGeom>
           <a:solidFill>
-            <a:srgbClr val="F3F0FA"/>
+            <a:srgbClr val="ECE3F4"/>
           </a:solidFill>
-          <a:ln w="12700">
-            <a:solidFill>
-              <a:srgbClr val="C9BCE8"/>
-            </a:solidFill>
-            <a:prstDash val="solid"/>
-          </a:ln>
-        </p:spPr>
-      </p:sp>
-      <p:sp>
-        <p:nvSpPr>
-          <p:cNvPr id="17" name="Shape 15"/>
-          <p:cNvSpPr/>
-          <p:nvPr/>
-        </p:nvSpPr>
-        <p:spPr>
-          <a:xfrm>
-            <a:off x="6460236" y="2930652"/>
-            <a:ext cx="502920" cy="502920"/>
+          <a:ln/>
+        </p:spPr>
+      </p:sp>
+      <p:sp>
+        <p:nvSpPr>
+          <p:cNvPr id="17" name="Shape 14"/>
+          <p:cNvSpPr/>
+          <p:nvPr/>
+        </p:nvSpPr>
+        <p:spPr>
+          <a:xfrm>
+            <a:off x="6460236" y="2697480"/>
+            <a:ext cx="548640" cy="548640"/>
           </a:xfrm>
           <a:prstGeom prst="roundRect">
             <a:avLst>
-              <a:gd name="adj" fmla="val 12727"/>
+              <a:gd name="adj" fmla="val 13333"/>
             </a:avLst>
           </a:prstGeom>
           <a:solidFill>
-            <a:srgbClr val="4A3580"/>
+            <a:srgbClr val="461478"/>
           </a:solidFill>
           <a:ln/>
         </p:spPr>
       </p:sp>
       <p:sp>
         <p:nvSpPr>
-          <p:cNvPr id="18" name="Text 16"/>
-          <p:cNvSpPr/>
-          <p:nvPr/>
-        </p:nvSpPr>
-        <p:spPr>
-          <a:xfrm>
-            <a:off x="6460236" y="2930652"/>
-            <a:ext cx="502920" cy="502920"/>
+          <p:cNvPr id="18" name="Text 15"/>
+          <p:cNvSpPr/>
+          <p:nvPr/>
+        </p:nvSpPr>
+        <p:spPr>
+          <a:xfrm>
+            <a:off x="6460236" y="2697480"/>
+            <a:ext cx="548640" cy="548640"/>
           </a:xfrm>
           <a:prstGeom prst="rect">
             <a:avLst/>
@@ -7876,30 +7570,30 @@
               <a:buNone/>
             </a:pPr>
             <a:r>
-              <a:rPr lang="en-US" sz="1800" b="1" dirty="0">
+              <a:rPr lang="en-US" sz="2000" b="1" dirty="0">
                 <a:solidFill>
                   <a:srgbClr val="FFFFFF"/>
                 </a:solidFill>
-                <a:latin typeface="Georgia" pitchFamily="34" charset="0"/>
-                <a:ea typeface="Georgia" pitchFamily="34" charset="-122"/>
-                <a:cs typeface="Georgia" pitchFamily="34" charset="-120"/>
+                <a:latin typeface="Montserrat" pitchFamily="34" charset="0"/>
+                <a:ea typeface="Montserrat" pitchFamily="34" charset="-122"/>
+                <a:cs typeface="Montserrat" pitchFamily="34" charset="-120"/>
               </a:rPr>
               <a:t>4</a:t>
             </a:r>
-            <a:endParaRPr lang="en-US" sz="1800" dirty="0"/>
-          </a:p>
-        </p:txBody>
-      </p:sp>
-      <p:sp>
-        <p:nvSpPr>
-          <p:cNvPr id="19" name="Text 17"/>
-          <p:cNvSpPr/>
-          <p:nvPr/>
-        </p:nvSpPr>
-        <p:spPr>
-          <a:xfrm>
-            <a:off x="7146036" y="2724912"/>
-            <a:ext cx="4265676" cy="914400"/>
+            <a:endParaRPr lang="en-US" sz="2000" dirty="0"/>
+          </a:p>
+        </p:txBody>
+      </p:sp>
+      <p:sp>
+        <p:nvSpPr>
+          <p:cNvPr id="19" name="Text 16"/>
+          <p:cNvSpPr/>
+          <p:nvPr/>
+        </p:nvSpPr>
+        <p:spPr>
+          <a:xfrm>
+            <a:off x="7191756" y="2514600"/>
+            <a:ext cx="4219956" cy="914400"/>
           </a:xfrm>
           <a:prstGeom prst="rect">
             <a:avLst/>
@@ -7917,11 +7611,11 @@
             <a:r>
               <a:rPr lang="en-US" sz="1500" b="1" dirty="0">
                 <a:solidFill>
-                  <a:srgbClr val="1E1338"/>
-                </a:solidFill>
-                <a:latin typeface="Calibri" pitchFamily="34" charset="0"/>
-                <a:ea typeface="Calibri" pitchFamily="34" charset="-122"/>
-                <a:cs typeface="Calibri" pitchFamily="34" charset="-120"/>
+                  <a:srgbClr val="461478"/>
+                </a:solidFill>
+                <a:latin typeface="Montserrat" pitchFamily="34" charset="0"/>
+                <a:ea typeface="Montserrat" pitchFamily="34" charset="-122"/>
+                <a:cs typeface="Montserrat" pitchFamily="34" charset="-120"/>
               </a:rPr>
               <a:t>Confirm Snowflake partner path</a:t>
             </a:r>
@@ -7931,63 +7625,58 @@
       </p:sp>
       <p:sp>
         <p:nvSpPr>
-          <p:cNvPr id="20" name="Shape 18"/>
-          <p:cNvSpPr/>
-          <p:nvPr/>
-        </p:nvSpPr>
-        <p:spPr>
-          <a:xfrm>
-            <a:off x="548640" y="3895344"/>
+          <p:cNvPr id="20" name="Shape 17"/>
+          <p:cNvSpPr/>
+          <p:nvPr/>
+        </p:nvSpPr>
+        <p:spPr>
+          <a:xfrm>
+            <a:off x="548640" y="3703320"/>
             <a:ext cx="5408676" cy="914400"/>
           </a:xfrm>
           <a:prstGeom prst="roundRect">
             <a:avLst>
-              <a:gd name="adj" fmla="val 7000"/>
+              <a:gd name="adj" fmla="val 8000"/>
             </a:avLst>
           </a:prstGeom>
           <a:solidFill>
-            <a:srgbClr val="F3F0FA"/>
+            <a:srgbClr val="ECE3F4"/>
           </a:solidFill>
-          <a:ln w="12700">
-            <a:solidFill>
-              <a:srgbClr val="C9BCE8"/>
-            </a:solidFill>
-            <a:prstDash val="solid"/>
-          </a:ln>
-        </p:spPr>
-      </p:sp>
-      <p:sp>
-        <p:nvSpPr>
-          <p:cNvPr id="21" name="Shape 19"/>
-          <p:cNvSpPr/>
-          <p:nvPr/>
-        </p:nvSpPr>
-        <p:spPr>
-          <a:xfrm>
-            <a:off x="777240" y="4101084"/>
-            <a:ext cx="502920" cy="502920"/>
+          <a:ln/>
+        </p:spPr>
+      </p:sp>
+      <p:sp>
+        <p:nvSpPr>
+          <p:cNvPr id="21" name="Shape 18"/>
+          <p:cNvSpPr/>
+          <p:nvPr/>
+        </p:nvSpPr>
+        <p:spPr>
+          <a:xfrm>
+            <a:off x="777240" y="3886200"/>
+            <a:ext cx="548640" cy="548640"/>
           </a:xfrm>
           <a:prstGeom prst="roundRect">
             <a:avLst>
-              <a:gd name="adj" fmla="val 12727"/>
+              <a:gd name="adj" fmla="val 13333"/>
             </a:avLst>
           </a:prstGeom>
           <a:solidFill>
-            <a:srgbClr val="4A3580"/>
+            <a:srgbClr val="461478"/>
           </a:solidFill>
           <a:ln/>
         </p:spPr>
       </p:sp>
       <p:sp>
         <p:nvSpPr>
-          <p:cNvPr id="22" name="Text 20"/>
-          <p:cNvSpPr/>
-          <p:nvPr/>
-        </p:nvSpPr>
-        <p:spPr>
-          <a:xfrm>
-            <a:off x="777240" y="4101084"/>
-            <a:ext cx="502920" cy="502920"/>
+          <p:cNvPr id="22" name="Text 19"/>
+          <p:cNvSpPr/>
+          <p:nvPr/>
+        </p:nvSpPr>
+        <p:spPr>
+          <a:xfrm>
+            <a:off x="777240" y="3886200"/>
+            <a:ext cx="548640" cy="548640"/>
           </a:xfrm>
           <a:prstGeom prst="rect">
             <a:avLst/>
@@ -8003,30 +7692,30 @@
               <a:buNone/>
             </a:pPr>
             <a:r>
-              <a:rPr lang="en-US" sz="1800" b="1" dirty="0">
+              <a:rPr lang="en-US" sz="2000" b="1" dirty="0">
                 <a:solidFill>
                   <a:srgbClr val="FFFFFF"/>
                 </a:solidFill>
-                <a:latin typeface="Georgia" pitchFamily="34" charset="0"/>
-                <a:ea typeface="Georgia" pitchFamily="34" charset="-122"/>
-                <a:cs typeface="Georgia" pitchFamily="34" charset="-120"/>
+                <a:latin typeface="Montserrat" pitchFamily="34" charset="0"/>
+                <a:ea typeface="Montserrat" pitchFamily="34" charset="-122"/>
+                <a:cs typeface="Montserrat" pitchFamily="34" charset="-120"/>
               </a:rPr>
               <a:t>5</a:t>
             </a:r>
-            <a:endParaRPr lang="en-US" sz="1800" dirty="0"/>
-          </a:p>
-        </p:txBody>
-      </p:sp>
-      <p:sp>
-        <p:nvSpPr>
-          <p:cNvPr id="23" name="Text 21"/>
-          <p:cNvSpPr/>
-          <p:nvPr/>
-        </p:nvSpPr>
-        <p:spPr>
-          <a:xfrm>
-            <a:off x="1463040" y="3895344"/>
-            <a:ext cx="4265676" cy="914400"/>
+            <a:endParaRPr lang="en-US" sz="2000" dirty="0"/>
+          </a:p>
+        </p:txBody>
+      </p:sp>
+      <p:sp>
+        <p:nvSpPr>
+          <p:cNvPr id="23" name="Text 20"/>
+          <p:cNvSpPr/>
+          <p:nvPr/>
+        </p:nvSpPr>
+        <p:spPr>
+          <a:xfrm>
+            <a:off x="1508760" y="3703320"/>
+            <a:ext cx="4219956" cy="914400"/>
           </a:xfrm>
           <a:prstGeom prst="rect">
             <a:avLst/>
@@ -8044,11 +7733,11 @@
             <a:r>
               <a:rPr lang="en-US" sz="1500" b="1" dirty="0">
                 <a:solidFill>
-                  <a:srgbClr val="1E1338"/>
-                </a:solidFill>
-                <a:latin typeface="Calibri" pitchFamily="34" charset="0"/>
-                <a:ea typeface="Calibri" pitchFamily="34" charset="-122"/>
-                <a:cs typeface="Calibri" pitchFamily="34" charset="-120"/>
+                  <a:srgbClr val="461478"/>
+                </a:solidFill>
+                <a:latin typeface="Montserrat" pitchFamily="34" charset="0"/>
+                <a:ea typeface="Montserrat" pitchFamily="34" charset="-122"/>
+                <a:cs typeface="Montserrat" pitchFamily="34" charset="-120"/>
               </a:rPr>
               <a:t>Decide DoorDash / Narrative announcement timing</a:t>
             </a:r>
@@ -8058,63 +7747,58 @@
       </p:sp>
       <p:sp>
         <p:nvSpPr>
-          <p:cNvPr id="24" name="Shape 22"/>
-          <p:cNvSpPr/>
-          <p:nvPr/>
-        </p:nvSpPr>
-        <p:spPr>
-          <a:xfrm>
-            <a:off x="6231636" y="3895344"/>
+          <p:cNvPr id="24" name="Shape 21"/>
+          <p:cNvSpPr/>
+          <p:nvPr/>
+        </p:nvSpPr>
+        <p:spPr>
+          <a:xfrm>
+            <a:off x="6231636" y="3703320"/>
             <a:ext cx="5408676" cy="914400"/>
           </a:xfrm>
           <a:prstGeom prst="roundRect">
             <a:avLst>
-              <a:gd name="adj" fmla="val 7000"/>
+              <a:gd name="adj" fmla="val 8000"/>
             </a:avLst>
           </a:prstGeom>
           <a:solidFill>
-            <a:srgbClr val="F3F0FA"/>
+            <a:srgbClr val="ECE3F4"/>
           </a:solidFill>
-          <a:ln w="12700">
-            <a:solidFill>
-              <a:srgbClr val="C9BCE8"/>
-            </a:solidFill>
-            <a:prstDash val="solid"/>
-          </a:ln>
-        </p:spPr>
-      </p:sp>
-      <p:sp>
-        <p:nvSpPr>
-          <p:cNvPr id="25" name="Shape 23"/>
-          <p:cNvSpPr/>
-          <p:nvPr/>
-        </p:nvSpPr>
-        <p:spPr>
-          <a:xfrm>
-            <a:off x="6460236" y="4101084"/>
-            <a:ext cx="502920" cy="502920"/>
+          <a:ln/>
+        </p:spPr>
+      </p:sp>
+      <p:sp>
+        <p:nvSpPr>
+          <p:cNvPr id="25" name="Shape 22"/>
+          <p:cNvSpPr/>
+          <p:nvPr/>
+        </p:nvSpPr>
+        <p:spPr>
+          <a:xfrm>
+            <a:off x="6460236" y="3886200"/>
+            <a:ext cx="548640" cy="548640"/>
           </a:xfrm>
           <a:prstGeom prst="roundRect">
             <a:avLst>
-              <a:gd name="adj" fmla="val 12727"/>
+              <a:gd name="adj" fmla="val 13333"/>
             </a:avLst>
           </a:prstGeom>
           <a:solidFill>
-            <a:srgbClr val="4A3580"/>
+            <a:srgbClr val="461478"/>
           </a:solidFill>
           <a:ln/>
         </p:spPr>
       </p:sp>
       <p:sp>
         <p:nvSpPr>
-          <p:cNvPr id="26" name="Text 24"/>
-          <p:cNvSpPr/>
-          <p:nvPr/>
-        </p:nvSpPr>
-        <p:spPr>
-          <a:xfrm>
-            <a:off x="6460236" y="4101084"/>
-            <a:ext cx="502920" cy="502920"/>
+          <p:cNvPr id="26" name="Text 23"/>
+          <p:cNvSpPr/>
+          <p:nvPr/>
+        </p:nvSpPr>
+        <p:spPr>
+          <a:xfrm>
+            <a:off x="6460236" y="3886200"/>
+            <a:ext cx="548640" cy="548640"/>
           </a:xfrm>
           <a:prstGeom prst="rect">
             <a:avLst/>
@@ -8130,30 +7814,30 @@
               <a:buNone/>
             </a:pPr>
             <a:r>
-              <a:rPr lang="en-US" sz="1800" b="1" dirty="0">
+              <a:rPr lang="en-US" sz="2000" b="1" dirty="0">
                 <a:solidFill>
                   <a:srgbClr val="FFFFFF"/>
                 </a:solidFill>
-                <a:latin typeface="Georgia" pitchFamily="34" charset="0"/>
-                <a:ea typeface="Georgia" pitchFamily="34" charset="-122"/>
-                <a:cs typeface="Georgia" pitchFamily="34" charset="-120"/>
+                <a:latin typeface="Montserrat" pitchFamily="34" charset="0"/>
+                <a:ea typeface="Montserrat" pitchFamily="34" charset="-122"/>
+                <a:cs typeface="Montserrat" pitchFamily="34" charset="-120"/>
               </a:rPr>
               <a:t>6</a:t>
             </a:r>
-            <a:endParaRPr lang="en-US" sz="1800" dirty="0"/>
-          </a:p>
-        </p:txBody>
-      </p:sp>
-      <p:sp>
-        <p:nvSpPr>
-          <p:cNvPr id="27" name="Text 25"/>
-          <p:cNvSpPr/>
-          <p:nvPr/>
-        </p:nvSpPr>
-        <p:spPr>
-          <a:xfrm>
-            <a:off x="7146036" y="3895344"/>
-            <a:ext cx="4265676" cy="914400"/>
+            <a:endParaRPr lang="en-US" sz="2000" dirty="0"/>
+          </a:p>
+        </p:txBody>
+      </p:sp>
+      <p:sp>
+        <p:nvSpPr>
+          <p:cNvPr id="27" name="Text 24"/>
+          <p:cNvSpPr/>
+          <p:nvPr/>
+        </p:nvSpPr>
+        <p:spPr>
+          <a:xfrm>
+            <a:off x="7191756" y="3703320"/>
+            <a:ext cx="4219956" cy="914400"/>
           </a:xfrm>
           <a:prstGeom prst="rect">
             <a:avLst/>
@@ -8171,11 +7855,11 @@
             <a:r>
               <a:rPr lang="en-US" sz="1500" b="1" dirty="0">
                 <a:solidFill>
-                  <a:srgbClr val="1E1338"/>
-                </a:solidFill>
-                <a:latin typeface="Calibri" pitchFamily="34" charset="0"/>
-                <a:ea typeface="Calibri" pitchFamily="34" charset="-122"/>
-                <a:cs typeface="Calibri" pitchFamily="34" charset="-120"/>
+                  <a:srgbClr val="461478"/>
+                </a:solidFill>
+                <a:latin typeface="Montserrat" pitchFamily="34" charset="0"/>
+                <a:ea typeface="Montserrat" pitchFamily="34" charset="-122"/>
+                <a:cs typeface="Montserrat" pitchFamily="34" charset="-120"/>
               </a:rPr>
               <a:t>Build target-account list</a:t>
             </a:r>
@@ -8185,63 +7869,58 @@
       </p:sp>
       <p:sp>
         <p:nvSpPr>
-          <p:cNvPr id="28" name="Shape 26"/>
-          <p:cNvSpPr/>
-          <p:nvPr/>
-        </p:nvSpPr>
-        <p:spPr>
-          <a:xfrm>
-            <a:off x="548640" y="5065776"/>
+          <p:cNvPr id="28" name="Shape 25"/>
+          <p:cNvSpPr/>
+          <p:nvPr/>
+        </p:nvSpPr>
+        <p:spPr>
+          <a:xfrm>
+            <a:off x="548640" y="4892040"/>
             <a:ext cx="5408676" cy="914400"/>
           </a:xfrm>
           <a:prstGeom prst="roundRect">
             <a:avLst>
-              <a:gd name="adj" fmla="val 7000"/>
+              <a:gd name="adj" fmla="val 8000"/>
             </a:avLst>
           </a:prstGeom>
           <a:solidFill>
-            <a:srgbClr val="F3F0FA"/>
+            <a:srgbClr val="ECE3F4"/>
           </a:solidFill>
-          <a:ln w="12700">
-            <a:solidFill>
-              <a:srgbClr val="C9BCE8"/>
-            </a:solidFill>
-            <a:prstDash val="solid"/>
-          </a:ln>
-        </p:spPr>
-      </p:sp>
-      <p:sp>
-        <p:nvSpPr>
-          <p:cNvPr id="29" name="Shape 27"/>
-          <p:cNvSpPr/>
-          <p:nvPr/>
-        </p:nvSpPr>
-        <p:spPr>
-          <a:xfrm>
-            <a:off x="777240" y="5271516"/>
-            <a:ext cx="502920" cy="502920"/>
+          <a:ln/>
+        </p:spPr>
+      </p:sp>
+      <p:sp>
+        <p:nvSpPr>
+          <p:cNvPr id="29" name="Shape 26"/>
+          <p:cNvSpPr/>
+          <p:nvPr/>
+        </p:nvSpPr>
+        <p:spPr>
+          <a:xfrm>
+            <a:off x="777240" y="5074920"/>
+            <a:ext cx="548640" cy="548640"/>
           </a:xfrm>
           <a:prstGeom prst="roundRect">
             <a:avLst>
-              <a:gd name="adj" fmla="val 12727"/>
+              <a:gd name="adj" fmla="val 13333"/>
             </a:avLst>
           </a:prstGeom>
           <a:solidFill>
-            <a:srgbClr val="4A3580"/>
+            <a:srgbClr val="461478"/>
           </a:solidFill>
           <a:ln/>
         </p:spPr>
       </p:sp>
       <p:sp>
         <p:nvSpPr>
-          <p:cNvPr id="30" name="Text 28"/>
-          <p:cNvSpPr/>
-          <p:nvPr/>
-        </p:nvSpPr>
-        <p:spPr>
-          <a:xfrm>
-            <a:off x="777240" y="5271516"/>
-            <a:ext cx="502920" cy="502920"/>
+          <p:cNvPr id="30" name="Text 27"/>
+          <p:cNvSpPr/>
+          <p:nvPr/>
+        </p:nvSpPr>
+        <p:spPr>
+          <a:xfrm>
+            <a:off x="777240" y="5074920"/>
+            <a:ext cx="548640" cy="548640"/>
           </a:xfrm>
           <a:prstGeom prst="rect">
             <a:avLst/>
@@ -8257,30 +7936,30 @@
               <a:buNone/>
             </a:pPr>
             <a:r>
-              <a:rPr lang="en-US" sz="1800" b="1" dirty="0">
+              <a:rPr lang="en-US" sz="2000" b="1" dirty="0">
                 <a:solidFill>
                   <a:srgbClr val="FFFFFF"/>
                 </a:solidFill>
-                <a:latin typeface="Georgia" pitchFamily="34" charset="0"/>
-                <a:ea typeface="Georgia" pitchFamily="34" charset="-122"/>
-                <a:cs typeface="Georgia" pitchFamily="34" charset="-120"/>
+                <a:latin typeface="Montserrat" pitchFamily="34" charset="0"/>
+                <a:ea typeface="Montserrat" pitchFamily="34" charset="-122"/>
+                <a:cs typeface="Montserrat" pitchFamily="34" charset="-120"/>
               </a:rPr>
               <a:t>7</a:t>
             </a:r>
-            <a:endParaRPr lang="en-US" sz="1800" dirty="0"/>
-          </a:p>
-        </p:txBody>
-      </p:sp>
-      <p:sp>
-        <p:nvSpPr>
-          <p:cNvPr id="31" name="Text 29"/>
-          <p:cNvSpPr/>
-          <p:nvPr/>
-        </p:nvSpPr>
-        <p:spPr>
-          <a:xfrm>
-            <a:off x="1463040" y="5065776"/>
-            <a:ext cx="4265676" cy="914400"/>
+            <a:endParaRPr lang="en-US" sz="2000" dirty="0"/>
+          </a:p>
+        </p:txBody>
+      </p:sp>
+      <p:sp>
+        <p:nvSpPr>
+          <p:cNvPr id="31" name="Text 28"/>
+          <p:cNvSpPr/>
+          <p:nvPr/>
+        </p:nvSpPr>
+        <p:spPr>
+          <a:xfrm>
+            <a:off x="1508760" y="4892040"/>
+            <a:ext cx="4219956" cy="914400"/>
           </a:xfrm>
           <a:prstGeom prst="rect">
             <a:avLst/>
@@ -8298,11 +7977,11 @@
             <a:r>
               <a:rPr lang="en-US" sz="1500" b="1" dirty="0">
                 <a:solidFill>
-                  <a:srgbClr val="1E1338"/>
-                </a:solidFill>
-                <a:latin typeface="Calibri" pitchFamily="34" charset="0"/>
-                <a:ea typeface="Calibri" pitchFamily="34" charset="-122"/>
-                <a:cs typeface="Calibri" pitchFamily="34" charset="-120"/>
+                  <a:srgbClr val="461478"/>
+                </a:solidFill>
+                <a:latin typeface="Montserrat" pitchFamily="34" charset="0"/>
+                <a:ea typeface="Montserrat" pitchFamily="34" charset="-122"/>
+                <a:cs typeface="Montserrat" pitchFamily="34" charset="-120"/>
               </a:rPr>
               <a:t>Define measurement model / investment case</a:t>
             </a:r>
@@ -8361,7 +8040,7 @@
     </a:clrScheme>
     <a:fontScheme name="Office">
       <a:majorFont>
-        <a:latin typeface="Calibri Light" panose="020F0302020204030204"/>
+        <a:latin typeface="Montserrat"/>
         <a:ea typeface=""/>
         <a:cs typeface=""/>
         <a:font script="Jpan" typeface="游ゴシック Light"/>
@@ -8413,7 +8092,7 @@
         <a:font script="Tfng" typeface="Ebrima"/>
       </a:majorFont>
       <a:minorFont>
-        <a:latin typeface="Calibri" panose="020F0502020204030204"/>
+        <a:latin typeface="Montserrat"/>
         <a:ea typeface=""/>
         <a:cs typeface=""/>
         <a:font script="Jpan" typeface="游ゴシック"/>
